--- a/DAMOP2026/light_scattering.pptx
+++ b/DAMOP2026/light_scattering.pptx
@@ -4,12 +4,26 @@
   <p:sldMasterIdLst>
     <p:sldMasterId id="2147483648" r:id="rId1"/>
   </p:sldMasterIdLst>
+  <p:notesMasterIdLst>
+    <p:notesMasterId r:id="rId18"/>
+  </p:notesMasterIdLst>
   <p:sldIdLst>
     <p:sldId id="256" r:id="rId2"/>
     <p:sldId id="257" r:id="rId3"/>
-    <p:sldId id="258" r:id="rId4"/>
-    <p:sldId id="259" r:id="rId5"/>
-    <p:sldId id="260" r:id="rId6"/>
+    <p:sldId id="259" r:id="rId4"/>
+    <p:sldId id="267" r:id="rId5"/>
+    <p:sldId id="258" r:id="rId6"/>
+    <p:sldId id="261" r:id="rId7"/>
+    <p:sldId id="262" r:id="rId8"/>
+    <p:sldId id="270" r:id="rId9"/>
+    <p:sldId id="263" r:id="rId10"/>
+    <p:sldId id="269" r:id="rId11"/>
+    <p:sldId id="271" r:id="rId12"/>
+    <p:sldId id="265" r:id="rId13"/>
+    <p:sldId id="272" r:id="rId14"/>
+    <p:sldId id="264" r:id="rId15"/>
+    <p:sldId id="266" r:id="rId16"/>
+    <p:sldId id="268" r:id="rId17"/>
   </p:sldIdLst>
   <p:sldSz cx="12192000" cy="6858000"/>
   <p:notesSz cx="6858000" cy="9144000"/>
@@ -111,6 +125,679 @@
 </p:presentation>
 </file>
 
+<file path=ppt/notesMasters/notesMaster1.xml><?xml version="1.0" encoding="utf-8"?>
+<p:notesMaster xmlns:a="http://schemas.openxmlformats.org/drawingml/2006/main" xmlns:r="http://schemas.openxmlformats.org/officeDocument/2006/relationships" xmlns:p="http://schemas.openxmlformats.org/presentationml/2006/main">
+  <p:cSld>
+    <p:bg>
+      <p:bgRef idx="1001">
+        <a:schemeClr val="bg1"/>
+      </p:bgRef>
+    </p:bg>
+    <p:spTree>
+      <p:nvGrpSpPr>
+        <p:cNvPr id="1" name=""/>
+        <p:cNvGrpSpPr/>
+        <p:nvPr/>
+      </p:nvGrpSpPr>
+      <p:grpSpPr>
+        <a:xfrm>
+          <a:off x="0" y="0"/>
+          <a:ext cx="0" cy="0"/>
+          <a:chOff x="0" y="0"/>
+          <a:chExt cx="0" cy="0"/>
+        </a:xfrm>
+      </p:grpSpPr>
+      <p:sp>
+        <p:nvSpPr>
+          <p:cNvPr id="2" name="Header Placeholder 1"/>
+          <p:cNvSpPr>
+            <a:spLocks noGrp="1"/>
+          </p:cNvSpPr>
+          <p:nvPr>
+            <p:ph type="hdr" sz="quarter"/>
+          </p:nvPr>
+        </p:nvSpPr>
+        <p:spPr>
+          <a:xfrm>
+            <a:off x="0" y="0"/>
+            <a:ext cx="2971800" cy="458788"/>
+          </a:xfrm>
+          <a:prstGeom prst="rect">
+            <a:avLst/>
+          </a:prstGeom>
+        </p:spPr>
+        <p:txBody>
+          <a:bodyPr vert="horz" lIns="91440" tIns="45720" rIns="91440" bIns="45720" rtlCol="0"/>
+          <a:lstStyle>
+            <a:lvl1pPr algn="l">
+              <a:defRPr sz="1200"/>
+            </a:lvl1pPr>
+          </a:lstStyle>
+          <a:p>
+            <a:endParaRPr lang="en-US"/>
+          </a:p>
+        </p:txBody>
+      </p:sp>
+      <p:sp>
+        <p:nvSpPr>
+          <p:cNvPr id="3" name="Date Placeholder 2"/>
+          <p:cNvSpPr>
+            <a:spLocks noGrp="1"/>
+          </p:cNvSpPr>
+          <p:nvPr>
+            <p:ph type="dt" idx="1"/>
+          </p:nvPr>
+        </p:nvSpPr>
+        <p:spPr>
+          <a:xfrm>
+            <a:off x="3884613" y="0"/>
+            <a:ext cx="2971800" cy="458788"/>
+          </a:xfrm>
+          <a:prstGeom prst="rect">
+            <a:avLst/>
+          </a:prstGeom>
+        </p:spPr>
+        <p:txBody>
+          <a:bodyPr vert="horz" lIns="91440" tIns="45720" rIns="91440" bIns="45720" rtlCol="0"/>
+          <a:lstStyle>
+            <a:lvl1pPr algn="r">
+              <a:defRPr sz="1200"/>
+            </a:lvl1pPr>
+          </a:lstStyle>
+          <a:p>
+            <a:fld id="{CE20C014-E8B5-4E3F-8854-C97ECEE6DF93}" type="datetimeFigureOut">
+              <a:rPr lang="en-US" smtClean="0"/>
+              <a:t>5/26/2026</a:t>
+            </a:fld>
+            <a:endParaRPr lang="en-US"/>
+          </a:p>
+        </p:txBody>
+      </p:sp>
+      <p:sp>
+        <p:nvSpPr>
+          <p:cNvPr id="4" name="Slide Image Placeholder 3"/>
+          <p:cNvSpPr>
+            <a:spLocks noGrp="1" noRot="1" noChangeAspect="1"/>
+          </p:cNvSpPr>
+          <p:nvPr>
+            <p:ph type="sldImg" idx="2"/>
+          </p:nvPr>
+        </p:nvSpPr>
+        <p:spPr>
+          <a:xfrm>
+            <a:off x="685800" y="1143000"/>
+            <a:ext cx="5486400" cy="3086100"/>
+          </a:xfrm>
+          <a:prstGeom prst="rect">
+            <a:avLst/>
+          </a:prstGeom>
+          <a:noFill/>
+          <a:ln w="12700">
+            <a:solidFill>
+              <a:prstClr val="black"/>
+            </a:solidFill>
+          </a:ln>
+        </p:spPr>
+        <p:txBody>
+          <a:bodyPr vert="horz" lIns="91440" tIns="45720" rIns="91440" bIns="45720" rtlCol="0" anchor="ctr"/>
+          <a:lstStyle/>
+          <a:p>
+            <a:endParaRPr lang="en-US"/>
+          </a:p>
+        </p:txBody>
+      </p:sp>
+      <p:sp>
+        <p:nvSpPr>
+          <p:cNvPr id="5" name="Notes Placeholder 4"/>
+          <p:cNvSpPr>
+            <a:spLocks noGrp="1"/>
+          </p:cNvSpPr>
+          <p:nvPr>
+            <p:ph type="body" sz="quarter" idx="3"/>
+          </p:nvPr>
+        </p:nvSpPr>
+        <p:spPr>
+          <a:xfrm>
+            <a:off x="685800" y="4400550"/>
+            <a:ext cx="5486400" cy="3600450"/>
+          </a:xfrm>
+          <a:prstGeom prst="rect">
+            <a:avLst/>
+          </a:prstGeom>
+        </p:spPr>
+        <p:txBody>
+          <a:bodyPr vert="horz" lIns="91440" tIns="45720" rIns="91440" bIns="45720" rtlCol="0"/>
+          <a:lstStyle/>
+          <a:p>
+            <a:pPr lvl="0"/>
+            <a:r>
+              <a:rPr lang="en-US"/>
+              <a:t>Click to edit Master text styles</a:t>
+            </a:r>
+          </a:p>
+          <a:p>
+            <a:pPr lvl="1"/>
+            <a:r>
+              <a:rPr lang="en-US"/>
+              <a:t>Second level</a:t>
+            </a:r>
+          </a:p>
+          <a:p>
+            <a:pPr lvl="2"/>
+            <a:r>
+              <a:rPr lang="en-US"/>
+              <a:t>Third level</a:t>
+            </a:r>
+          </a:p>
+          <a:p>
+            <a:pPr lvl="3"/>
+            <a:r>
+              <a:rPr lang="en-US"/>
+              <a:t>Fourth level</a:t>
+            </a:r>
+          </a:p>
+          <a:p>
+            <a:pPr lvl="4"/>
+            <a:r>
+              <a:rPr lang="en-US"/>
+              <a:t>Fifth level</a:t>
+            </a:r>
+          </a:p>
+        </p:txBody>
+      </p:sp>
+      <p:sp>
+        <p:nvSpPr>
+          <p:cNvPr id="6" name="Footer Placeholder 5"/>
+          <p:cNvSpPr>
+            <a:spLocks noGrp="1"/>
+          </p:cNvSpPr>
+          <p:nvPr>
+            <p:ph type="ftr" sz="quarter" idx="4"/>
+          </p:nvPr>
+        </p:nvSpPr>
+        <p:spPr>
+          <a:xfrm>
+            <a:off x="0" y="8685213"/>
+            <a:ext cx="2971800" cy="458787"/>
+          </a:xfrm>
+          <a:prstGeom prst="rect">
+            <a:avLst/>
+          </a:prstGeom>
+        </p:spPr>
+        <p:txBody>
+          <a:bodyPr vert="horz" lIns="91440" tIns="45720" rIns="91440" bIns="45720" rtlCol="0" anchor="b"/>
+          <a:lstStyle>
+            <a:lvl1pPr algn="l">
+              <a:defRPr sz="1200"/>
+            </a:lvl1pPr>
+          </a:lstStyle>
+          <a:p>
+            <a:endParaRPr lang="en-US"/>
+          </a:p>
+        </p:txBody>
+      </p:sp>
+      <p:sp>
+        <p:nvSpPr>
+          <p:cNvPr id="7" name="Slide Number Placeholder 6"/>
+          <p:cNvSpPr>
+            <a:spLocks noGrp="1"/>
+          </p:cNvSpPr>
+          <p:nvPr>
+            <p:ph type="sldNum" sz="quarter" idx="5"/>
+          </p:nvPr>
+        </p:nvSpPr>
+        <p:spPr>
+          <a:xfrm>
+            <a:off x="3884613" y="8685213"/>
+            <a:ext cx="2971800" cy="458787"/>
+          </a:xfrm>
+          <a:prstGeom prst="rect">
+            <a:avLst/>
+          </a:prstGeom>
+        </p:spPr>
+        <p:txBody>
+          <a:bodyPr vert="horz" lIns="91440" tIns="45720" rIns="91440" bIns="45720" rtlCol="0" anchor="b"/>
+          <a:lstStyle>
+            <a:lvl1pPr algn="r">
+              <a:defRPr sz="1200"/>
+            </a:lvl1pPr>
+          </a:lstStyle>
+          <a:p>
+            <a:fld id="{D44F5336-ED42-4855-9ABF-C7A87AACE470}" type="slidenum">
+              <a:rPr lang="en-US" smtClean="0"/>
+              <a:t>‹#›</a:t>
+            </a:fld>
+            <a:endParaRPr lang="en-US"/>
+          </a:p>
+        </p:txBody>
+      </p:sp>
+    </p:spTree>
+    <p:extLst>
+      <p:ext uri="{BB962C8B-B14F-4D97-AF65-F5344CB8AC3E}">
+        <p14:creationId xmlns:p14="http://schemas.microsoft.com/office/powerpoint/2010/main" val="2719552863"/>
+      </p:ext>
+    </p:extLst>
+  </p:cSld>
+  <p:clrMap bg1="lt1" tx1="dk1" bg2="lt2" tx2="dk2" accent1="accent1" accent2="accent2" accent3="accent3" accent4="accent4" accent5="accent5" accent6="accent6" hlink="hlink" folHlink="folHlink"/>
+  <p:notesStyle>
+    <a:lvl1pPr marL="0" algn="l" defTabSz="914400" rtl="0" eaLnBrk="1" latinLnBrk="0" hangingPunct="1">
+      <a:defRPr sz="1200" kern="1200">
+        <a:solidFill>
+          <a:schemeClr val="tx1"/>
+        </a:solidFill>
+        <a:latin typeface="+mn-lt"/>
+        <a:ea typeface="+mn-ea"/>
+        <a:cs typeface="+mn-cs"/>
+      </a:defRPr>
+    </a:lvl1pPr>
+    <a:lvl2pPr marL="457200" algn="l" defTabSz="914400" rtl="0" eaLnBrk="1" latinLnBrk="0" hangingPunct="1">
+      <a:defRPr sz="1200" kern="1200">
+        <a:solidFill>
+          <a:schemeClr val="tx1"/>
+        </a:solidFill>
+        <a:latin typeface="+mn-lt"/>
+        <a:ea typeface="+mn-ea"/>
+        <a:cs typeface="+mn-cs"/>
+      </a:defRPr>
+    </a:lvl2pPr>
+    <a:lvl3pPr marL="914400" algn="l" defTabSz="914400" rtl="0" eaLnBrk="1" latinLnBrk="0" hangingPunct="1">
+      <a:defRPr sz="1200" kern="1200">
+        <a:solidFill>
+          <a:schemeClr val="tx1"/>
+        </a:solidFill>
+        <a:latin typeface="+mn-lt"/>
+        <a:ea typeface="+mn-ea"/>
+        <a:cs typeface="+mn-cs"/>
+      </a:defRPr>
+    </a:lvl3pPr>
+    <a:lvl4pPr marL="1371600" algn="l" defTabSz="914400" rtl="0" eaLnBrk="1" latinLnBrk="0" hangingPunct="1">
+      <a:defRPr sz="1200" kern="1200">
+        <a:solidFill>
+          <a:schemeClr val="tx1"/>
+        </a:solidFill>
+        <a:latin typeface="+mn-lt"/>
+        <a:ea typeface="+mn-ea"/>
+        <a:cs typeface="+mn-cs"/>
+      </a:defRPr>
+    </a:lvl4pPr>
+    <a:lvl5pPr marL="1828800" algn="l" defTabSz="914400" rtl="0" eaLnBrk="1" latinLnBrk="0" hangingPunct="1">
+      <a:defRPr sz="1200" kern="1200">
+        <a:solidFill>
+          <a:schemeClr val="tx1"/>
+        </a:solidFill>
+        <a:latin typeface="+mn-lt"/>
+        <a:ea typeface="+mn-ea"/>
+        <a:cs typeface="+mn-cs"/>
+      </a:defRPr>
+    </a:lvl5pPr>
+    <a:lvl6pPr marL="2286000" algn="l" defTabSz="914400" rtl="0" eaLnBrk="1" latinLnBrk="0" hangingPunct="1">
+      <a:defRPr sz="1200" kern="1200">
+        <a:solidFill>
+          <a:schemeClr val="tx1"/>
+        </a:solidFill>
+        <a:latin typeface="+mn-lt"/>
+        <a:ea typeface="+mn-ea"/>
+        <a:cs typeface="+mn-cs"/>
+      </a:defRPr>
+    </a:lvl6pPr>
+    <a:lvl7pPr marL="2743200" algn="l" defTabSz="914400" rtl="0" eaLnBrk="1" latinLnBrk="0" hangingPunct="1">
+      <a:defRPr sz="1200" kern="1200">
+        <a:solidFill>
+          <a:schemeClr val="tx1"/>
+        </a:solidFill>
+        <a:latin typeface="+mn-lt"/>
+        <a:ea typeface="+mn-ea"/>
+        <a:cs typeface="+mn-cs"/>
+      </a:defRPr>
+    </a:lvl7pPr>
+    <a:lvl8pPr marL="3200400" algn="l" defTabSz="914400" rtl="0" eaLnBrk="1" latinLnBrk="0" hangingPunct="1">
+      <a:defRPr sz="1200" kern="1200">
+        <a:solidFill>
+          <a:schemeClr val="tx1"/>
+        </a:solidFill>
+        <a:latin typeface="+mn-lt"/>
+        <a:ea typeface="+mn-ea"/>
+        <a:cs typeface="+mn-cs"/>
+      </a:defRPr>
+    </a:lvl8pPr>
+    <a:lvl9pPr marL="3657600" algn="l" defTabSz="914400" rtl="0" eaLnBrk="1" latinLnBrk="0" hangingPunct="1">
+      <a:defRPr sz="1200" kern="1200">
+        <a:solidFill>
+          <a:schemeClr val="tx1"/>
+        </a:solidFill>
+        <a:latin typeface="+mn-lt"/>
+        <a:ea typeface="+mn-ea"/>
+        <a:cs typeface="+mn-cs"/>
+      </a:defRPr>
+    </a:lvl9pPr>
+  </p:notesStyle>
+</p:notesMaster>
+</file>
+
+<file path=ppt/notesSlides/notesSlide1.xml><?xml version="1.0" encoding="utf-8"?>
+<p:notes xmlns:a="http://schemas.openxmlformats.org/drawingml/2006/main" xmlns:r="http://schemas.openxmlformats.org/officeDocument/2006/relationships" xmlns:p="http://schemas.openxmlformats.org/presentationml/2006/main">
+  <p:cSld>
+    <p:spTree>
+      <p:nvGrpSpPr>
+        <p:cNvPr id="1" name=""/>
+        <p:cNvGrpSpPr/>
+        <p:nvPr/>
+      </p:nvGrpSpPr>
+      <p:grpSpPr>
+        <a:xfrm>
+          <a:off x="0" y="0"/>
+          <a:ext cx="0" cy="0"/>
+          <a:chOff x="0" y="0"/>
+          <a:chExt cx="0" cy="0"/>
+        </a:xfrm>
+      </p:grpSpPr>
+      <p:sp>
+        <p:nvSpPr>
+          <p:cNvPr id="2" name="Slide Image Placeholder 1"/>
+          <p:cNvSpPr>
+            <a:spLocks noGrp="1" noRot="1" noChangeAspect="1"/>
+          </p:cNvSpPr>
+          <p:nvPr>
+            <p:ph type="sldImg"/>
+          </p:nvPr>
+        </p:nvSpPr>
+        <p:spPr/>
+        <p:txBody>
+          <a:bodyPr/>
+          <a:lstStyle/>
+          <a:p>
+            <a:endParaRPr lang="en-US"/>
+          </a:p>
+        </p:txBody>
+      </p:sp>
+      <p:sp>
+        <p:nvSpPr>
+          <p:cNvPr id="3" name="Notes Placeholder 2"/>
+          <p:cNvSpPr>
+            <a:spLocks noGrp="1"/>
+          </p:cNvSpPr>
+          <p:nvPr>
+            <p:ph type="body" idx="1"/>
+          </p:nvPr>
+        </p:nvSpPr>
+        <p:spPr/>
+        <p:txBody>
+          <a:bodyPr/>
+          <a:lstStyle/>
+          <a:p>
+            <a:r>
+              <a:rPr lang="en-US" dirty="0"/>
+              <a:t>https://www.ambong-ambong.com/blog/health-benefits-of-watching-sunsets/</a:t>
+            </a:r>
+          </a:p>
+          <a:p>
+            <a:r>
+              <a:rPr lang="en-US" dirty="0"/>
+              <a:t>https://news.mit.edu/2025/famous-double-slit-experiment-holds-when-stripped-to-quantum-essentials-0728</a:t>
+            </a:r>
+          </a:p>
+        </p:txBody>
+      </p:sp>
+      <p:sp>
+        <p:nvSpPr>
+          <p:cNvPr id="4" name="Slide Number Placeholder 3"/>
+          <p:cNvSpPr>
+            <a:spLocks noGrp="1"/>
+          </p:cNvSpPr>
+          <p:nvPr>
+            <p:ph type="sldNum" sz="quarter" idx="5"/>
+          </p:nvPr>
+        </p:nvSpPr>
+        <p:spPr/>
+        <p:txBody>
+          <a:bodyPr/>
+          <a:lstStyle/>
+          <a:p>
+            <a:fld id="{D44F5336-ED42-4855-9ABF-C7A87AACE470}" type="slidenum">
+              <a:rPr lang="en-US" smtClean="0"/>
+              <a:t>2</a:t>
+            </a:fld>
+            <a:endParaRPr lang="en-US"/>
+          </a:p>
+        </p:txBody>
+      </p:sp>
+    </p:spTree>
+    <p:extLst>
+      <p:ext uri="{BB962C8B-B14F-4D97-AF65-F5344CB8AC3E}">
+        <p14:creationId xmlns:p14="http://schemas.microsoft.com/office/powerpoint/2010/main" val="1068273843"/>
+      </p:ext>
+    </p:extLst>
+  </p:cSld>
+  <p:clrMapOvr>
+    <a:masterClrMapping/>
+  </p:clrMapOvr>
+</p:notes>
+</file>
+
+<file path=ppt/notesSlides/notesSlide2.xml><?xml version="1.0" encoding="utf-8"?>
+<p:notes xmlns:a="http://schemas.openxmlformats.org/drawingml/2006/main" xmlns:r="http://schemas.openxmlformats.org/officeDocument/2006/relationships" xmlns:p="http://schemas.openxmlformats.org/presentationml/2006/main">
+  <p:cSld>
+    <p:spTree>
+      <p:nvGrpSpPr>
+        <p:cNvPr id="1" name=""/>
+        <p:cNvGrpSpPr/>
+        <p:nvPr/>
+      </p:nvGrpSpPr>
+      <p:grpSpPr>
+        <a:xfrm>
+          <a:off x="0" y="0"/>
+          <a:ext cx="0" cy="0"/>
+          <a:chOff x="0" y="0"/>
+          <a:chExt cx="0" cy="0"/>
+        </a:xfrm>
+      </p:grpSpPr>
+      <p:sp>
+        <p:nvSpPr>
+          <p:cNvPr id="2" name="Slide Image Placeholder 1"/>
+          <p:cNvSpPr>
+            <a:spLocks noGrp="1" noRot="1" noChangeAspect="1"/>
+          </p:cNvSpPr>
+          <p:nvPr>
+            <p:ph type="sldImg"/>
+          </p:nvPr>
+        </p:nvSpPr>
+        <p:spPr/>
+        <p:txBody>
+          <a:bodyPr/>
+          <a:lstStyle/>
+          <a:p>
+            <a:endParaRPr lang="en-US"/>
+          </a:p>
+        </p:txBody>
+      </p:sp>
+      <p:sp>
+        <p:nvSpPr>
+          <p:cNvPr id="3" name="Notes Placeholder 2"/>
+          <p:cNvSpPr>
+            <a:spLocks noGrp="1"/>
+          </p:cNvSpPr>
+          <p:nvPr>
+            <p:ph type="body" idx="1"/>
+          </p:nvPr>
+        </p:nvSpPr>
+        <p:spPr/>
+        <p:txBody>
+          <a:bodyPr/>
+          <a:lstStyle/>
+          <a:p>
+            <a:r>
+              <a:rPr lang="en-US" dirty="0"/>
+              <a:t>Coherence spectroscopy</a:t>
+            </a:r>
+          </a:p>
+          <a:p>
+            <a:r>
+              <a:rPr lang="en-US" dirty="0"/>
+              <a:t>Doesn’t matter whether in a trap or whether in free space</a:t>
+            </a:r>
+          </a:p>
+        </p:txBody>
+      </p:sp>
+      <p:sp>
+        <p:nvSpPr>
+          <p:cNvPr id="4" name="Slide Number Placeholder 3"/>
+          <p:cNvSpPr>
+            <a:spLocks noGrp="1"/>
+          </p:cNvSpPr>
+          <p:nvPr>
+            <p:ph type="sldNum" sz="quarter" idx="5"/>
+          </p:nvPr>
+        </p:nvSpPr>
+        <p:spPr/>
+        <p:txBody>
+          <a:bodyPr/>
+          <a:lstStyle/>
+          <a:p>
+            <a:fld id="{D44F5336-ED42-4855-9ABF-C7A87AACE470}" type="slidenum">
+              <a:rPr lang="en-US" smtClean="0"/>
+              <a:t>7</a:t>
+            </a:fld>
+            <a:endParaRPr lang="en-US"/>
+          </a:p>
+        </p:txBody>
+      </p:sp>
+    </p:spTree>
+    <p:extLst>
+      <p:ext uri="{BB962C8B-B14F-4D97-AF65-F5344CB8AC3E}">
+        <p14:creationId xmlns:p14="http://schemas.microsoft.com/office/powerpoint/2010/main" val="2553584313"/>
+      </p:ext>
+    </p:extLst>
+  </p:cSld>
+  <p:clrMapOvr>
+    <a:masterClrMapping/>
+  </p:clrMapOvr>
+</p:notes>
+</file>
+
+<file path=ppt/notesSlides/notesSlide3.xml><?xml version="1.0" encoding="utf-8"?>
+<p:notes xmlns:a="http://schemas.openxmlformats.org/drawingml/2006/main" xmlns:r="http://schemas.openxmlformats.org/officeDocument/2006/relationships" xmlns:p="http://schemas.openxmlformats.org/presentationml/2006/main">
+  <p:cSld>
+    <p:spTree>
+      <p:nvGrpSpPr>
+        <p:cNvPr id="1" name="">
+          <a:extLst>
+            <a:ext uri="{FF2B5EF4-FFF2-40B4-BE49-F238E27FC236}">
+              <a16:creationId xmlns:a16="http://schemas.microsoft.com/office/drawing/2014/main" id="{C355875D-7C4F-DEE1-5A33-1C45F50E77AD}"/>
+            </a:ext>
+          </a:extLst>
+        </p:cNvPr>
+        <p:cNvGrpSpPr/>
+        <p:nvPr/>
+      </p:nvGrpSpPr>
+      <p:grpSpPr>
+        <a:xfrm>
+          <a:off x="0" y="0"/>
+          <a:ext cx="0" cy="0"/>
+          <a:chOff x="0" y="0"/>
+          <a:chExt cx="0" cy="0"/>
+        </a:xfrm>
+      </p:grpSpPr>
+      <p:sp>
+        <p:nvSpPr>
+          <p:cNvPr id="2" name="Slide Image Placeholder 1">
+            <a:extLst>
+              <a:ext uri="{FF2B5EF4-FFF2-40B4-BE49-F238E27FC236}">
+                <a16:creationId xmlns:a16="http://schemas.microsoft.com/office/drawing/2014/main" id="{6D439C1D-6880-54AB-7EC4-0B3587B231E6}"/>
+              </a:ext>
+            </a:extLst>
+          </p:cNvPr>
+          <p:cNvSpPr>
+            <a:spLocks noGrp="1" noRot="1" noChangeAspect="1"/>
+          </p:cNvSpPr>
+          <p:nvPr>
+            <p:ph type="sldImg"/>
+          </p:nvPr>
+        </p:nvSpPr>
+        <p:spPr/>
+        <p:txBody>
+          <a:bodyPr/>
+          <a:lstStyle/>
+          <a:p>
+            <a:endParaRPr lang="en-US"/>
+          </a:p>
+        </p:txBody>
+      </p:sp>
+      <p:sp>
+        <p:nvSpPr>
+          <p:cNvPr id="3" name="Notes Placeholder 2">
+            <a:extLst>
+              <a:ext uri="{FF2B5EF4-FFF2-40B4-BE49-F238E27FC236}">
+                <a16:creationId xmlns:a16="http://schemas.microsoft.com/office/drawing/2014/main" id="{08969FF0-875B-C0BA-437B-2CF237A5C6B8}"/>
+              </a:ext>
+            </a:extLst>
+          </p:cNvPr>
+          <p:cNvSpPr>
+            <a:spLocks noGrp="1"/>
+          </p:cNvSpPr>
+          <p:nvPr>
+            <p:ph type="body" idx="1"/>
+          </p:nvPr>
+        </p:nvSpPr>
+        <p:spPr/>
+        <p:txBody>
+          <a:bodyPr/>
+          <a:lstStyle/>
+          <a:p>
+            <a:r>
+              <a:rPr lang="en-US" dirty="0"/>
+              <a:t>Coherence spectroscopy</a:t>
+            </a:r>
+          </a:p>
+          <a:p>
+            <a:r>
+              <a:rPr lang="en-US" dirty="0"/>
+              <a:t>Doesn’t matter whether in a trap or whether in free space</a:t>
+            </a:r>
+          </a:p>
+        </p:txBody>
+      </p:sp>
+      <p:sp>
+        <p:nvSpPr>
+          <p:cNvPr id="4" name="Slide Number Placeholder 3">
+            <a:extLst>
+              <a:ext uri="{FF2B5EF4-FFF2-40B4-BE49-F238E27FC236}">
+                <a16:creationId xmlns:a16="http://schemas.microsoft.com/office/drawing/2014/main" id="{8FE3A063-5AEE-E859-F2E0-F28857FAE39F}"/>
+              </a:ext>
+            </a:extLst>
+          </p:cNvPr>
+          <p:cNvSpPr>
+            <a:spLocks noGrp="1"/>
+          </p:cNvSpPr>
+          <p:nvPr>
+            <p:ph type="sldNum" sz="quarter" idx="5"/>
+          </p:nvPr>
+        </p:nvSpPr>
+        <p:spPr/>
+        <p:txBody>
+          <a:bodyPr/>
+          <a:lstStyle/>
+          <a:p>
+            <a:fld id="{D44F5336-ED42-4855-9ABF-C7A87AACE470}" type="slidenum">
+              <a:rPr lang="en-US" smtClean="0"/>
+              <a:t>8</a:t>
+            </a:fld>
+            <a:endParaRPr lang="en-US"/>
+          </a:p>
+        </p:txBody>
+      </p:sp>
+    </p:spTree>
+    <p:extLst>
+      <p:ext uri="{BB962C8B-B14F-4D97-AF65-F5344CB8AC3E}">
+        <p14:creationId xmlns:p14="http://schemas.microsoft.com/office/powerpoint/2010/main" val="3884701381"/>
+      </p:ext>
+    </p:extLst>
+  </p:cSld>
+  <p:clrMapOvr>
+    <a:masterClrMapping/>
+  </p:clrMapOvr>
+</p:notes>
+</file>
+
 <file path=ppt/slideLayouts/slideLayout1.xml><?xml version="1.0" encoding="utf-8"?>
 <p:sldLayout xmlns:a="http://schemas.openxmlformats.org/drawingml/2006/main" xmlns:r="http://schemas.openxmlformats.org/officeDocument/2006/relationships" xmlns:p="http://schemas.openxmlformats.org/presentationml/2006/main" type="title" preserve="1">
   <p:cSld name="Title Slide">
@@ -256,7 +943,7 @@
           <a:bodyPr/>
           <a:lstStyle/>
           <a:p>
-            <a:fld id="{3BEBBD17-9AC3-4E3B-829F-A7AE3F4131CD}" type="datetimeFigureOut">
+            <a:fld id="{BDF7CCD7-F87F-4E75-90FF-B8D20FD02CB8}" type="datetime1">
               <a:rPr lang="en-US" smtClean="0"/>
               <a:t>5/26/2026</a:t>
             </a:fld>
@@ -285,7 +972,10 @@
           <a:bodyPr/>
           <a:lstStyle/>
           <a:p>
-            <a:endParaRPr lang="en-US"/>
+            <a:r>
+              <a:rPr lang="en-US"/>
+              <a:t>Light Scattering from Closely-Spaced Atom Pairs</a:t>
+            </a:r>
           </a:p>
         </p:txBody>
       </p:sp>
@@ -454,7 +1144,7 @@
           <a:bodyPr/>
           <a:lstStyle/>
           <a:p>
-            <a:fld id="{3BEBBD17-9AC3-4E3B-829F-A7AE3F4131CD}" type="datetimeFigureOut">
+            <a:fld id="{7638B96B-B592-4796-8AFE-FCEE52462285}" type="datetime1">
               <a:rPr lang="en-US" smtClean="0"/>
               <a:t>5/26/2026</a:t>
             </a:fld>
@@ -483,7 +1173,10 @@
           <a:bodyPr/>
           <a:lstStyle/>
           <a:p>
-            <a:endParaRPr lang="en-US"/>
+            <a:r>
+              <a:rPr lang="en-US"/>
+              <a:t>Light Scattering from Closely-Spaced Atom Pairs</a:t>
+            </a:r>
           </a:p>
         </p:txBody>
       </p:sp>
@@ -662,7 +1355,7 @@
           <a:bodyPr/>
           <a:lstStyle/>
           <a:p>
-            <a:fld id="{3BEBBD17-9AC3-4E3B-829F-A7AE3F4131CD}" type="datetimeFigureOut">
+            <a:fld id="{1623B322-7255-48EB-A4F7-BBCEFE4D16D6}" type="datetime1">
               <a:rPr lang="en-US" smtClean="0"/>
               <a:t>5/26/2026</a:t>
             </a:fld>
@@ -691,7 +1384,10 @@
           <a:bodyPr/>
           <a:lstStyle/>
           <a:p>
-            <a:endParaRPr lang="en-US"/>
+            <a:r>
+              <a:rPr lang="en-US"/>
+              <a:t>Light Scattering from Closely-Spaced Atom Pairs</a:t>
+            </a:r>
           </a:p>
         </p:txBody>
       </p:sp>
@@ -860,7 +1556,7 @@
           <a:bodyPr/>
           <a:lstStyle/>
           <a:p>
-            <a:fld id="{3BEBBD17-9AC3-4E3B-829F-A7AE3F4131CD}" type="datetimeFigureOut">
+            <a:fld id="{85EDDD84-7411-4657-9048-E904991F6E19}" type="datetime1">
               <a:rPr lang="en-US" smtClean="0"/>
               <a:t>5/26/2026</a:t>
             </a:fld>
@@ -889,7 +1585,10 @@
           <a:bodyPr/>
           <a:lstStyle/>
           <a:p>
-            <a:endParaRPr lang="en-US"/>
+            <a:r>
+              <a:rPr lang="en-US"/>
+              <a:t>Light Scattering from Closely-Spaced Atom Pairs</a:t>
+            </a:r>
           </a:p>
         </p:txBody>
       </p:sp>
@@ -1135,7 +1834,7 @@
           <a:bodyPr/>
           <a:lstStyle/>
           <a:p>
-            <a:fld id="{3BEBBD17-9AC3-4E3B-829F-A7AE3F4131CD}" type="datetimeFigureOut">
+            <a:fld id="{E5FCE8E2-BE18-4D35-B449-8D3629EE1B53}" type="datetime1">
               <a:rPr lang="en-US" smtClean="0"/>
               <a:t>5/26/2026</a:t>
             </a:fld>
@@ -1164,7 +1863,10 @@
           <a:bodyPr/>
           <a:lstStyle/>
           <a:p>
-            <a:endParaRPr lang="en-US"/>
+            <a:r>
+              <a:rPr lang="en-US"/>
+              <a:t>Light Scattering from Closely-Spaced Atom Pairs</a:t>
+            </a:r>
           </a:p>
         </p:txBody>
       </p:sp>
@@ -1400,7 +2102,7 @@
           <a:bodyPr/>
           <a:lstStyle/>
           <a:p>
-            <a:fld id="{3BEBBD17-9AC3-4E3B-829F-A7AE3F4131CD}" type="datetimeFigureOut">
+            <a:fld id="{274B355D-26AC-4F4B-A64F-4DF06EE4D83C}" type="datetime1">
               <a:rPr lang="en-US" smtClean="0"/>
               <a:t>5/26/2026</a:t>
             </a:fld>
@@ -1429,7 +2131,10 @@
           <a:bodyPr/>
           <a:lstStyle/>
           <a:p>
-            <a:endParaRPr lang="en-US"/>
+            <a:r>
+              <a:rPr lang="en-US"/>
+              <a:t>Light Scattering from Closely-Spaced Atom Pairs</a:t>
+            </a:r>
           </a:p>
         </p:txBody>
       </p:sp>
@@ -1812,7 +2517,7 @@
           <a:bodyPr/>
           <a:lstStyle/>
           <a:p>
-            <a:fld id="{3BEBBD17-9AC3-4E3B-829F-A7AE3F4131CD}" type="datetimeFigureOut">
+            <a:fld id="{144A6021-E633-48F5-AB73-B00896EFA6D8}" type="datetime1">
               <a:rPr lang="en-US" smtClean="0"/>
               <a:t>5/26/2026</a:t>
             </a:fld>
@@ -1841,7 +2546,10 @@
           <a:bodyPr/>
           <a:lstStyle/>
           <a:p>
-            <a:endParaRPr lang="en-US"/>
+            <a:r>
+              <a:rPr lang="en-US"/>
+              <a:t>Light Scattering from Closely-Spaced Atom Pairs</a:t>
+            </a:r>
           </a:p>
         </p:txBody>
       </p:sp>
@@ -1953,7 +2661,7 @@
           <a:bodyPr/>
           <a:lstStyle/>
           <a:p>
-            <a:fld id="{3BEBBD17-9AC3-4E3B-829F-A7AE3F4131CD}" type="datetimeFigureOut">
+            <a:fld id="{C94D234A-3FB5-4107-ABB1-9004438D7448}" type="datetime1">
               <a:rPr lang="en-US" smtClean="0"/>
               <a:t>5/26/2026</a:t>
             </a:fld>
@@ -1982,7 +2690,10 @@
           <a:bodyPr/>
           <a:lstStyle/>
           <a:p>
-            <a:endParaRPr lang="en-US"/>
+            <a:r>
+              <a:rPr lang="en-US"/>
+              <a:t>Light Scattering from Closely-Spaced Atom Pairs</a:t>
+            </a:r>
           </a:p>
         </p:txBody>
       </p:sp>
@@ -2066,7 +2777,7 @@
           <a:bodyPr/>
           <a:lstStyle/>
           <a:p>
-            <a:fld id="{3BEBBD17-9AC3-4E3B-829F-A7AE3F4131CD}" type="datetimeFigureOut">
+            <a:fld id="{C07DA536-CE13-418B-9126-A9E7F14B7255}" type="datetime1">
               <a:rPr lang="en-US" smtClean="0"/>
               <a:t>5/26/2026</a:t>
             </a:fld>
@@ -2095,7 +2806,10 @@
           <a:bodyPr/>
           <a:lstStyle/>
           <a:p>
-            <a:endParaRPr lang="en-US"/>
+            <a:r>
+              <a:rPr lang="en-US"/>
+              <a:t>Light Scattering from Closely-Spaced Atom Pairs</a:t>
+            </a:r>
           </a:p>
         </p:txBody>
       </p:sp>
@@ -2377,7 +3091,7 @@
           <a:bodyPr/>
           <a:lstStyle/>
           <a:p>
-            <a:fld id="{3BEBBD17-9AC3-4E3B-829F-A7AE3F4131CD}" type="datetimeFigureOut">
+            <a:fld id="{522260B8-D583-4767-BC6F-DD3F56127664}" type="datetime1">
               <a:rPr lang="en-US" smtClean="0"/>
               <a:t>5/26/2026</a:t>
             </a:fld>
@@ -2406,7 +3120,10 @@
           <a:bodyPr/>
           <a:lstStyle/>
           <a:p>
-            <a:endParaRPr lang="en-US"/>
+            <a:r>
+              <a:rPr lang="en-US"/>
+              <a:t>Light Scattering from Closely-Spaced Atom Pairs</a:t>
+            </a:r>
           </a:p>
         </p:txBody>
       </p:sp>
@@ -2665,7 +3382,7 @@
           <a:bodyPr/>
           <a:lstStyle/>
           <a:p>
-            <a:fld id="{3BEBBD17-9AC3-4E3B-829F-A7AE3F4131CD}" type="datetimeFigureOut">
+            <a:fld id="{AD9DAC74-4530-4405-BC55-95C68271A4CE}" type="datetime1">
               <a:rPr lang="en-US" smtClean="0"/>
               <a:t>5/26/2026</a:t>
             </a:fld>
@@ -2694,7 +3411,10 @@
           <a:bodyPr/>
           <a:lstStyle/>
           <a:p>
-            <a:endParaRPr lang="en-US"/>
+            <a:r>
+              <a:rPr lang="en-US"/>
+              <a:t>Light Scattering from Closely-Spaced Atom Pairs</a:t>
+            </a:r>
           </a:p>
         </p:txBody>
       </p:sp>
@@ -2906,7 +3626,7 @@
             </a:lvl1pPr>
           </a:lstStyle>
           <a:p>
-            <a:fld id="{3BEBBD17-9AC3-4E3B-829F-A7AE3F4131CD}" type="datetimeFigureOut">
+            <a:fld id="{EA8C89F7-7D2F-4F6A-BE0F-97040057E9B5}" type="datetime1">
               <a:rPr lang="en-US" smtClean="0"/>
               <a:t>5/26/2026</a:t>
             </a:fld>
@@ -2953,7 +3673,10 @@
             </a:lvl1pPr>
           </a:lstStyle>
           <a:p>
-            <a:endParaRPr lang="en-US"/>
+            <a:r>
+              <a:rPr lang="en-US"/>
+              <a:t>Light Scattering from Closely-Spaced Atom Pairs</a:t>
+            </a:r>
           </a:p>
         </p:txBody>
       </p:sp>
@@ -3025,6 +3748,7 @@
     <p:sldLayoutId id="2147483658" r:id="rId10"/>
     <p:sldLayoutId id="2147483659" r:id="rId11"/>
   </p:sldLayoutIdLst>
+  <p:hf hdr="0"/>
   <p:txStyles>
     <p:titleStyle>
       <a:lvl1pPr algn="l" defTabSz="914400" rtl="0" eaLnBrk="1" latinLnBrk="0" hangingPunct="1">
@@ -3348,7 +4072,7 @@
           <a:p>
             <a:r>
               <a:rPr lang="en-US" dirty="0"/>
-              <a:t>Light scattering from closely spaced atom pairs</a:t>
+              <a:t>Light Scattering from Closely Spaced Atom Pairs</a:t>
             </a:r>
           </a:p>
         </p:txBody>
@@ -3374,14 +4098,1791 @@
           <a:bodyPr/>
           <a:lstStyle/>
           <a:p>
+            <a:r>
+              <a:rPr lang="en-US" dirty="0"/>
+              <a:t>Yoo Kyung Lee</a:t>
+            </a:r>
+          </a:p>
+          <a:p>
+            <a:r>
+              <a:rPr lang="en-US" sz="2000" dirty="0">
+                <a:solidFill>
+                  <a:schemeClr val="bg1">
+                    <a:lumMod val="50000"/>
+                  </a:schemeClr>
+                </a:solidFill>
+              </a:rPr>
+              <a:t>This work: Massachusetts Institute of Technology</a:t>
+            </a:r>
+          </a:p>
+          <a:p>
+            <a:r>
+              <a:rPr lang="en-US" sz="2000" dirty="0">
+                <a:solidFill>
+                  <a:schemeClr val="bg1">
+                    <a:lumMod val="50000"/>
+                  </a:schemeClr>
+                </a:solidFill>
+              </a:rPr>
+              <a:t>Current affiliation: Harvard University</a:t>
+            </a:r>
+            <a:endParaRPr lang="en-US" sz="1800" dirty="0">
+              <a:solidFill>
+                <a:schemeClr val="bg1">
+                  <a:lumMod val="50000"/>
+                </a:schemeClr>
+              </a:solidFill>
+            </a:endParaRPr>
+          </a:p>
+        </p:txBody>
+      </p:sp>
+      <p:sp>
+        <p:nvSpPr>
+          <p:cNvPr id="4" name="Date Placeholder 3">
+            <a:extLst>
+              <a:ext uri="{FF2B5EF4-FFF2-40B4-BE49-F238E27FC236}">
+                <a16:creationId xmlns:a16="http://schemas.microsoft.com/office/drawing/2014/main" id="{B03C14DB-0B14-7034-3849-0A9653616A1B}"/>
+              </a:ext>
+            </a:extLst>
+          </p:cNvPr>
+          <p:cNvSpPr>
+            <a:spLocks noGrp="1"/>
+          </p:cNvSpPr>
+          <p:nvPr>
+            <p:ph type="dt" sz="half" idx="10"/>
+          </p:nvPr>
+        </p:nvSpPr>
+        <p:spPr/>
+        <p:txBody>
+          <a:bodyPr/>
+          <a:lstStyle/>
+          <a:p>
+            <a:fld id="{E40E7479-5FF1-484E-8D58-1216D223D9E9}" type="datetime1">
+              <a:rPr lang="en-US" smtClean="0"/>
+              <a:t>5/26/2026</a:t>
+            </a:fld>
             <a:endParaRPr lang="en-US"/>
           </a:p>
         </p:txBody>
       </p:sp>
+      <p:sp>
+        <p:nvSpPr>
+          <p:cNvPr id="5" name="Footer Placeholder 4">
+            <a:extLst>
+              <a:ext uri="{FF2B5EF4-FFF2-40B4-BE49-F238E27FC236}">
+                <a16:creationId xmlns:a16="http://schemas.microsoft.com/office/drawing/2014/main" id="{967A5868-F40B-2857-5177-47492A2C18E3}"/>
+              </a:ext>
+            </a:extLst>
+          </p:cNvPr>
+          <p:cNvSpPr>
+            <a:spLocks noGrp="1"/>
+          </p:cNvSpPr>
+          <p:nvPr>
+            <p:ph type="ftr" sz="quarter" idx="11"/>
+          </p:nvPr>
+        </p:nvSpPr>
+        <p:spPr/>
+        <p:txBody>
+          <a:bodyPr/>
+          <a:lstStyle/>
+          <a:p>
+            <a:r>
+              <a:rPr lang="en-US"/>
+              <a:t>Light Scattering from Closely-Spaced Atom Pairs</a:t>
+            </a:r>
+          </a:p>
+        </p:txBody>
+      </p:sp>
+      <p:sp>
+        <p:nvSpPr>
+          <p:cNvPr id="6" name="Slide Number Placeholder 5">
+            <a:extLst>
+              <a:ext uri="{FF2B5EF4-FFF2-40B4-BE49-F238E27FC236}">
+                <a16:creationId xmlns:a16="http://schemas.microsoft.com/office/drawing/2014/main" id="{7836C339-88DE-FC3B-C08D-5D6E4D49D14E}"/>
+              </a:ext>
+            </a:extLst>
+          </p:cNvPr>
+          <p:cNvSpPr>
+            <a:spLocks noGrp="1"/>
+          </p:cNvSpPr>
+          <p:nvPr>
+            <p:ph type="sldNum" sz="quarter" idx="12"/>
+          </p:nvPr>
+        </p:nvSpPr>
+        <p:spPr/>
+        <p:txBody>
+          <a:bodyPr/>
+          <a:lstStyle/>
+          <a:p>
+            <a:fld id="{A18CFF8F-6617-428E-9314-96DE529C98C8}" type="slidenum">
+              <a:rPr lang="en-US" smtClean="0"/>
+              <a:t>1</a:t>
+            </a:fld>
+            <a:endParaRPr lang="en-US"/>
+          </a:p>
+        </p:txBody>
+      </p:sp>
+      <p:pic>
+        <p:nvPicPr>
+          <p:cNvPr id="8" name="Picture 7">
+            <a:extLst>
+              <a:ext uri="{FF2B5EF4-FFF2-40B4-BE49-F238E27FC236}">
+                <a16:creationId xmlns:a16="http://schemas.microsoft.com/office/drawing/2014/main" id="{0770C56A-8831-EFE4-D611-8C74195834F6}"/>
+              </a:ext>
+            </a:extLst>
+          </p:cNvPr>
+          <p:cNvPicPr>
+            <a:picLocks noChangeAspect="1"/>
+          </p:cNvPicPr>
+          <p:nvPr/>
+        </p:nvPicPr>
+        <p:blipFill>
+          <a:blip r:embed="rId2">
+            <a:extLst>
+              <a:ext uri="{28A0092B-C50C-407E-A947-70E740481C1C}">
+                <a14:useLocalDpi xmlns:a14="http://schemas.microsoft.com/office/drawing/2010/main" val="0"/>
+              </a:ext>
+            </a:extLst>
+          </a:blip>
+          <a:stretch>
+            <a:fillRect/>
+          </a:stretch>
+        </p:blipFill>
+        <p:spPr>
+          <a:xfrm>
+            <a:off x="0" y="1"/>
+            <a:ext cx="858142" cy="329608"/>
+          </a:xfrm>
+          <a:prstGeom prst="rect">
+            <a:avLst/>
+          </a:prstGeom>
+        </p:spPr>
+      </p:pic>
+      <p:pic>
+        <p:nvPicPr>
+          <p:cNvPr id="9" name="Picture 8" descr="Massachusetts Institute of Technology Logo, PNG, Symbol ...">
+            <a:extLst>
+              <a:ext uri="{FF2B5EF4-FFF2-40B4-BE49-F238E27FC236}">
+                <a16:creationId xmlns:a16="http://schemas.microsoft.com/office/drawing/2014/main" id="{B02AACEF-AFDF-48B5-C605-C35720A2CCBE}"/>
+              </a:ext>
+            </a:extLst>
+          </p:cNvPr>
+          <p:cNvPicPr>
+            <a:picLocks noChangeAspect="1"/>
+          </p:cNvPicPr>
+          <p:nvPr/>
+        </p:nvPicPr>
+        <p:blipFill>
+          <a:blip r:embed="rId3"/>
+          <a:stretch>
+            <a:fillRect/>
+          </a:stretch>
+        </p:blipFill>
+        <p:spPr>
+          <a:xfrm>
+            <a:off x="946297" y="-124993"/>
+            <a:ext cx="1031359" cy="580140"/>
+          </a:xfrm>
+          <a:prstGeom prst="rect">
+            <a:avLst/>
+          </a:prstGeom>
+        </p:spPr>
+      </p:pic>
     </p:spTree>
     <p:extLst>
       <p:ext uri="{BB962C8B-B14F-4D97-AF65-F5344CB8AC3E}">
         <p14:creationId xmlns:p14="http://schemas.microsoft.com/office/powerpoint/2010/main" val="3950847438"/>
+      </p:ext>
+    </p:extLst>
+  </p:cSld>
+  <p:clrMapOvr>
+    <a:masterClrMapping/>
+  </p:clrMapOvr>
+</p:sld>
+</file>
+
+<file path=ppt/slides/slide10.xml><?xml version="1.0" encoding="utf-8"?>
+<p:sld xmlns:a="http://schemas.openxmlformats.org/drawingml/2006/main" xmlns:r="http://schemas.openxmlformats.org/officeDocument/2006/relationships" xmlns:p="http://schemas.openxmlformats.org/presentationml/2006/main">
+  <p:cSld>
+    <p:spTree>
+      <p:nvGrpSpPr>
+        <p:cNvPr id="1" name=""/>
+        <p:cNvGrpSpPr/>
+        <p:nvPr/>
+      </p:nvGrpSpPr>
+      <p:grpSpPr>
+        <a:xfrm>
+          <a:off x="0" y="0"/>
+          <a:ext cx="0" cy="0"/>
+          <a:chOff x="0" y="0"/>
+          <a:chExt cx="0" cy="0"/>
+        </a:xfrm>
+      </p:grpSpPr>
+      <p:sp>
+        <p:nvSpPr>
+          <p:cNvPr id="2" name="Title 1">
+            <a:extLst>
+              <a:ext uri="{FF2B5EF4-FFF2-40B4-BE49-F238E27FC236}">
+                <a16:creationId xmlns:a16="http://schemas.microsoft.com/office/drawing/2014/main" id="{9FF159D9-97B1-CFBE-B0A7-75D5A4466B37}"/>
+              </a:ext>
+            </a:extLst>
+          </p:cNvPr>
+          <p:cNvSpPr>
+            <a:spLocks noGrp="1"/>
+          </p:cNvSpPr>
+          <p:nvPr>
+            <p:ph type="title"/>
+          </p:nvPr>
+        </p:nvSpPr>
+        <p:spPr/>
+        <p:txBody>
+          <a:bodyPr/>
+          <a:lstStyle/>
+          <a:p>
+            <a:r>
+              <a:rPr lang="en-US" dirty="0"/>
+              <a:t>Dicke superradiance</a:t>
+            </a:r>
+          </a:p>
+        </p:txBody>
+      </p:sp>
+      <p:sp>
+        <p:nvSpPr>
+          <p:cNvPr id="3" name="Content Placeholder 2">
+            <a:extLst>
+              <a:ext uri="{FF2B5EF4-FFF2-40B4-BE49-F238E27FC236}">
+                <a16:creationId xmlns:a16="http://schemas.microsoft.com/office/drawing/2014/main" id="{D5501525-BDF5-9841-055D-F94A5AD18567}"/>
+              </a:ext>
+            </a:extLst>
+          </p:cNvPr>
+          <p:cNvSpPr>
+            <a:spLocks noGrp="1"/>
+          </p:cNvSpPr>
+          <p:nvPr>
+            <p:ph idx="1"/>
+          </p:nvPr>
+        </p:nvSpPr>
+        <p:spPr/>
+        <p:txBody>
+          <a:bodyPr/>
+          <a:lstStyle/>
+          <a:p>
+            <a:r>
+              <a:rPr lang="en-US" dirty="0"/>
+              <a:t>N-times enhancement of light scattering</a:t>
+            </a:r>
+          </a:p>
+        </p:txBody>
+      </p:sp>
+      <p:sp>
+        <p:nvSpPr>
+          <p:cNvPr id="4" name="Date Placeholder 3">
+            <a:extLst>
+              <a:ext uri="{FF2B5EF4-FFF2-40B4-BE49-F238E27FC236}">
+                <a16:creationId xmlns:a16="http://schemas.microsoft.com/office/drawing/2014/main" id="{A71524A1-C95E-0082-09F2-7C8794DA9EEC}"/>
+              </a:ext>
+            </a:extLst>
+          </p:cNvPr>
+          <p:cNvSpPr>
+            <a:spLocks noGrp="1"/>
+          </p:cNvSpPr>
+          <p:nvPr>
+            <p:ph type="dt" sz="half" idx="10"/>
+          </p:nvPr>
+        </p:nvSpPr>
+        <p:spPr/>
+        <p:txBody>
+          <a:bodyPr/>
+          <a:lstStyle/>
+          <a:p>
+            <a:fld id="{85EDDD84-7411-4657-9048-E904991F6E19}" type="datetime1">
+              <a:rPr lang="en-US" smtClean="0"/>
+              <a:t>5/26/2026</a:t>
+            </a:fld>
+            <a:endParaRPr lang="en-US"/>
+          </a:p>
+        </p:txBody>
+      </p:sp>
+      <p:sp>
+        <p:nvSpPr>
+          <p:cNvPr id="5" name="Footer Placeholder 4">
+            <a:extLst>
+              <a:ext uri="{FF2B5EF4-FFF2-40B4-BE49-F238E27FC236}">
+                <a16:creationId xmlns:a16="http://schemas.microsoft.com/office/drawing/2014/main" id="{3C03C74F-5666-F11B-3A6D-6B7464CC43F5}"/>
+              </a:ext>
+            </a:extLst>
+          </p:cNvPr>
+          <p:cNvSpPr>
+            <a:spLocks noGrp="1"/>
+          </p:cNvSpPr>
+          <p:nvPr>
+            <p:ph type="ftr" sz="quarter" idx="11"/>
+          </p:nvPr>
+        </p:nvSpPr>
+        <p:spPr/>
+        <p:txBody>
+          <a:bodyPr/>
+          <a:lstStyle/>
+          <a:p>
+            <a:r>
+              <a:rPr lang="en-US"/>
+              <a:t>Light Scattering from Closely-Spaced Atom Pairs</a:t>
+            </a:r>
+          </a:p>
+        </p:txBody>
+      </p:sp>
+      <p:sp>
+        <p:nvSpPr>
+          <p:cNvPr id="6" name="Slide Number Placeholder 5">
+            <a:extLst>
+              <a:ext uri="{FF2B5EF4-FFF2-40B4-BE49-F238E27FC236}">
+                <a16:creationId xmlns:a16="http://schemas.microsoft.com/office/drawing/2014/main" id="{6AA18447-E9BA-34D5-6473-E72A0F8979C7}"/>
+              </a:ext>
+            </a:extLst>
+          </p:cNvPr>
+          <p:cNvSpPr>
+            <a:spLocks noGrp="1"/>
+          </p:cNvSpPr>
+          <p:nvPr>
+            <p:ph type="sldNum" sz="quarter" idx="12"/>
+          </p:nvPr>
+        </p:nvSpPr>
+        <p:spPr/>
+        <p:txBody>
+          <a:bodyPr/>
+          <a:lstStyle/>
+          <a:p>
+            <a:fld id="{A18CFF8F-6617-428E-9314-96DE529C98C8}" type="slidenum">
+              <a:rPr lang="en-US" smtClean="0"/>
+              <a:t>10</a:t>
+            </a:fld>
+            <a:endParaRPr lang="en-US"/>
+          </a:p>
+        </p:txBody>
+      </p:sp>
+      <p:pic>
+        <p:nvPicPr>
+          <p:cNvPr id="9" name="Picture 8">
+            <a:extLst>
+              <a:ext uri="{FF2B5EF4-FFF2-40B4-BE49-F238E27FC236}">
+                <a16:creationId xmlns:a16="http://schemas.microsoft.com/office/drawing/2014/main" id="{967B6932-A37B-C909-786A-11E2DF3FF9A7}"/>
+              </a:ext>
+            </a:extLst>
+          </p:cNvPr>
+          <p:cNvPicPr>
+            <a:picLocks noChangeAspect="1"/>
+          </p:cNvPicPr>
+          <p:nvPr/>
+        </p:nvPicPr>
+        <p:blipFill>
+          <a:blip r:embed="rId2"/>
+          <a:stretch>
+            <a:fillRect/>
+          </a:stretch>
+        </p:blipFill>
+        <p:spPr>
+          <a:xfrm>
+            <a:off x="2209800" y="3079363"/>
+            <a:ext cx="6904074" cy="2199931"/>
+          </a:xfrm>
+          <a:prstGeom prst="rect">
+            <a:avLst/>
+          </a:prstGeom>
+        </p:spPr>
+      </p:pic>
+    </p:spTree>
+    <p:extLst>
+      <p:ext uri="{BB962C8B-B14F-4D97-AF65-F5344CB8AC3E}">
+        <p14:creationId xmlns:p14="http://schemas.microsoft.com/office/powerpoint/2010/main" val="1592119354"/>
+      </p:ext>
+    </p:extLst>
+  </p:cSld>
+  <p:clrMapOvr>
+    <a:masterClrMapping/>
+  </p:clrMapOvr>
+</p:sld>
+</file>
+
+<file path=ppt/slides/slide11.xml><?xml version="1.0" encoding="utf-8"?>
+<p:sld xmlns:a="http://schemas.openxmlformats.org/drawingml/2006/main" xmlns:r="http://schemas.openxmlformats.org/officeDocument/2006/relationships" xmlns:p="http://schemas.openxmlformats.org/presentationml/2006/main">
+  <p:cSld>
+    <p:spTree>
+      <p:nvGrpSpPr>
+        <p:cNvPr id="1" name=""/>
+        <p:cNvGrpSpPr/>
+        <p:nvPr/>
+      </p:nvGrpSpPr>
+      <p:grpSpPr>
+        <a:xfrm>
+          <a:off x="0" y="0"/>
+          <a:ext cx="0" cy="0"/>
+          <a:chOff x="0" y="0"/>
+          <a:chExt cx="0" cy="0"/>
+        </a:xfrm>
+      </p:grpSpPr>
+      <p:sp>
+        <p:nvSpPr>
+          <p:cNvPr id="2" name="Title 1">
+            <a:extLst>
+              <a:ext uri="{FF2B5EF4-FFF2-40B4-BE49-F238E27FC236}">
+                <a16:creationId xmlns:a16="http://schemas.microsoft.com/office/drawing/2014/main" id="{D4FCC85C-3314-E3A2-5094-318832E9CD56}"/>
+              </a:ext>
+            </a:extLst>
+          </p:cNvPr>
+          <p:cNvSpPr>
+            <a:spLocks noGrp="1"/>
+          </p:cNvSpPr>
+          <p:nvPr>
+            <p:ph type="title"/>
+          </p:nvPr>
+        </p:nvSpPr>
+        <p:spPr/>
+        <p:txBody>
+          <a:bodyPr/>
+          <a:lstStyle/>
+          <a:p>
+            <a:r>
+              <a:rPr lang="en-US" dirty="0"/>
+              <a:t>Including Interactions: the Condon Region</a:t>
+            </a:r>
+          </a:p>
+        </p:txBody>
+      </p:sp>
+      <p:sp>
+        <p:nvSpPr>
+          <p:cNvPr id="3" name="Content Placeholder 2">
+            <a:extLst>
+              <a:ext uri="{FF2B5EF4-FFF2-40B4-BE49-F238E27FC236}">
+                <a16:creationId xmlns:a16="http://schemas.microsoft.com/office/drawing/2014/main" id="{0874E9DC-0C01-5785-8247-0766F84572A1}"/>
+              </a:ext>
+            </a:extLst>
+          </p:cNvPr>
+          <p:cNvSpPr>
+            <a:spLocks noGrp="1"/>
+          </p:cNvSpPr>
+          <p:nvPr>
+            <p:ph idx="1"/>
+          </p:nvPr>
+        </p:nvSpPr>
+        <p:spPr/>
+        <p:txBody>
+          <a:bodyPr/>
+          <a:lstStyle/>
+          <a:p>
+            <a:pPr marL="0" indent="0">
+              <a:buNone/>
+            </a:pPr>
+            <a:r>
+              <a:rPr lang="en-US" dirty="0"/>
+              <a:t>There is always some fraction of resonant scattering due to the dipole-dipole shift</a:t>
+            </a:r>
+          </a:p>
+        </p:txBody>
+      </p:sp>
+      <p:sp>
+        <p:nvSpPr>
+          <p:cNvPr id="4" name="Date Placeholder 3">
+            <a:extLst>
+              <a:ext uri="{FF2B5EF4-FFF2-40B4-BE49-F238E27FC236}">
+                <a16:creationId xmlns:a16="http://schemas.microsoft.com/office/drawing/2014/main" id="{93DC725F-5A76-13A8-28F9-E339325C9B9E}"/>
+              </a:ext>
+            </a:extLst>
+          </p:cNvPr>
+          <p:cNvSpPr>
+            <a:spLocks noGrp="1"/>
+          </p:cNvSpPr>
+          <p:nvPr>
+            <p:ph type="dt" sz="half" idx="10"/>
+          </p:nvPr>
+        </p:nvSpPr>
+        <p:spPr/>
+        <p:txBody>
+          <a:bodyPr/>
+          <a:lstStyle/>
+          <a:p>
+            <a:fld id="{85EDDD84-7411-4657-9048-E904991F6E19}" type="datetime1">
+              <a:rPr lang="en-US" smtClean="0"/>
+              <a:t>5/26/2026</a:t>
+            </a:fld>
+            <a:endParaRPr lang="en-US"/>
+          </a:p>
+        </p:txBody>
+      </p:sp>
+      <p:sp>
+        <p:nvSpPr>
+          <p:cNvPr id="5" name="Footer Placeholder 4">
+            <a:extLst>
+              <a:ext uri="{FF2B5EF4-FFF2-40B4-BE49-F238E27FC236}">
+                <a16:creationId xmlns:a16="http://schemas.microsoft.com/office/drawing/2014/main" id="{D425159B-2D0F-AA5C-0E6B-32A8389A8D09}"/>
+              </a:ext>
+            </a:extLst>
+          </p:cNvPr>
+          <p:cNvSpPr>
+            <a:spLocks noGrp="1"/>
+          </p:cNvSpPr>
+          <p:nvPr>
+            <p:ph type="ftr" sz="quarter" idx="11"/>
+          </p:nvPr>
+        </p:nvSpPr>
+        <p:spPr/>
+        <p:txBody>
+          <a:bodyPr/>
+          <a:lstStyle/>
+          <a:p>
+            <a:r>
+              <a:rPr lang="en-US"/>
+              <a:t>Light Scattering from Closely-Spaced Atom Pairs</a:t>
+            </a:r>
+          </a:p>
+        </p:txBody>
+      </p:sp>
+      <p:sp>
+        <p:nvSpPr>
+          <p:cNvPr id="6" name="Slide Number Placeholder 5">
+            <a:extLst>
+              <a:ext uri="{FF2B5EF4-FFF2-40B4-BE49-F238E27FC236}">
+                <a16:creationId xmlns:a16="http://schemas.microsoft.com/office/drawing/2014/main" id="{165A449E-E068-E36A-20A9-BEA5074C05A1}"/>
+              </a:ext>
+            </a:extLst>
+          </p:cNvPr>
+          <p:cNvSpPr>
+            <a:spLocks noGrp="1"/>
+          </p:cNvSpPr>
+          <p:nvPr>
+            <p:ph type="sldNum" sz="quarter" idx="12"/>
+          </p:nvPr>
+        </p:nvSpPr>
+        <p:spPr/>
+        <p:txBody>
+          <a:bodyPr/>
+          <a:lstStyle/>
+          <a:p>
+            <a:fld id="{A18CFF8F-6617-428E-9314-96DE529C98C8}" type="slidenum">
+              <a:rPr lang="en-US" smtClean="0"/>
+              <a:t>11</a:t>
+            </a:fld>
+            <a:endParaRPr lang="en-US"/>
+          </a:p>
+        </p:txBody>
+      </p:sp>
+      <p:pic>
+        <p:nvPicPr>
+          <p:cNvPr id="9" name="Picture 8">
+            <a:extLst>
+              <a:ext uri="{FF2B5EF4-FFF2-40B4-BE49-F238E27FC236}">
+                <a16:creationId xmlns:a16="http://schemas.microsoft.com/office/drawing/2014/main" id="{4FB8BC85-0318-49C1-EB4E-6A1201877B3E}"/>
+              </a:ext>
+            </a:extLst>
+          </p:cNvPr>
+          <p:cNvPicPr>
+            <a:picLocks noChangeAspect="1"/>
+          </p:cNvPicPr>
+          <p:nvPr/>
+        </p:nvPicPr>
+        <p:blipFill>
+          <a:blip r:embed="rId2"/>
+          <a:stretch>
+            <a:fillRect/>
+          </a:stretch>
+        </p:blipFill>
+        <p:spPr>
+          <a:xfrm>
+            <a:off x="3909966" y="3084488"/>
+            <a:ext cx="3652017" cy="2959394"/>
+          </a:xfrm>
+          <a:prstGeom prst="rect">
+            <a:avLst/>
+          </a:prstGeom>
+        </p:spPr>
+      </p:pic>
+      <p:pic>
+        <p:nvPicPr>
+          <p:cNvPr id="11" name="Picture 10">
+            <a:extLst>
+              <a:ext uri="{FF2B5EF4-FFF2-40B4-BE49-F238E27FC236}">
+                <a16:creationId xmlns:a16="http://schemas.microsoft.com/office/drawing/2014/main" id="{5A5D43E9-6045-F06C-4810-64A39BA9EF84}"/>
+              </a:ext>
+            </a:extLst>
+          </p:cNvPr>
+          <p:cNvPicPr>
+            <a:picLocks noChangeAspect="1"/>
+          </p:cNvPicPr>
+          <p:nvPr/>
+        </p:nvPicPr>
+        <p:blipFill>
+          <a:blip r:embed="rId3"/>
+          <a:stretch>
+            <a:fillRect/>
+          </a:stretch>
+        </p:blipFill>
+        <p:spPr>
+          <a:xfrm>
+            <a:off x="7706798" y="2988926"/>
+            <a:ext cx="3647002" cy="3054956"/>
+          </a:xfrm>
+          <a:prstGeom prst="rect">
+            <a:avLst/>
+          </a:prstGeom>
+        </p:spPr>
+      </p:pic>
+      <p:pic>
+        <p:nvPicPr>
+          <p:cNvPr id="8" name="Picture 7">
+            <a:extLst>
+              <a:ext uri="{FF2B5EF4-FFF2-40B4-BE49-F238E27FC236}">
+                <a16:creationId xmlns:a16="http://schemas.microsoft.com/office/drawing/2014/main" id="{5961A2BA-205C-6459-49A8-60D1176A2571}"/>
+              </a:ext>
+            </a:extLst>
+          </p:cNvPr>
+          <p:cNvPicPr>
+            <a:picLocks noChangeAspect="1"/>
+          </p:cNvPicPr>
+          <p:nvPr/>
+        </p:nvPicPr>
+        <p:blipFill>
+          <a:blip r:embed="rId4"/>
+          <a:stretch>
+            <a:fillRect/>
+          </a:stretch>
+        </p:blipFill>
+        <p:spPr>
+          <a:xfrm>
+            <a:off x="754912" y="2988926"/>
+            <a:ext cx="2607482" cy="2959395"/>
+          </a:xfrm>
+          <a:prstGeom prst="rect">
+            <a:avLst/>
+          </a:prstGeom>
+        </p:spPr>
+      </p:pic>
+    </p:spTree>
+    <p:extLst>
+      <p:ext uri="{BB962C8B-B14F-4D97-AF65-F5344CB8AC3E}">
+        <p14:creationId xmlns:p14="http://schemas.microsoft.com/office/powerpoint/2010/main" val="2880988263"/>
+      </p:ext>
+    </p:extLst>
+  </p:cSld>
+  <p:clrMapOvr>
+    <a:masterClrMapping/>
+  </p:clrMapOvr>
+</p:sld>
+</file>
+
+<file path=ppt/slides/slide12.xml><?xml version="1.0" encoding="utf-8"?>
+<p:sld xmlns:a="http://schemas.openxmlformats.org/drawingml/2006/main" xmlns:r="http://schemas.openxmlformats.org/officeDocument/2006/relationships" xmlns:p="http://schemas.openxmlformats.org/presentationml/2006/main">
+  <p:cSld>
+    <p:spTree>
+      <p:nvGrpSpPr>
+        <p:cNvPr id="1" name=""/>
+        <p:cNvGrpSpPr/>
+        <p:nvPr/>
+      </p:nvGrpSpPr>
+      <p:grpSpPr>
+        <a:xfrm>
+          <a:off x="0" y="0"/>
+          <a:ext cx="0" cy="0"/>
+          <a:chOff x="0" y="0"/>
+          <a:chExt cx="0" cy="0"/>
+        </a:xfrm>
+      </p:grpSpPr>
+      <p:sp>
+        <p:nvSpPr>
+          <p:cNvPr id="2" name="Title 1">
+            <a:extLst>
+              <a:ext uri="{FF2B5EF4-FFF2-40B4-BE49-F238E27FC236}">
+                <a16:creationId xmlns:a16="http://schemas.microsoft.com/office/drawing/2014/main" id="{EE8F052D-9D14-751C-5A6C-965D31CE753B}"/>
+              </a:ext>
+            </a:extLst>
+          </p:cNvPr>
+          <p:cNvSpPr>
+            <a:spLocks noGrp="1"/>
+          </p:cNvSpPr>
+          <p:nvPr>
+            <p:ph type="title"/>
+          </p:nvPr>
+        </p:nvSpPr>
+        <p:spPr/>
+        <p:txBody>
+          <a:bodyPr/>
+          <a:lstStyle/>
+          <a:p>
+            <a:r>
+              <a:rPr lang="en-US" dirty="0"/>
+              <a:t>Resonantly ejected atoms</a:t>
+            </a:r>
+          </a:p>
+        </p:txBody>
+      </p:sp>
+      <p:sp>
+        <p:nvSpPr>
+          <p:cNvPr id="3" name="Content Placeholder 2">
+            <a:extLst>
+              <a:ext uri="{FF2B5EF4-FFF2-40B4-BE49-F238E27FC236}">
+                <a16:creationId xmlns:a16="http://schemas.microsoft.com/office/drawing/2014/main" id="{9F1E6044-C0BD-835A-D624-1F4A62E0C84E}"/>
+              </a:ext>
+            </a:extLst>
+          </p:cNvPr>
+          <p:cNvSpPr>
+            <a:spLocks noGrp="1"/>
+          </p:cNvSpPr>
+          <p:nvPr>
+            <p:ph idx="1"/>
+          </p:nvPr>
+        </p:nvSpPr>
+        <p:spPr/>
+        <p:txBody>
+          <a:bodyPr>
+            <a:normAutofit/>
+          </a:bodyPr>
+          <a:lstStyle/>
+          <a:p>
+            <a:pPr marL="0" indent="0">
+              <a:buNone/>
+            </a:pPr>
+            <a:r>
+              <a:rPr lang="en-US" sz="2400" dirty="0"/>
+              <a:t>Fluorescence imaging after time-of-flight for different detuning</a:t>
+            </a:r>
+          </a:p>
+        </p:txBody>
+      </p:sp>
+      <p:sp>
+        <p:nvSpPr>
+          <p:cNvPr id="4" name="Date Placeholder 3">
+            <a:extLst>
+              <a:ext uri="{FF2B5EF4-FFF2-40B4-BE49-F238E27FC236}">
+                <a16:creationId xmlns:a16="http://schemas.microsoft.com/office/drawing/2014/main" id="{17F64A94-7649-4E44-0684-0CF06550EC48}"/>
+              </a:ext>
+            </a:extLst>
+          </p:cNvPr>
+          <p:cNvSpPr>
+            <a:spLocks noGrp="1"/>
+          </p:cNvSpPr>
+          <p:nvPr>
+            <p:ph type="dt" sz="half" idx="10"/>
+          </p:nvPr>
+        </p:nvSpPr>
+        <p:spPr/>
+        <p:txBody>
+          <a:bodyPr/>
+          <a:lstStyle/>
+          <a:p>
+            <a:fld id="{AED200CB-327C-4CFF-AB9A-166E0F118EC0}" type="datetime1">
+              <a:rPr lang="en-US" smtClean="0"/>
+              <a:t>5/26/2026</a:t>
+            </a:fld>
+            <a:endParaRPr lang="en-US"/>
+          </a:p>
+        </p:txBody>
+      </p:sp>
+      <p:sp>
+        <p:nvSpPr>
+          <p:cNvPr id="5" name="Footer Placeholder 4">
+            <a:extLst>
+              <a:ext uri="{FF2B5EF4-FFF2-40B4-BE49-F238E27FC236}">
+                <a16:creationId xmlns:a16="http://schemas.microsoft.com/office/drawing/2014/main" id="{F231F46A-2F78-0D75-F0F2-0997CA7B7086}"/>
+              </a:ext>
+            </a:extLst>
+          </p:cNvPr>
+          <p:cNvSpPr>
+            <a:spLocks noGrp="1"/>
+          </p:cNvSpPr>
+          <p:nvPr>
+            <p:ph type="ftr" sz="quarter" idx="11"/>
+          </p:nvPr>
+        </p:nvSpPr>
+        <p:spPr/>
+        <p:txBody>
+          <a:bodyPr/>
+          <a:lstStyle/>
+          <a:p>
+            <a:r>
+              <a:rPr lang="en-US" dirty="0"/>
+              <a:t>Light Scattering from Closely-Spaced Atom Pairs</a:t>
+            </a:r>
+          </a:p>
+        </p:txBody>
+      </p:sp>
+      <p:sp>
+        <p:nvSpPr>
+          <p:cNvPr id="6" name="Slide Number Placeholder 5">
+            <a:extLst>
+              <a:ext uri="{FF2B5EF4-FFF2-40B4-BE49-F238E27FC236}">
+                <a16:creationId xmlns:a16="http://schemas.microsoft.com/office/drawing/2014/main" id="{94464D4E-6040-76A1-D0DF-2A6E581D8B17}"/>
+              </a:ext>
+            </a:extLst>
+          </p:cNvPr>
+          <p:cNvSpPr>
+            <a:spLocks noGrp="1"/>
+          </p:cNvSpPr>
+          <p:nvPr>
+            <p:ph type="sldNum" sz="quarter" idx="12"/>
+          </p:nvPr>
+        </p:nvSpPr>
+        <p:spPr/>
+        <p:txBody>
+          <a:bodyPr/>
+          <a:lstStyle/>
+          <a:p>
+            <a:fld id="{A18CFF8F-6617-428E-9314-96DE529C98C8}" type="slidenum">
+              <a:rPr lang="en-US" smtClean="0"/>
+              <a:t>12</a:t>
+            </a:fld>
+            <a:endParaRPr lang="en-US"/>
+          </a:p>
+        </p:txBody>
+      </p:sp>
+      <p:pic>
+        <p:nvPicPr>
+          <p:cNvPr id="12" name="Picture 11">
+            <a:extLst>
+              <a:ext uri="{FF2B5EF4-FFF2-40B4-BE49-F238E27FC236}">
+                <a16:creationId xmlns:a16="http://schemas.microsoft.com/office/drawing/2014/main" id="{B1CB6B07-4FCF-AA53-604C-EC164106EEB8}"/>
+              </a:ext>
+            </a:extLst>
+          </p:cNvPr>
+          <p:cNvPicPr>
+            <a:picLocks noChangeAspect="1"/>
+          </p:cNvPicPr>
+          <p:nvPr/>
+        </p:nvPicPr>
+        <p:blipFill>
+          <a:blip r:embed="rId2"/>
+          <a:stretch>
+            <a:fillRect/>
+          </a:stretch>
+        </p:blipFill>
+        <p:spPr>
+          <a:xfrm>
+            <a:off x="2866446" y="2226030"/>
+            <a:ext cx="5744154" cy="4130320"/>
+          </a:xfrm>
+          <a:prstGeom prst="rect">
+            <a:avLst/>
+          </a:prstGeom>
+        </p:spPr>
+      </p:pic>
+      <p:pic>
+        <p:nvPicPr>
+          <p:cNvPr id="14" name="Picture 13">
+            <a:extLst>
+              <a:ext uri="{FF2B5EF4-FFF2-40B4-BE49-F238E27FC236}">
+                <a16:creationId xmlns:a16="http://schemas.microsoft.com/office/drawing/2014/main" id="{41717294-88A3-DA90-46F6-840025601D0D}"/>
+              </a:ext>
+            </a:extLst>
+          </p:cNvPr>
+          <p:cNvPicPr>
+            <a:picLocks noChangeAspect="1"/>
+          </p:cNvPicPr>
+          <p:nvPr/>
+        </p:nvPicPr>
+        <p:blipFill>
+          <a:blip r:embed="rId3"/>
+          <a:stretch>
+            <a:fillRect/>
+          </a:stretch>
+        </p:blipFill>
+        <p:spPr>
+          <a:xfrm>
+            <a:off x="8986284" y="2349703"/>
+            <a:ext cx="2367516" cy="3303181"/>
+          </a:xfrm>
+          <a:prstGeom prst="rect">
+            <a:avLst/>
+          </a:prstGeom>
+        </p:spPr>
+      </p:pic>
+      <p:pic>
+        <p:nvPicPr>
+          <p:cNvPr id="15" name="Picture 14">
+            <a:extLst>
+              <a:ext uri="{FF2B5EF4-FFF2-40B4-BE49-F238E27FC236}">
+                <a16:creationId xmlns:a16="http://schemas.microsoft.com/office/drawing/2014/main" id="{F5BBFD83-4E9D-305F-E0AD-3F28AD76F696}"/>
+              </a:ext>
+            </a:extLst>
+          </p:cNvPr>
+          <p:cNvPicPr>
+            <a:picLocks noChangeAspect="1"/>
+          </p:cNvPicPr>
+          <p:nvPr/>
+        </p:nvPicPr>
+        <p:blipFill>
+          <a:blip r:embed="rId4"/>
+          <a:stretch>
+            <a:fillRect/>
+          </a:stretch>
+        </p:blipFill>
+        <p:spPr>
+          <a:xfrm>
+            <a:off x="441251" y="2975153"/>
+            <a:ext cx="2114359" cy="2399719"/>
+          </a:xfrm>
+          <a:prstGeom prst="rect">
+            <a:avLst/>
+          </a:prstGeom>
+        </p:spPr>
+      </p:pic>
+    </p:spTree>
+    <p:extLst>
+      <p:ext uri="{BB962C8B-B14F-4D97-AF65-F5344CB8AC3E}">
+        <p14:creationId xmlns:p14="http://schemas.microsoft.com/office/powerpoint/2010/main" val="3227236453"/>
+      </p:ext>
+    </p:extLst>
+  </p:cSld>
+  <p:clrMapOvr>
+    <a:masterClrMapping/>
+  </p:clrMapOvr>
+</p:sld>
+</file>
+
+<file path=ppt/slides/slide13.xml><?xml version="1.0" encoding="utf-8"?>
+<p:sld xmlns:a="http://schemas.openxmlformats.org/drawingml/2006/main" xmlns:r="http://schemas.openxmlformats.org/officeDocument/2006/relationships" xmlns:p="http://schemas.openxmlformats.org/presentationml/2006/main">
+  <p:cSld>
+    <p:spTree>
+      <p:nvGrpSpPr>
+        <p:cNvPr id="1" name=""/>
+        <p:cNvGrpSpPr/>
+        <p:nvPr/>
+      </p:nvGrpSpPr>
+      <p:grpSpPr>
+        <a:xfrm>
+          <a:off x="0" y="0"/>
+          <a:ext cx="0" cy="0"/>
+          <a:chOff x="0" y="0"/>
+          <a:chExt cx="0" cy="0"/>
+        </a:xfrm>
+      </p:grpSpPr>
+      <p:sp>
+        <p:nvSpPr>
+          <p:cNvPr id="2" name="Title 1">
+            <a:extLst>
+              <a:ext uri="{FF2B5EF4-FFF2-40B4-BE49-F238E27FC236}">
+                <a16:creationId xmlns:a16="http://schemas.microsoft.com/office/drawing/2014/main" id="{C071D85A-599E-A8AB-C4B4-835FD194E541}"/>
+              </a:ext>
+            </a:extLst>
+          </p:cNvPr>
+          <p:cNvSpPr>
+            <a:spLocks noGrp="1"/>
+          </p:cNvSpPr>
+          <p:nvPr>
+            <p:ph type="title"/>
+          </p:nvPr>
+        </p:nvSpPr>
+        <p:spPr/>
+        <p:txBody>
+          <a:bodyPr/>
+          <a:lstStyle/>
+          <a:p>
+            <a:r>
+              <a:rPr lang="en-US" dirty="0"/>
+              <a:t>Pulse duration</a:t>
+            </a:r>
+          </a:p>
+        </p:txBody>
+      </p:sp>
+      <p:sp>
+        <p:nvSpPr>
+          <p:cNvPr id="3" name="Content Placeholder 2">
+            <a:extLst>
+              <a:ext uri="{FF2B5EF4-FFF2-40B4-BE49-F238E27FC236}">
+                <a16:creationId xmlns:a16="http://schemas.microsoft.com/office/drawing/2014/main" id="{61237EAA-7ED2-FDE9-DE9E-8D662B0B08CC}"/>
+              </a:ext>
+            </a:extLst>
+          </p:cNvPr>
+          <p:cNvSpPr>
+            <a:spLocks noGrp="1"/>
+          </p:cNvSpPr>
+          <p:nvPr>
+            <p:ph idx="1"/>
+          </p:nvPr>
+        </p:nvSpPr>
+        <p:spPr/>
+        <p:txBody>
+          <a:bodyPr>
+            <a:normAutofit/>
+          </a:bodyPr>
+          <a:lstStyle/>
+          <a:p>
+            <a:r>
+              <a:rPr lang="en-US" sz="2400" dirty="0"/>
+              <a:t>Various pulse duration shows the fraction of resonantly ejected atoms increases, but Condon region is depleted faster than it is filled</a:t>
+            </a:r>
+          </a:p>
+        </p:txBody>
+      </p:sp>
+      <p:sp>
+        <p:nvSpPr>
+          <p:cNvPr id="4" name="Date Placeholder 3">
+            <a:extLst>
+              <a:ext uri="{FF2B5EF4-FFF2-40B4-BE49-F238E27FC236}">
+                <a16:creationId xmlns:a16="http://schemas.microsoft.com/office/drawing/2014/main" id="{9E61D475-B77B-1622-3F7F-45217CA2D75C}"/>
+              </a:ext>
+            </a:extLst>
+          </p:cNvPr>
+          <p:cNvSpPr>
+            <a:spLocks noGrp="1"/>
+          </p:cNvSpPr>
+          <p:nvPr>
+            <p:ph type="dt" sz="half" idx="10"/>
+          </p:nvPr>
+        </p:nvSpPr>
+        <p:spPr/>
+        <p:txBody>
+          <a:bodyPr/>
+          <a:lstStyle/>
+          <a:p>
+            <a:fld id="{85EDDD84-7411-4657-9048-E904991F6E19}" type="datetime1">
+              <a:rPr lang="en-US" smtClean="0"/>
+              <a:t>5/26/2026</a:t>
+            </a:fld>
+            <a:endParaRPr lang="en-US"/>
+          </a:p>
+        </p:txBody>
+      </p:sp>
+      <p:sp>
+        <p:nvSpPr>
+          <p:cNvPr id="5" name="Footer Placeholder 4">
+            <a:extLst>
+              <a:ext uri="{FF2B5EF4-FFF2-40B4-BE49-F238E27FC236}">
+                <a16:creationId xmlns:a16="http://schemas.microsoft.com/office/drawing/2014/main" id="{721EA7C4-D02B-1C12-A196-BB89B7321CFF}"/>
+              </a:ext>
+            </a:extLst>
+          </p:cNvPr>
+          <p:cNvSpPr>
+            <a:spLocks noGrp="1"/>
+          </p:cNvSpPr>
+          <p:nvPr>
+            <p:ph type="ftr" sz="quarter" idx="11"/>
+          </p:nvPr>
+        </p:nvSpPr>
+        <p:spPr/>
+        <p:txBody>
+          <a:bodyPr/>
+          <a:lstStyle/>
+          <a:p>
+            <a:r>
+              <a:rPr lang="en-US"/>
+              <a:t>Light Scattering from Closely-Spaced Atom Pairs</a:t>
+            </a:r>
+          </a:p>
+        </p:txBody>
+      </p:sp>
+      <p:sp>
+        <p:nvSpPr>
+          <p:cNvPr id="6" name="Slide Number Placeholder 5">
+            <a:extLst>
+              <a:ext uri="{FF2B5EF4-FFF2-40B4-BE49-F238E27FC236}">
+                <a16:creationId xmlns:a16="http://schemas.microsoft.com/office/drawing/2014/main" id="{60DB454A-AF89-8008-57B9-584173B6A0AA}"/>
+              </a:ext>
+            </a:extLst>
+          </p:cNvPr>
+          <p:cNvSpPr>
+            <a:spLocks noGrp="1"/>
+          </p:cNvSpPr>
+          <p:nvPr>
+            <p:ph type="sldNum" sz="quarter" idx="12"/>
+          </p:nvPr>
+        </p:nvSpPr>
+        <p:spPr/>
+        <p:txBody>
+          <a:bodyPr/>
+          <a:lstStyle/>
+          <a:p>
+            <a:fld id="{A18CFF8F-6617-428E-9314-96DE529C98C8}" type="slidenum">
+              <a:rPr lang="en-US" smtClean="0"/>
+              <a:t>13</a:t>
+            </a:fld>
+            <a:endParaRPr lang="en-US"/>
+          </a:p>
+        </p:txBody>
+      </p:sp>
+      <p:pic>
+        <p:nvPicPr>
+          <p:cNvPr id="9" name="Picture 8">
+            <a:extLst>
+              <a:ext uri="{FF2B5EF4-FFF2-40B4-BE49-F238E27FC236}">
+                <a16:creationId xmlns:a16="http://schemas.microsoft.com/office/drawing/2014/main" id="{65763439-6DA8-61EC-AB0C-B5274A870F18}"/>
+              </a:ext>
+            </a:extLst>
+          </p:cNvPr>
+          <p:cNvPicPr>
+            <a:picLocks noChangeAspect="1"/>
+          </p:cNvPicPr>
+          <p:nvPr/>
+        </p:nvPicPr>
+        <p:blipFill>
+          <a:blip r:embed="rId2">
+            <a:extLst>
+              <a:ext uri="{28A0092B-C50C-407E-A947-70E740481C1C}">
+                <a14:useLocalDpi xmlns:a14="http://schemas.microsoft.com/office/drawing/2010/main" val="0"/>
+              </a:ext>
+            </a:extLst>
+          </a:blip>
+          <a:stretch>
+            <a:fillRect/>
+          </a:stretch>
+        </p:blipFill>
+        <p:spPr>
+          <a:xfrm>
+            <a:off x="2094614" y="2980745"/>
+            <a:ext cx="8002772" cy="2892839"/>
+          </a:xfrm>
+          <a:prstGeom prst="rect">
+            <a:avLst/>
+          </a:prstGeom>
+        </p:spPr>
+      </p:pic>
+    </p:spTree>
+    <p:extLst>
+      <p:ext uri="{BB962C8B-B14F-4D97-AF65-F5344CB8AC3E}">
+        <p14:creationId xmlns:p14="http://schemas.microsoft.com/office/powerpoint/2010/main" val="449783393"/>
+      </p:ext>
+    </p:extLst>
+  </p:cSld>
+  <p:clrMapOvr>
+    <a:masterClrMapping/>
+  </p:clrMapOvr>
+</p:sld>
+</file>
+
+<file path=ppt/slides/slide14.xml><?xml version="1.0" encoding="utf-8"?>
+<p:sld xmlns:a="http://schemas.openxmlformats.org/drawingml/2006/main" xmlns:r="http://schemas.openxmlformats.org/officeDocument/2006/relationships" xmlns:p="http://schemas.openxmlformats.org/presentationml/2006/main">
+  <p:cSld>
+    <p:spTree>
+      <p:nvGrpSpPr>
+        <p:cNvPr id="1" name=""/>
+        <p:cNvGrpSpPr/>
+        <p:nvPr/>
+      </p:nvGrpSpPr>
+      <p:grpSpPr>
+        <a:xfrm>
+          <a:off x="0" y="0"/>
+          <a:ext cx="0" cy="0"/>
+          <a:chOff x="0" y="0"/>
+          <a:chExt cx="0" cy="0"/>
+        </a:xfrm>
+      </p:grpSpPr>
+      <p:sp>
+        <p:nvSpPr>
+          <p:cNvPr id="2" name="Title 1">
+            <a:extLst>
+              <a:ext uri="{FF2B5EF4-FFF2-40B4-BE49-F238E27FC236}">
+                <a16:creationId xmlns:a16="http://schemas.microsoft.com/office/drawing/2014/main" id="{02F8746D-72C4-3C3F-1205-B5C94551C44E}"/>
+              </a:ext>
+            </a:extLst>
+          </p:cNvPr>
+          <p:cNvSpPr>
+            <a:spLocks noGrp="1"/>
+          </p:cNvSpPr>
+          <p:nvPr>
+            <p:ph type="title"/>
+          </p:nvPr>
+        </p:nvSpPr>
+        <p:spPr/>
+        <p:txBody>
+          <a:bodyPr/>
+          <a:lstStyle/>
+          <a:p>
+            <a:r>
+              <a:rPr lang="en-US" dirty="0"/>
+              <a:t>Altering Wavefunction with Scattering Length</a:t>
+            </a:r>
+          </a:p>
+        </p:txBody>
+      </p:sp>
+      <p:sp>
+        <p:nvSpPr>
+          <p:cNvPr id="3" name="Content Placeholder 2">
+            <a:extLst>
+              <a:ext uri="{FF2B5EF4-FFF2-40B4-BE49-F238E27FC236}">
+                <a16:creationId xmlns:a16="http://schemas.microsoft.com/office/drawing/2014/main" id="{C416534E-3BDF-C4D2-BBE4-E44E4C26E82D}"/>
+              </a:ext>
+            </a:extLst>
+          </p:cNvPr>
+          <p:cNvSpPr>
+            <a:spLocks noGrp="1"/>
+          </p:cNvSpPr>
+          <p:nvPr>
+            <p:ph idx="1"/>
+          </p:nvPr>
+        </p:nvSpPr>
+        <p:spPr/>
+        <p:txBody>
+          <a:bodyPr/>
+          <a:lstStyle/>
+          <a:p>
+            <a:pPr marL="0" indent="0">
+              <a:buNone/>
+            </a:pPr>
+            <a:r>
+              <a:rPr lang="en-US" dirty="0"/>
+              <a:t>Scattering length changes two-particle wavefunction</a:t>
+            </a:r>
+          </a:p>
+        </p:txBody>
+      </p:sp>
+      <p:sp>
+        <p:nvSpPr>
+          <p:cNvPr id="4" name="Date Placeholder 3">
+            <a:extLst>
+              <a:ext uri="{FF2B5EF4-FFF2-40B4-BE49-F238E27FC236}">
+                <a16:creationId xmlns:a16="http://schemas.microsoft.com/office/drawing/2014/main" id="{49ADD028-BDFB-6A1F-8AE6-3ED9AD051850}"/>
+              </a:ext>
+            </a:extLst>
+          </p:cNvPr>
+          <p:cNvSpPr>
+            <a:spLocks noGrp="1"/>
+          </p:cNvSpPr>
+          <p:nvPr>
+            <p:ph type="dt" sz="half" idx="10"/>
+          </p:nvPr>
+        </p:nvSpPr>
+        <p:spPr/>
+        <p:txBody>
+          <a:bodyPr/>
+          <a:lstStyle/>
+          <a:p>
+            <a:fld id="{9C8ECD26-ECA3-4ADE-86E6-5D0E6D6DC887}" type="datetime1">
+              <a:rPr lang="en-US" smtClean="0"/>
+              <a:t>5/26/2026</a:t>
+            </a:fld>
+            <a:endParaRPr lang="en-US"/>
+          </a:p>
+        </p:txBody>
+      </p:sp>
+      <p:sp>
+        <p:nvSpPr>
+          <p:cNvPr id="5" name="Footer Placeholder 4">
+            <a:extLst>
+              <a:ext uri="{FF2B5EF4-FFF2-40B4-BE49-F238E27FC236}">
+                <a16:creationId xmlns:a16="http://schemas.microsoft.com/office/drawing/2014/main" id="{596886A1-4B73-DA60-4853-DDFFABAA180A}"/>
+              </a:ext>
+            </a:extLst>
+          </p:cNvPr>
+          <p:cNvSpPr>
+            <a:spLocks noGrp="1"/>
+          </p:cNvSpPr>
+          <p:nvPr>
+            <p:ph type="ftr" sz="quarter" idx="11"/>
+          </p:nvPr>
+        </p:nvSpPr>
+        <p:spPr/>
+        <p:txBody>
+          <a:bodyPr/>
+          <a:lstStyle/>
+          <a:p>
+            <a:r>
+              <a:rPr lang="en-US"/>
+              <a:t>Light Scattering from Closely-Spaced Atom Pairs</a:t>
+            </a:r>
+          </a:p>
+        </p:txBody>
+      </p:sp>
+      <p:sp>
+        <p:nvSpPr>
+          <p:cNvPr id="6" name="Slide Number Placeholder 5">
+            <a:extLst>
+              <a:ext uri="{FF2B5EF4-FFF2-40B4-BE49-F238E27FC236}">
+                <a16:creationId xmlns:a16="http://schemas.microsoft.com/office/drawing/2014/main" id="{3CB3C4A2-505B-CB64-ABC4-AF7C24EF3D26}"/>
+              </a:ext>
+            </a:extLst>
+          </p:cNvPr>
+          <p:cNvSpPr>
+            <a:spLocks noGrp="1"/>
+          </p:cNvSpPr>
+          <p:nvPr>
+            <p:ph type="sldNum" sz="quarter" idx="12"/>
+          </p:nvPr>
+        </p:nvSpPr>
+        <p:spPr/>
+        <p:txBody>
+          <a:bodyPr/>
+          <a:lstStyle/>
+          <a:p>
+            <a:fld id="{A18CFF8F-6617-428E-9314-96DE529C98C8}" type="slidenum">
+              <a:rPr lang="en-US" smtClean="0"/>
+              <a:t>14</a:t>
+            </a:fld>
+            <a:endParaRPr lang="en-US"/>
+          </a:p>
+        </p:txBody>
+      </p:sp>
+      <p:grpSp>
+        <p:nvGrpSpPr>
+          <p:cNvPr id="16" name="Group 15">
+            <a:extLst>
+              <a:ext uri="{FF2B5EF4-FFF2-40B4-BE49-F238E27FC236}">
+                <a16:creationId xmlns:a16="http://schemas.microsoft.com/office/drawing/2014/main" id="{7E8C5475-B865-447C-4FF0-4CBB229A90BD}"/>
+              </a:ext>
+            </a:extLst>
+          </p:cNvPr>
+          <p:cNvGrpSpPr/>
+          <p:nvPr/>
+        </p:nvGrpSpPr>
+        <p:grpSpPr>
+          <a:xfrm>
+            <a:off x="999461" y="2389550"/>
+            <a:ext cx="1825833" cy="3854882"/>
+            <a:chOff x="907312" y="2322081"/>
+            <a:chExt cx="1825833" cy="3854882"/>
+          </a:xfrm>
+        </p:grpSpPr>
+        <p:pic>
+          <p:nvPicPr>
+            <p:cNvPr id="15" name="Picture 14">
+              <a:extLst>
+                <a:ext uri="{FF2B5EF4-FFF2-40B4-BE49-F238E27FC236}">
+                  <a16:creationId xmlns:a16="http://schemas.microsoft.com/office/drawing/2014/main" id="{DA4D97EB-706D-05E5-BF86-809DFE2D57A8}"/>
+                </a:ext>
+              </a:extLst>
+            </p:cNvPr>
+            <p:cNvPicPr>
+              <a:picLocks noChangeAspect="1"/>
+            </p:cNvPicPr>
+            <p:nvPr/>
+          </p:nvPicPr>
+          <p:blipFill>
+            <a:blip r:embed="rId2"/>
+            <a:srcRect r="49916"/>
+            <a:stretch>
+              <a:fillRect/>
+            </a:stretch>
+          </p:blipFill>
+          <p:spPr>
+            <a:xfrm>
+              <a:off x="964019" y="2322081"/>
+              <a:ext cx="1769126" cy="2014896"/>
+            </a:xfrm>
+            <a:prstGeom prst="rect">
+              <a:avLst/>
+            </a:prstGeom>
+          </p:spPr>
+        </p:pic>
+        <p:pic>
+          <p:nvPicPr>
+            <p:cNvPr id="14" name="Picture 13">
+              <a:extLst>
+                <a:ext uri="{FF2B5EF4-FFF2-40B4-BE49-F238E27FC236}">
+                  <a16:creationId xmlns:a16="http://schemas.microsoft.com/office/drawing/2014/main" id="{1327216C-F987-4D0B-0DFC-B5EC009EA80A}"/>
+                </a:ext>
+              </a:extLst>
+            </p:cNvPr>
+            <p:cNvPicPr>
+              <a:picLocks noChangeAspect="1"/>
+            </p:cNvPicPr>
+            <p:nvPr/>
+          </p:nvPicPr>
+          <p:blipFill>
+            <a:blip r:embed="rId2"/>
+            <a:srcRect l="49916"/>
+            <a:stretch>
+              <a:fillRect/>
+            </a:stretch>
+          </p:blipFill>
+          <p:spPr>
+            <a:xfrm>
+              <a:off x="907312" y="4162067"/>
+              <a:ext cx="1769126" cy="2014896"/>
+            </a:xfrm>
+            <a:prstGeom prst="rect">
+              <a:avLst/>
+            </a:prstGeom>
+          </p:spPr>
+        </p:pic>
+      </p:grpSp>
+      <p:pic>
+        <p:nvPicPr>
+          <p:cNvPr id="29" name="Picture 28">
+            <a:extLst>
+              <a:ext uri="{FF2B5EF4-FFF2-40B4-BE49-F238E27FC236}">
+                <a16:creationId xmlns:a16="http://schemas.microsoft.com/office/drawing/2014/main" id="{6B00B7D2-C7C8-9DDC-E051-C37B24B7DA61}"/>
+              </a:ext>
+            </a:extLst>
+          </p:cNvPr>
+          <p:cNvPicPr>
+            <a:picLocks noChangeAspect="1"/>
+          </p:cNvPicPr>
+          <p:nvPr/>
+        </p:nvPicPr>
+        <p:blipFill>
+          <a:blip r:embed="rId3">
+            <a:extLst>
+              <a:ext uri="{28A0092B-C50C-407E-A947-70E740481C1C}">
+                <a14:useLocalDpi xmlns:a14="http://schemas.microsoft.com/office/drawing/2010/main" val="0"/>
+              </a:ext>
+            </a:extLst>
+          </a:blip>
+          <a:stretch>
+            <a:fillRect/>
+          </a:stretch>
+        </p:blipFill>
+        <p:spPr>
+          <a:xfrm>
+            <a:off x="3650628" y="2664889"/>
+            <a:ext cx="7731525" cy="2835688"/>
+          </a:xfrm>
+          <a:prstGeom prst="rect">
+            <a:avLst/>
+          </a:prstGeom>
+        </p:spPr>
+      </p:pic>
+    </p:spTree>
+    <p:extLst>
+      <p:ext uri="{BB962C8B-B14F-4D97-AF65-F5344CB8AC3E}">
+        <p14:creationId xmlns:p14="http://schemas.microsoft.com/office/powerpoint/2010/main" val="4232766256"/>
+      </p:ext>
+    </p:extLst>
+  </p:cSld>
+  <p:clrMapOvr>
+    <a:masterClrMapping/>
+  </p:clrMapOvr>
+</p:sld>
+</file>
+
+<file path=ppt/slides/slide15.xml><?xml version="1.0" encoding="utf-8"?>
+<p:sld xmlns:a="http://schemas.openxmlformats.org/drawingml/2006/main" xmlns:r="http://schemas.openxmlformats.org/officeDocument/2006/relationships" xmlns:p="http://schemas.openxmlformats.org/presentationml/2006/main">
+  <p:cSld>
+    <p:spTree>
+      <p:nvGrpSpPr>
+        <p:cNvPr id="1" name=""/>
+        <p:cNvGrpSpPr/>
+        <p:nvPr/>
+      </p:nvGrpSpPr>
+      <p:grpSpPr>
+        <a:xfrm>
+          <a:off x="0" y="0"/>
+          <a:ext cx="0" cy="0"/>
+          <a:chOff x="0" y="0"/>
+          <a:chExt cx="0" cy="0"/>
+        </a:xfrm>
+      </p:grpSpPr>
+      <p:sp>
+        <p:nvSpPr>
+          <p:cNvPr id="2" name="Title 1">
+            <a:extLst>
+              <a:ext uri="{FF2B5EF4-FFF2-40B4-BE49-F238E27FC236}">
+                <a16:creationId xmlns:a16="http://schemas.microsoft.com/office/drawing/2014/main" id="{2C7708C6-1B83-8592-19B1-7783F427F651}"/>
+              </a:ext>
+            </a:extLst>
+          </p:cNvPr>
+          <p:cNvSpPr>
+            <a:spLocks noGrp="1"/>
+          </p:cNvSpPr>
+          <p:nvPr>
+            <p:ph type="title"/>
+          </p:nvPr>
+        </p:nvSpPr>
+        <p:spPr/>
+        <p:txBody>
+          <a:bodyPr/>
+          <a:lstStyle/>
+          <a:p>
+            <a:r>
+              <a:rPr lang="en-US" dirty="0"/>
+              <a:t>Outlook</a:t>
+            </a:r>
+          </a:p>
+        </p:txBody>
+      </p:sp>
+      <p:sp>
+        <p:nvSpPr>
+          <p:cNvPr id="3" name="Content Placeholder 2">
+            <a:extLst>
+              <a:ext uri="{FF2B5EF4-FFF2-40B4-BE49-F238E27FC236}">
+                <a16:creationId xmlns:a16="http://schemas.microsoft.com/office/drawing/2014/main" id="{E46222C2-D7CA-95C4-05ED-4A48696136D7}"/>
+              </a:ext>
+            </a:extLst>
+          </p:cNvPr>
+          <p:cNvSpPr>
+            <a:spLocks noGrp="1"/>
+          </p:cNvSpPr>
+          <p:nvPr>
+            <p:ph idx="1"/>
+          </p:nvPr>
+        </p:nvSpPr>
+        <p:spPr/>
+        <p:txBody>
+          <a:bodyPr/>
+          <a:lstStyle/>
+          <a:p>
+            <a:r>
+              <a:rPr lang="en-US" dirty="0"/>
+              <a:t>Light-induced dipole-dipole interactions</a:t>
+            </a:r>
+          </a:p>
+          <a:p>
+            <a:r>
+              <a:rPr lang="en-US" dirty="0"/>
+              <a:t>Three atoms on a site</a:t>
+            </a:r>
+          </a:p>
+          <a:p>
+            <a:endParaRPr lang="en-US" dirty="0"/>
+          </a:p>
+        </p:txBody>
+      </p:sp>
+      <p:sp>
+        <p:nvSpPr>
+          <p:cNvPr id="4" name="Date Placeholder 3">
+            <a:extLst>
+              <a:ext uri="{FF2B5EF4-FFF2-40B4-BE49-F238E27FC236}">
+                <a16:creationId xmlns:a16="http://schemas.microsoft.com/office/drawing/2014/main" id="{A123A20E-E21C-8897-946B-65EE5A253655}"/>
+              </a:ext>
+            </a:extLst>
+          </p:cNvPr>
+          <p:cNvSpPr>
+            <a:spLocks noGrp="1"/>
+          </p:cNvSpPr>
+          <p:nvPr>
+            <p:ph type="dt" sz="half" idx="10"/>
+          </p:nvPr>
+        </p:nvSpPr>
+        <p:spPr/>
+        <p:txBody>
+          <a:bodyPr/>
+          <a:lstStyle/>
+          <a:p>
+            <a:fld id="{F25D5417-AE7C-452B-8F7B-3AC2E49F768F}" type="datetime1">
+              <a:rPr lang="en-US" smtClean="0"/>
+              <a:t>5/26/2026</a:t>
+            </a:fld>
+            <a:endParaRPr lang="en-US"/>
+          </a:p>
+        </p:txBody>
+      </p:sp>
+      <p:sp>
+        <p:nvSpPr>
+          <p:cNvPr id="5" name="Footer Placeholder 4">
+            <a:extLst>
+              <a:ext uri="{FF2B5EF4-FFF2-40B4-BE49-F238E27FC236}">
+                <a16:creationId xmlns:a16="http://schemas.microsoft.com/office/drawing/2014/main" id="{06674928-DE59-855D-5300-2CFF3E0316FE}"/>
+              </a:ext>
+            </a:extLst>
+          </p:cNvPr>
+          <p:cNvSpPr>
+            <a:spLocks noGrp="1"/>
+          </p:cNvSpPr>
+          <p:nvPr>
+            <p:ph type="ftr" sz="quarter" idx="11"/>
+          </p:nvPr>
+        </p:nvSpPr>
+        <p:spPr/>
+        <p:txBody>
+          <a:bodyPr/>
+          <a:lstStyle/>
+          <a:p>
+            <a:r>
+              <a:rPr lang="en-US"/>
+              <a:t>Light Scattering from Closely-Spaced Atom Pairs</a:t>
+            </a:r>
+          </a:p>
+        </p:txBody>
+      </p:sp>
+      <p:sp>
+        <p:nvSpPr>
+          <p:cNvPr id="6" name="Slide Number Placeholder 5">
+            <a:extLst>
+              <a:ext uri="{FF2B5EF4-FFF2-40B4-BE49-F238E27FC236}">
+                <a16:creationId xmlns:a16="http://schemas.microsoft.com/office/drawing/2014/main" id="{CE347D31-02BD-55F1-DD90-5BC1D3946DD9}"/>
+              </a:ext>
+            </a:extLst>
+          </p:cNvPr>
+          <p:cNvSpPr>
+            <a:spLocks noGrp="1"/>
+          </p:cNvSpPr>
+          <p:nvPr>
+            <p:ph type="sldNum" sz="quarter" idx="12"/>
+          </p:nvPr>
+        </p:nvSpPr>
+        <p:spPr/>
+        <p:txBody>
+          <a:bodyPr/>
+          <a:lstStyle/>
+          <a:p>
+            <a:fld id="{A18CFF8F-6617-428E-9314-96DE529C98C8}" type="slidenum">
+              <a:rPr lang="en-US" smtClean="0"/>
+              <a:t>15</a:t>
+            </a:fld>
+            <a:endParaRPr lang="en-US"/>
+          </a:p>
+        </p:txBody>
+      </p:sp>
+    </p:spTree>
+    <p:extLst>
+      <p:ext uri="{BB962C8B-B14F-4D97-AF65-F5344CB8AC3E}">
+        <p14:creationId xmlns:p14="http://schemas.microsoft.com/office/powerpoint/2010/main" val="1896119545"/>
+      </p:ext>
+    </p:extLst>
+  </p:cSld>
+  <p:clrMapOvr>
+    <a:masterClrMapping/>
+  </p:clrMapOvr>
+</p:sld>
+</file>
+
+<file path=ppt/slides/slide16.xml><?xml version="1.0" encoding="utf-8"?>
+<p:sld xmlns:a="http://schemas.openxmlformats.org/drawingml/2006/main" xmlns:r="http://schemas.openxmlformats.org/officeDocument/2006/relationships" xmlns:p="http://schemas.openxmlformats.org/presentationml/2006/main">
+  <p:cSld>
+    <p:spTree>
+      <p:nvGrpSpPr>
+        <p:cNvPr id="1" name=""/>
+        <p:cNvGrpSpPr/>
+        <p:nvPr/>
+      </p:nvGrpSpPr>
+      <p:grpSpPr>
+        <a:xfrm>
+          <a:off x="0" y="0"/>
+          <a:ext cx="0" cy="0"/>
+          <a:chOff x="0" y="0"/>
+          <a:chExt cx="0" cy="0"/>
+        </a:xfrm>
+      </p:grpSpPr>
+      <p:sp>
+        <p:nvSpPr>
+          <p:cNvPr id="2" name="Title 1">
+            <a:extLst>
+              <a:ext uri="{FF2B5EF4-FFF2-40B4-BE49-F238E27FC236}">
+                <a16:creationId xmlns:a16="http://schemas.microsoft.com/office/drawing/2014/main" id="{037A8B09-2D8D-34DF-43B8-37684B14EC62}"/>
+              </a:ext>
+            </a:extLst>
+          </p:cNvPr>
+          <p:cNvSpPr>
+            <a:spLocks noGrp="1"/>
+          </p:cNvSpPr>
+          <p:nvPr>
+            <p:ph type="title"/>
+          </p:nvPr>
+        </p:nvSpPr>
+        <p:spPr/>
+        <p:txBody>
+          <a:bodyPr/>
+          <a:lstStyle/>
+          <a:p>
+            <a:r>
+              <a:rPr lang="en-US" dirty="0"/>
+              <a:t>Acknowledgments</a:t>
+            </a:r>
+          </a:p>
+        </p:txBody>
+      </p:sp>
+      <p:sp>
+        <p:nvSpPr>
+          <p:cNvPr id="3" name="Content Placeholder 2">
+            <a:extLst>
+              <a:ext uri="{FF2B5EF4-FFF2-40B4-BE49-F238E27FC236}">
+                <a16:creationId xmlns:a16="http://schemas.microsoft.com/office/drawing/2014/main" id="{A5A9423C-172D-AD89-ABEE-F742E03251BA}"/>
+              </a:ext>
+            </a:extLst>
+          </p:cNvPr>
+          <p:cNvSpPr>
+            <a:spLocks noGrp="1"/>
+          </p:cNvSpPr>
+          <p:nvPr>
+            <p:ph idx="1"/>
+          </p:nvPr>
+        </p:nvSpPr>
+        <p:spPr/>
+        <p:txBody>
+          <a:bodyPr/>
+          <a:lstStyle/>
+          <a:p>
+            <a:r>
+              <a:rPr lang="en-US" dirty="0"/>
+              <a:t>Ketterle group</a:t>
+            </a:r>
+          </a:p>
+        </p:txBody>
+      </p:sp>
+      <p:sp>
+        <p:nvSpPr>
+          <p:cNvPr id="4" name="Date Placeholder 3">
+            <a:extLst>
+              <a:ext uri="{FF2B5EF4-FFF2-40B4-BE49-F238E27FC236}">
+                <a16:creationId xmlns:a16="http://schemas.microsoft.com/office/drawing/2014/main" id="{6806F2C6-3B41-5169-9A7D-C85A2824CBB0}"/>
+              </a:ext>
+            </a:extLst>
+          </p:cNvPr>
+          <p:cNvSpPr>
+            <a:spLocks noGrp="1"/>
+          </p:cNvSpPr>
+          <p:nvPr>
+            <p:ph type="dt" sz="half" idx="10"/>
+          </p:nvPr>
+        </p:nvSpPr>
+        <p:spPr/>
+        <p:txBody>
+          <a:bodyPr/>
+          <a:lstStyle/>
+          <a:p>
+            <a:fld id="{85EDDD84-7411-4657-9048-E904991F6E19}" type="datetime1">
+              <a:rPr lang="en-US" smtClean="0"/>
+              <a:t>5/26/2026</a:t>
+            </a:fld>
+            <a:endParaRPr lang="en-US"/>
+          </a:p>
+        </p:txBody>
+      </p:sp>
+      <p:sp>
+        <p:nvSpPr>
+          <p:cNvPr id="5" name="Footer Placeholder 4">
+            <a:extLst>
+              <a:ext uri="{FF2B5EF4-FFF2-40B4-BE49-F238E27FC236}">
+                <a16:creationId xmlns:a16="http://schemas.microsoft.com/office/drawing/2014/main" id="{6646E931-C056-23B6-FE33-8F04DBC4680F}"/>
+              </a:ext>
+            </a:extLst>
+          </p:cNvPr>
+          <p:cNvSpPr>
+            <a:spLocks noGrp="1"/>
+          </p:cNvSpPr>
+          <p:nvPr>
+            <p:ph type="ftr" sz="quarter" idx="11"/>
+          </p:nvPr>
+        </p:nvSpPr>
+        <p:spPr/>
+        <p:txBody>
+          <a:bodyPr/>
+          <a:lstStyle/>
+          <a:p>
+            <a:r>
+              <a:rPr lang="en-US"/>
+              <a:t>Light Scattering from Closely-Spaced Atom Pairs</a:t>
+            </a:r>
+          </a:p>
+        </p:txBody>
+      </p:sp>
+      <p:sp>
+        <p:nvSpPr>
+          <p:cNvPr id="6" name="Slide Number Placeholder 5">
+            <a:extLst>
+              <a:ext uri="{FF2B5EF4-FFF2-40B4-BE49-F238E27FC236}">
+                <a16:creationId xmlns:a16="http://schemas.microsoft.com/office/drawing/2014/main" id="{4407BE73-5400-4182-82D8-8C7605EB320A}"/>
+              </a:ext>
+            </a:extLst>
+          </p:cNvPr>
+          <p:cNvSpPr>
+            <a:spLocks noGrp="1"/>
+          </p:cNvSpPr>
+          <p:nvPr>
+            <p:ph type="sldNum" sz="quarter" idx="12"/>
+          </p:nvPr>
+        </p:nvSpPr>
+        <p:spPr/>
+        <p:txBody>
+          <a:bodyPr/>
+          <a:lstStyle/>
+          <a:p>
+            <a:fld id="{A18CFF8F-6617-428E-9314-96DE529C98C8}" type="slidenum">
+              <a:rPr lang="en-US" smtClean="0"/>
+              <a:t>16</a:t>
+            </a:fld>
+            <a:endParaRPr lang="en-US"/>
+          </a:p>
+        </p:txBody>
+      </p:sp>
+    </p:spTree>
+    <p:extLst>
+      <p:ext uri="{BB962C8B-B14F-4D97-AF65-F5344CB8AC3E}">
+        <p14:creationId xmlns:p14="http://schemas.microsoft.com/office/powerpoint/2010/main" val="4055001527"/>
       </p:ext>
     </p:extLst>
   </p:cSld>
@@ -3431,7 +5932,7 @@
           <a:p>
             <a:r>
               <a:rPr lang="en-US" dirty="0"/>
-              <a:t>Scattering pictures</a:t>
+              <a:t>Light Scattering from Single Atoms</a:t>
             </a:r>
           </a:p>
         </p:txBody>
@@ -3449,15 +5950,299 @@
             <a:spLocks noGrp="1"/>
           </p:cNvSpPr>
           <p:nvPr>
-            <p:ph idx="1"/>
-          </p:nvPr>
-        </p:nvSpPr>
-        <p:spPr/>
-        <p:txBody>
-          <a:bodyPr/>
-          <a:lstStyle/>
-          <a:p>
+            <p:ph sz="half" idx="1"/>
+          </p:nvPr>
+        </p:nvSpPr>
+        <p:spPr/>
+        <p:txBody>
+          <a:bodyPr>
+            <a:normAutofit lnSpcReduction="10000"/>
+          </a:bodyPr>
+          <a:lstStyle/>
+          <a:p>
+            <a:pPr marL="0" indent="0">
+              <a:buNone/>
+            </a:pPr>
+            <a:r>
+              <a:rPr lang="en-US" sz="2400" dirty="0"/>
+              <a:t>Rayleigh scattering</a:t>
+            </a:r>
+          </a:p>
+          <a:p>
+            <a:endParaRPr lang="en-US" sz="2400" dirty="0"/>
+          </a:p>
+        </p:txBody>
+      </p:sp>
+      <p:sp>
+        <p:nvSpPr>
+          <p:cNvPr id="10" name="Content Placeholder 9">
+            <a:extLst>
+              <a:ext uri="{FF2B5EF4-FFF2-40B4-BE49-F238E27FC236}">
+                <a16:creationId xmlns:a16="http://schemas.microsoft.com/office/drawing/2014/main" id="{C809D620-AD2C-3A13-0CBA-27F8025EA708}"/>
+              </a:ext>
+            </a:extLst>
+          </p:cNvPr>
+          <p:cNvSpPr>
+            <a:spLocks noGrp="1"/>
+          </p:cNvSpPr>
+          <p:nvPr>
+            <p:ph sz="half" idx="2"/>
+          </p:nvPr>
+        </p:nvSpPr>
+        <p:spPr>
+          <a:xfrm>
+            <a:off x="6096000" y="1825625"/>
+            <a:ext cx="5181600" cy="418452"/>
+          </a:xfrm>
+        </p:spPr>
+        <p:txBody>
+          <a:bodyPr>
+            <a:normAutofit lnSpcReduction="10000"/>
+          </a:bodyPr>
+          <a:lstStyle/>
+          <a:p>
+            <a:pPr marL="0" indent="0">
+              <a:buNone/>
+            </a:pPr>
+            <a:r>
+              <a:rPr lang="en-US" sz="2400" dirty="0"/>
+              <a:t>Double-slit gedankenexperiment</a:t>
+            </a:r>
+          </a:p>
+          <a:p>
+            <a:endParaRPr lang="en-US" sz="2400" dirty="0"/>
+          </a:p>
+          <a:p>
+            <a:endParaRPr lang="en-US" sz="2400" dirty="0"/>
+          </a:p>
+          <a:p>
+            <a:endParaRPr lang="en-US" sz="2400" dirty="0"/>
+          </a:p>
+          <a:p>
+            <a:pPr marL="0" indent="0">
+              <a:buNone/>
+            </a:pPr>
+            <a:endParaRPr lang="en-US" sz="2400" dirty="0"/>
+          </a:p>
+        </p:txBody>
+      </p:sp>
+      <p:sp>
+        <p:nvSpPr>
+          <p:cNvPr id="4" name="Date Placeholder 3">
+            <a:extLst>
+              <a:ext uri="{FF2B5EF4-FFF2-40B4-BE49-F238E27FC236}">
+                <a16:creationId xmlns:a16="http://schemas.microsoft.com/office/drawing/2014/main" id="{F6B6272B-2741-7807-5743-B580B9D97EDA}"/>
+              </a:ext>
+            </a:extLst>
+          </p:cNvPr>
+          <p:cNvSpPr>
+            <a:spLocks noGrp="1"/>
+          </p:cNvSpPr>
+          <p:nvPr>
+            <p:ph type="dt" sz="half" idx="10"/>
+          </p:nvPr>
+        </p:nvSpPr>
+        <p:spPr/>
+        <p:txBody>
+          <a:bodyPr/>
+          <a:lstStyle/>
+          <a:p>
+            <a:fld id="{99EFC380-EFE0-476E-B5C0-92FF516CBFDE}" type="datetime1">
+              <a:rPr lang="en-US" smtClean="0"/>
+              <a:t>5/26/2026</a:t>
+            </a:fld>
             <a:endParaRPr lang="en-US"/>
+          </a:p>
+        </p:txBody>
+      </p:sp>
+      <p:sp>
+        <p:nvSpPr>
+          <p:cNvPr id="5" name="Footer Placeholder 4">
+            <a:extLst>
+              <a:ext uri="{FF2B5EF4-FFF2-40B4-BE49-F238E27FC236}">
+                <a16:creationId xmlns:a16="http://schemas.microsoft.com/office/drawing/2014/main" id="{46B17D1E-A679-C7B9-E5C5-21BBCD7915C4}"/>
+              </a:ext>
+            </a:extLst>
+          </p:cNvPr>
+          <p:cNvSpPr>
+            <a:spLocks noGrp="1"/>
+          </p:cNvSpPr>
+          <p:nvPr>
+            <p:ph type="ftr" sz="quarter" idx="11"/>
+          </p:nvPr>
+        </p:nvSpPr>
+        <p:spPr/>
+        <p:txBody>
+          <a:bodyPr/>
+          <a:lstStyle/>
+          <a:p>
+            <a:r>
+              <a:rPr lang="en-US"/>
+              <a:t>Light Scattering from Closely-Spaced Atom Pairs</a:t>
+            </a:r>
+          </a:p>
+        </p:txBody>
+      </p:sp>
+      <p:sp>
+        <p:nvSpPr>
+          <p:cNvPr id="6" name="Slide Number Placeholder 5">
+            <a:extLst>
+              <a:ext uri="{FF2B5EF4-FFF2-40B4-BE49-F238E27FC236}">
+                <a16:creationId xmlns:a16="http://schemas.microsoft.com/office/drawing/2014/main" id="{E90F5357-B9CC-85AC-74FF-F80C6FFAE921}"/>
+              </a:ext>
+            </a:extLst>
+          </p:cNvPr>
+          <p:cNvSpPr>
+            <a:spLocks noGrp="1"/>
+          </p:cNvSpPr>
+          <p:nvPr>
+            <p:ph type="sldNum" sz="quarter" idx="12"/>
+          </p:nvPr>
+        </p:nvSpPr>
+        <p:spPr/>
+        <p:txBody>
+          <a:bodyPr/>
+          <a:lstStyle/>
+          <a:p>
+            <a:fld id="{A18CFF8F-6617-428E-9314-96DE529C98C8}" type="slidenum">
+              <a:rPr lang="en-US" smtClean="0"/>
+              <a:t>2</a:t>
+            </a:fld>
+            <a:endParaRPr lang="en-US"/>
+          </a:p>
+        </p:txBody>
+      </p:sp>
+      <p:pic>
+        <p:nvPicPr>
+          <p:cNvPr id="8" name="Picture 7" descr="sunset">
+            <a:extLst>
+              <a:ext uri="{FF2B5EF4-FFF2-40B4-BE49-F238E27FC236}">
+                <a16:creationId xmlns:a16="http://schemas.microsoft.com/office/drawing/2014/main" id="{B115469A-A81E-B56D-54AF-038AF03D4D47}"/>
+              </a:ext>
+            </a:extLst>
+          </p:cNvPr>
+          <p:cNvPicPr>
+            <a:picLocks noChangeAspect="1"/>
+          </p:cNvPicPr>
+          <p:nvPr/>
+        </p:nvPicPr>
+        <p:blipFill>
+          <a:blip r:embed="rId3"/>
+          <a:stretch>
+            <a:fillRect/>
+          </a:stretch>
+        </p:blipFill>
+        <p:spPr>
+          <a:xfrm>
+            <a:off x="916012" y="2364121"/>
+            <a:ext cx="5025975" cy="3350650"/>
+          </a:xfrm>
+          <a:prstGeom prst="rect">
+            <a:avLst/>
+          </a:prstGeom>
+        </p:spPr>
+      </p:pic>
+      <p:pic>
+        <p:nvPicPr>
+          <p:cNvPr id="9" name="Picture 8">
+            <a:extLst>
+              <a:ext uri="{FF2B5EF4-FFF2-40B4-BE49-F238E27FC236}">
+                <a16:creationId xmlns:a16="http://schemas.microsoft.com/office/drawing/2014/main" id="{D5ED3D21-1DAA-463B-B98C-B78D4DDAE65D}"/>
+              </a:ext>
+            </a:extLst>
+          </p:cNvPr>
+          <p:cNvPicPr>
+            <a:picLocks noChangeAspect="1"/>
+          </p:cNvPicPr>
+          <p:nvPr/>
+        </p:nvPicPr>
+        <p:blipFill>
+          <a:blip r:embed="rId4"/>
+          <a:stretch>
+            <a:fillRect/>
+          </a:stretch>
+        </p:blipFill>
+        <p:spPr>
+          <a:xfrm>
+            <a:off x="7316201" y="4547590"/>
+            <a:ext cx="3089530" cy="1766020"/>
+          </a:xfrm>
+          <a:prstGeom prst="rect">
+            <a:avLst/>
+          </a:prstGeom>
+        </p:spPr>
+      </p:pic>
+      <p:pic>
+        <p:nvPicPr>
+          <p:cNvPr id="12" name="Picture 11">
+            <a:extLst>
+              <a:ext uri="{FF2B5EF4-FFF2-40B4-BE49-F238E27FC236}">
+                <a16:creationId xmlns:a16="http://schemas.microsoft.com/office/drawing/2014/main" id="{6EE428A0-7E6B-CD5C-FF45-6B5E9F20A2E7}"/>
+              </a:ext>
+            </a:extLst>
+          </p:cNvPr>
+          <p:cNvPicPr>
+            <a:picLocks noChangeAspect="1"/>
+          </p:cNvPicPr>
+          <p:nvPr/>
+        </p:nvPicPr>
+        <p:blipFill>
+          <a:blip r:embed="rId5">
+            <a:extLst>
+              <a:ext uri="{28A0092B-C50C-407E-A947-70E740481C1C}">
+                <a14:useLocalDpi xmlns:a14="http://schemas.microsoft.com/office/drawing/2010/main" val="0"/>
+              </a:ext>
+            </a:extLst>
+          </a:blip>
+          <a:stretch>
+            <a:fillRect/>
+          </a:stretch>
+        </p:blipFill>
+        <p:spPr>
+          <a:xfrm>
+            <a:off x="7316200" y="2244077"/>
+            <a:ext cx="2893600" cy="1795369"/>
+          </a:xfrm>
+          <a:prstGeom prst="rect">
+            <a:avLst/>
+          </a:prstGeom>
+        </p:spPr>
+      </p:pic>
+      <p:sp>
+        <p:nvSpPr>
+          <p:cNvPr id="14" name="TextBox 13">
+            <a:extLst>
+              <a:ext uri="{FF2B5EF4-FFF2-40B4-BE49-F238E27FC236}">
+                <a16:creationId xmlns:a16="http://schemas.microsoft.com/office/drawing/2014/main" id="{9113DDF2-2F24-1C5D-3CC8-CA59EB5FC4ED}"/>
+              </a:ext>
+            </a:extLst>
+          </p:cNvPr>
+          <p:cNvSpPr txBox="1"/>
+          <p:nvPr/>
+        </p:nvSpPr>
+        <p:spPr>
+          <a:xfrm>
+            <a:off x="6096000" y="4244592"/>
+            <a:ext cx="6096000" cy="461665"/>
+          </a:xfrm>
+          <a:prstGeom prst="rect">
+            <a:avLst/>
+          </a:prstGeom>
+          <a:noFill/>
+        </p:spPr>
+        <p:txBody>
+          <a:bodyPr wrap="square">
+            <a:spAutoFit/>
+          </a:bodyPr>
+          <a:lstStyle/>
+          <a:p>
+            <a:pPr marL="0" indent="0">
+              <a:buNone/>
+            </a:pPr>
+            <a:r>
+              <a:rPr lang="en-US" sz="2400" dirty="0"/>
+              <a:t>Mössbauer (recoilless) scattering</a:t>
+            </a:r>
           </a:p>
         </p:txBody>
       </p:sp>
@@ -3496,7 +6281,7 @@
           <p:cNvPr id="2" name="Title 1">
             <a:extLst>
               <a:ext uri="{FF2B5EF4-FFF2-40B4-BE49-F238E27FC236}">
-                <a16:creationId xmlns:a16="http://schemas.microsoft.com/office/drawing/2014/main" id="{78444026-157F-9B7A-0CD1-7EB2E0E8F905}"/>
+                <a16:creationId xmlns:a16="http://schemas.microsoft.com/office/drawing/2014/main" id="{5C39A70C-5681-490F-40D5-D02528EDDC9A}"/>
               </a:ext>
             </a:extLst>
           </p:cNvPr>
@@ -3514,7 +6299,7 @@
           <a:p>
             <a:r>
               <a:rPr lang="en-US" dirty="0"/>
-              <a:t>Quantum description: Which-way information</a:t>
+              <a:t>Collective Scattering</a:t>
             </a:r>
           </a:p>
         </p:txBody>
@@ -3524,7 +6309,7 @@
           <p:cNvPr id="3" name="Content Placeholder 2">
             <a:extLst>
               <a:ext uri="{FF2B5EF4-FFF2-40B4-BE49-F238E27FC236}">
-                <a16:creationId xmlns:a16="http://schemas.microsoft.com/office/drawing/2014/main" id="{6AF38AF4-4E96-7D6D-AD0C-99DBEDCF1E7D}"/>
+                <a16:creationId xmlns:a16="http://schemas.microsoft.com/office/drawing/2014/main" id="{C9F43BF8-32D4-E83B-64CA-215543AD8138}"/>
               </a:ext>
             </a:extLst>
           </p:cNvPr>
@@ -3540,6 +6325,107 @@
           <a:bodyPr/>
           <a:lstStyle/>
           <a:p>
+            <a:r>
+              <a:rPr lang="en-US" dirty="0"/>
+              <a:t>Quantum control over light-matter interactions</a:t>
+            </a:r>
+          </a:p>
+          <a:p>
+            <a:r>
+              <a:rPr lang="en-US" dirty="0"/>
+              <a:t>Photoassociation</a:t>
+            </a:r>
+          </a:p>
+          <a:p>
+            <a:r>
+              <a:rPr lang="en-US" dirty="0"/>
+              <a:t>Atomically thin mirrors</a:t>
+            </a:r>
+          </a:p>
+        </p:txBody>
+      </p:sp>
+      <p:sp>
+        <p:nvSpPr>
+          <p:cNvPr id="4" name="Date Placeholder 3">
+            <a:extLst>
+              <a:ext uri="{FF2B5EF4-FFF2-40B4-BE49-F238E27FC236}">
+                <a16:creationId xmlns:a16="http://schemas.microsoft.com/office/drawing/2014/main" id="{6E5AEFDE-95D3-7BF7-B6F1-5C1D3D1436EC}"/>
+              </a:ext>
+            </a:extLst>
+          </p:cNvPr>
+          <p:cNvSpPr>
+            <a:spLocks noGrp="1"/>
+          </p:cNvSpPr>
+          <p:nvPr>
+            <p:ph type="dt" sz="half" idx="10"/>
+          </p:nvPr>
+        </p:nvSpPr>
+        <p:spPr/>
+        <p:txBody>
+          <a:bodyPr/>
+          <a:lstStyle/>
+          <a:p>
+            <a:fld id="{78D8C808-0C09-43D5-A611-4F407D1814EC}" type="datetime1">
+              <a:rPr lang="en-US" smtClean="0"/>
+              <a:t>5/26/2026</a:t>
+            </a:fld>
+            <a:endParaRPr lang="en-US"/>
+          </a:p>
+        </p:txBody>
+      </p:sp>
+      <p:sp>
+        <p:nvSpPr>
+          <p:cNvPr id="5" name="Footer Placeholder 4">
+            <a:extLst>
+              <a:ext uri="{FF2B5EF4-FFF2-40B4-BE49-F238E27FC236}">
+                <a16:creationId xmlns:a16="http://schemas.microsoft.com/office/drawing/2014/main" id="{EC0B46B8-AD19-B972-F019-D3AABEFB7AB0}"/>
+              </a:ext>
+            </a:extLst>
+          </p:cNvPr>
+          <p:cNvSpPr>
+            <a:spLocks noGrp="1"/>
+          </p:cNvSpPr>
+          <p:nvPr>
+            <p:ph type="ftr" sz="quarter" idx="11"/>
+          </p:nvPr>
+        </p:nvSpPr>
+        <p:spPr/>
+        <p:txBody>
+          <a:bodyPr/>
+          <a:lstStyle/>
+          <a:p>
+            <a:r>
+              <a:rPr lang="en-US"/>
+              <a:t>Light Scattering from Closely-Spaced Atom Pairs</a:t>
+            </a:r>
+          </a:p>
+        </p:txBody>
+      </p:sp>
+      <p:sp>
+        <p:nvSpPr>
+          <p:cNvPr id="6" name="Slide Number Placeholder 5">
+            <a:extLst>
+              <a:ext uri="{FF2B5EF4-FFF2-40B4-BE49-F238E27FC236}">
+                <a16:creationId xmlns:a16="http://schemas.microsoft.com/office/drawing/2014/main" id="{E7E35D92-BEC8-B9DA-5A1A-24781DAA03DA}"/>
+              </a:ext>
+            </a:extLst>
+          </p:cNvPr>
+          <p:cNvSpPr>
+            <a:spLocks noGrp="1"/>
+          </p:cNvSpPr>
+          <p:nvPr>
+            <p:ph type="sldNum" sz="quarter" idx="12"/>
+          </p:nvPr>
+        </p:nvSpPr>
+        <p:spPr/>
+        <p:txBody>
+          <a:bodyPr/>
+          <a:lstStyle/>
+          <a:p>
+            <a:fld id="{A18CFF8F-6617-428E-9314-96DE529C98C8}" type="slidenum">
+              <a:rPr lang="en-US" smtClean="0"/>
+              <a:t>3</a:t>
+            </a:fld>
             <a:endParaRPr lang="en-US"/>
           </a:p>
         </p:txBody>
@@ -3547,7 +6433,7 @@
     </p:spTree>
     <p:extLst>
       <p:ext uri="{BB962C8B-B14F-4D97-AF65-F5344CB8AC3E}">
-        <p14:creationId xmlns:p14="http://schemas.microsoft.com/office/powerpoint/2010/main" val="4231142911"/>
+        <p14:creationId xmlns:p14="http://schemas.microsoft.com/office/powerpoint/2010/main" val="848944730"/>
       </p:ext>
     </p:extLst>
   </p:cSld>
@@ -3579,7 +6465,7 @@
           <p:cNvPr id="2" name="Title 1">
             <a:extLst>
               <a:ext uri="{FF2B5EF4-FFF2-40B4-BE49-F238E27FC236}">
-                <a16:creationId xmlns:a16="http://schemas.microsoft.com/office/drawing/2014/main" id="{5C39A70C-5681-490F-40D5-D02528EDDC9A}"/>
+                <a16:creationId xmlns:a16="http://schemas.microsoft.com/office/drawing/2014/main" id="{98548317-AE3A-D648-C141-7FC0AE71FE88}"/>
               </a:ext>
             </a:extLst>
           </p:cNvPr>
@@ -3597,7 +6483,7 @@
           <a:p>
             <a:r>
               <a:rPr lang="en-US" dirty="0"/>
-              <a:t>Collective scattering</a:t>
+              <a:t>Dicke Superradiance, Dipole-Dipole Effects</a:t>
             </a:r>
           </a:p>
         </p:txBody>
@@ -3607,7 +6493,7 @@
           <p:cNvPr id="3" name="Content Placeholder 2">
             <a:extLst>
               <a:ext uri="{FF2B5EF4-FFF2-40B4-BE49-F238E27FC236}">
-                <a16:creationId xmlns:a16="http://schemas.microsoft.com/office/drawing/2014/main" id="{C9F43BF8-32D4-E83B-64CA-215543AD8138}"/>
+                <a16:creationId xmlns:a16="http://schemas.microsoft.com/office/drawing/2014/main" id="{CF4E40C2-B170-C691-C2BB-4620E6DBC4A4}"/>
               </a:ext>
             </a:extLst>
           </p:cNvPr>
@@ -3625,15 +6511,113 @@
           <a:p>
             <a:r>
               <a:rPr lang="en-US" dirty="0"/>
-              <a:t>More than single atoms</a:t>
-            </a:r>
+              <a:t>Dicke superradiance, the Dicke ladder</a:t>
+            </a:r>
+          </a:p>
+          <a:p>
+            <a:r>
+              <a:rPr lang="en-US" dirty="0"/>
+              <a:t>Dipole-dipole interactions</a:t>
+            </a:r>
+          </a:p>
+          <a:p>
+            <a:r>
+              <a:rPr lang="en-US" dirty="0"/>
+              <a:t>Scattering length and Busch picture</a:t>
+            </a:r>
+          </a:p>
+        </p:txBody>
+      </p:sp>
+      <p:sp>
+        <p:nvSpPr>
+          <p:cNvPr id="4" name="Date Placeholder 3">
+            <a:extLst>
+              <a:ext uri="{FF2B5EF4-FFF2-40B4-BE49-F238E27FC236}">
+                <a16:creationId xmlns:a16="http://schemas.microsoft.com/office/drawing/2014/main" id="{605C85B1-B4B3-3E70-7CF4-39A9029C676E}"/>
+              </a:ext>
+            </a:extLst>
+          </p:cNvPr>
+          <p:cNvSpPr>
+            <a:spLocks noGrp="1"/>
+          </p:cNvSpPr>
+          <p:nvPr>
+            <p:ph type="dt" sz="half" idx="10"/>
+          </p:nvPr>
+        </p:nvSpPr>
+        <p:spPr/>
+        <p:txBody>
+          <a:bodyPr/>
+          <a:lstStyle/>
+          <a:p>
+            <a:fld id="{0294D60C-AFC1-4DF1-AAFE-C428D5996437}" type="datetime1">
+              <a:rPr lang="en-US" smtClean="0"/>
+              <a:t>5/26/2026</a:t>
+            </a:fld>
+            <a:endParaRPr lang="en-US"/>
+          </a:p>
+        </p:txBody>
+      </p:sp>
+      <p:sp>
+        <p:nvSpPr>
+          <p:cNvPr id="5" name="Footer Placeholder 4">
+            <a:extLst>
+              <a:ext uri="{FF2B5EF4-FFF2-40B4-BE49-F238E27FC236}">
+                <a16:creationId xmlns:a16="http://schemas.microsoft.com/office/drawing/2014/main" id="{A8EF4392-5A33-2109-520B-63CF31620795}"/>
+              </a:ext>
+            </a:extLst>
+          </p:cNvPr>
+          <p:cNvSpPr>
+            <a:spLocks noGrp="1"/>
+          </p:cNvSpPr>
+          <p:nvPr>
+            <p:ph type="ftr" sz="quarter" idx="11"/>
+          </p:nvPr>
+        </p:nvSpPr>
+        <p:spPr/>
+        <p:txBody>
+          <a:bodyPr/>
+          <a:lstStyle/>
+          <a:p>
+            <a:r>
+              <a:rPr lang="en-US"/>
+              <a:t>Light Scattering from Closely-Spaced Atom Pairs</a:t>
+            </a:r>
+          </a:p>
+        </p:txBody>
+      </p:sp>
+      <p:sp>
+        <p:nvSpPr>
+          <p:cNvPr id="6" name="Slide Number Placeholder 5">
+            <a:extLst>
+              <a:ext uri="{FF2B5EF4-FFF2-40B4-BE49-F238E27FC236}">
+                <a16:creationId xmlns:a16="http://schemas.microsoft.com/office/drawing/2014/main" id="{3EEF4A6B-C06D-0E49-61C1-C3962D93D187}"/>
+              </a:ext>
+            </a:extLst>
+          </p:cNvPr>
+          <p:cNvSpPr>
+            <a:spLocks noGrp="1"/>
+          </p:cNvSpPr>
+          <p:nvPr>
+            <p:ph type="sldNum" sz="quarter" idx="12"/>
+          </p:nvPr>
+        </p:nvSpPr>
+        <p:spPr/>
+        <p:txBody>
+          <a:bodyPr/>
+          <a:lstStyle/>
+          <a:p>
+            <a:fld id="{A18CFF8F-6617-428E-9314-96DE529C98C8}" type="slidenum">
+              <a:rPr lang="en-US" smtClean="0"/>
+              <a:t>4</a:t>
+            </a:fld>
+            <a:endParaRPr lang="en-US"/>
           </a:p>
         </p:txBody>
       </p:sp>
     </p:spTree>
     <p:extLst>
       <p:ext uri="{BB962C8B-B14F-4D97-AF65-F5344CB8AC3E}">
-        <p14:creationId xmlns:p14="http://schemas.microsoft.com/office/powerpoint/2010/main" val="848944730"/>
+        <p14:creationId xmlns:p14="http://schemas.microsoft.com/office/powerpoint/2010/main" val="4207490389"/>
       </p:ext>
     </p:extLst>
   </p:cSld>
@@ -3665,7 +6649,7 @@
           <p:cNvPr id="2" name="Title 1">
             <a:extLst>
               <a:ext uri="{FF2B5EF4-FFF2-40B4-BE49-F238E27FC236}">
-                <a16:creationId xmlns:a16="http://schemas.microsoft.com/office/drawing/2014/main" id="{479ED580-3180-C645-8730-3EF95CC66998}"/>
+                <a16:creationId xmlns:a16="http://schemas.microsoft.com/office/drawing/2014/main" id="{78444026-157F-9B7A-0CD1-7EB2E0E8F905}"/>
               </a:ext>
             </a:extLst>
           </p:cNvPr>
@@ -3681,39 +6665,1607 @@
           <a:bodyPr/>
           <a:lstStyle/>
           <a:p>
+            <a:r>
+              <a:rPr lang="en-US" dirty="0"/>
+              <a:t>Interactions in Light Scattering</a:t>
+            </a:r>
+          </a:p>
+        </p:txBody>
+      </p:sp>
+      <p:sp>
+        <p:nvSpPr>
+          <p:cNvPr id="3" name="Content Placeholder 2">
+            <a:extLst>
+              <a:ext uri="{FF2B5EF4-FFF2-40B4-BE49-F238E27FC236}">
+                <a16:creationId xmlns:a16="http://schemas.microsoft.com/office/drawing/2014/main" id="{6AF38AF4-4E96-7D6D-AD0C-99DBEDCF1E7D}"/>
+              </a:ext>
+            </a:extLst>
+          </p:cNvPr>
+          <p:cNvSpPr>
+            <a:spLocks noGrp="1"/>
+          </p:cNvSpPr>
+          <p:nvPr>
+            <p:ph idx="1"/>
+          </p:nvPr>
+        </p:nvSpPr>
+        <p:spPr>
+          <a:xfrm>
+            <a:off x="838200" y="1825625"/>
+            <a:ext cx="6526619" cy="4351338"/>
+          </a:xfrm>
+        </p:spPr>
+        <p:txBody>
+          <a:bodyPr/>
+          <a:lstStyle/>
+          <a:p>
+            <a:r>
+              <a:rPr lang="en-US" dirty="0"/>
+              <a:t>Condon region of the dipole-dipole interaction</a:t>
+            </a:r>
+          </a:p>
+          <a:p>
+            <a:r>
+              <a:rPr lang="en-US" dirty="0"/>
+              <a:t>Blue-detuned shielding</a:t>
+            </a:r>
+          </a:p>
+          <a:p>
+            <a:r>
+              <a:rPr lang="en-US" dirty="0"/>
+              <a:t>Interplay between the confinement, scattering length, and the dipole-dipole interaction</a:t>
+            </a:r>
+          </a:p>
+          <a:p>
+            <a:endParaRPr lang="en-US" dirty="0"/>
+          </a:p>
+          <a:p>
+            <a:endParaRPr lang="en-US" dirty="0"/>
+          </a:p>
+          <a:p>
+            <a:endParaRPr lang="en-US" dirty="0"/>
+          </a:p>
+        </p:txBody>
+      </p:sp>
+      <p:sp>
+        <p:nvSpPr>
+          <p:cNvPr id="4" name="Date Placeholder 3">
+            <a:extLst>
+              <a:ext uri="{FF2B5EF4-FFF2-40B4-BE49-F238E27FC236}">
+                <a16:creationId xmlns:a16="http://schemas.microsoft.com/office/drawing/2014/main" id="{EAE6C43B-6A76-54DD-3F62-025C23B5413F}"/>
+              </a:ext>
+            </a:extLst>
+          </p:cNvPr>
+          <p:cNvSpPr>
+            <a:spLocks noGrp="1"/>
+          </p:cNvSpPr>
+          <p:nvPr>
+            <p:ph type="dt" sz="half" idx="10"/>
+          </p:nvPr>
+        </p:nvSpPr>
+        <p:spPr/>
+        <p:txBody>
+          <a:bodyPr/>
+          <a:lstStyle/>
+          <a:p>
+            <a:fld id="{AD1BF92F-50A1-484D-81C5-1588E816C27C}" type="datetime1">
+              <a:rPr lang="en-US" smtClean="0"/>
+              <a:t>5/26/2026</a:t>
+            </a:fld>
             <a:endParaRPr lang="en-US"/>
           </a:p>
         </p:txBody>
       </p:sp>
       <p:sp>
         <p:nvSpPr>
-          <p:cNvPr id="3" name="Content Placeholder 2">
-            <a:extLst>
-              <a:ext uri="{FF2B5EF4-FFF2-40B4-BE49-F238E27FC236}">
-                <a16:creationId xmlns:a16="http://schemas.microsoft.com/office/drawing/2014/main" id="{A15E3401-E95F-334E-F9A4-BFED2F45D97A}"/>
-              </a:ext>
-            </a:extLst>
-          </p:cNvPr>
-          <p:cNvSpPr>
-            <a:spLocks noGrp="1"/>
-          </p:cNvSpPr>
-          <p:nvPr>
-            <p:ph idx="1"/>
-          </p:nvPr>
-        </p:nvSpPr>
-        <p:spPr/>
-        <p:txBody>
-          <a:bodyPr/>
-          <a:lstStyle/>
-          <a:p>
+          <p:cNvPr id="5" name="Footer Placeholder 4">
+            <a:extLst>
+              <a:ext uri="{FF2B5EF4-FFF2-40B4-BE49-F238E27FC236}">
+                <a16:creationId xmlns:a16="http://schemas.microsoft.com/office/drawing/2014/main" id="{8DA95F24-DA7B-0CB0-6061-D5CD935D2DA5}"/>
+              </a:ext>
+            </a:extLst>
+          </p:cNvPr>
+          <p:cNvSpPr>
+            <a:spLocks noGrp="1"/>
+          </p:cNvSpPr>
+          <p:nvPr>
+            <p:ph type="ftr" sz="quarter" idx="11"/>
+          </p:nvPr>
+        </p:nvSpPr>
+        <p:spPr/>
+        <p:txBody>
+          <a:bodyPr/>
+          <a:lstStyle/>
+          <a:p>
+            <a:r>
+              <a:rPr lang="en-US"/>
+              <a:t>Light Scattering from Closely-Spaced Atom Pairs</a:t>
+            </a:r>
+          </a:p>
+        </p:txBody>
+      </p:sp>
+      <p:sp>
+        <p:nvSpPr>
+          <p:cNvPr id="6" name="Slide Number Placeholder 5">
+            <a:extLst>
+              <a:ext uri="{FF2B5EF4-FFF2-40B4-BE49-F238E27FC236}">
+                <a16:creationId xmlns:a16="http://schemas.microsoft.com/office/drawing/2014/main" id="{C5C08833-FE08-0A5B-A70F-DA1C5FA9D8B9}"/>
+              </a:ext>
+            </a:extLst>
+          </p:cNvPr>
+          <p:cNvSpPr>
+            <a:spLocks noGrp="1"/>
+          </p:cNvSpPr>
+          <p:nvPr>
+            <p:ph type="sldNum" sz="quarter" idx="12"/>
+          </p:nvPr>
+        </p:nvSpPr>
+        <p:spPr/>
+        <p:txBody>
+          <a:bodyPr/>
+          <a:lstStyle/>
+          <a:p>
+            <a:fld id="{A18CFF8F-6617-428E-9314-96DE529C98C8}" type="slidenum">
+              <a:rPr lang="en-US" smtClean="0"/>
+              <a:t>5</a:t>
+            </a:fld>
             <a:endParaRPr lang="en-US"/>
           </a:p>
         </p:txBody>
       </p:sp>
+      <p:pic>
+        <p:nvPicPr>
+          <p:cNvPr id="7" name="Picture 6">
+            <a:extLst>
+              <a:ext uri="{FF2B5EF4-FFF2-40B4-BE49-F238E27FC236}">
+                <a16:creationId xmlns:a16="http://schemas.microsoft.com/office/drawing/2014/main" id="{17EFF148-093E-244E-7696-3AD9742558D9}"/>
+              </a:ext>
+            </a:extLst>
+          </p:cNvPr>
+          <p:cNvPicPr>
+            <a:picLocks noChangeAspect="1"/>
+          </p:cNvPicPr>
+          <p:nvPr/>
+        </p:nvPicPr>
+        <p:blipFill>
+          <a:blip r:embed="rId2"/>
+          <a:stretch>
+            <a:fillRect/>
+          </a:stretch>
+        </p:blipFill>
+        <p:spPr>
+          <a:xfrm>
+            <a:off x="7549849" y="1690688"/>
+            <a:ext cx="3577123" cy="4059902"/>
+          </a:xfrm>
+          <a:prstGeom prst="rect">
+            <a:avLst/>
+          </a:prstGeom>
+        </p:spPr>
+      </p:pic>
     </p:spTree>
     <p:extLst>
       <p:ext uri="{BB962C8B-B14F-4D97-AF65-F5344CB8AC3E}">
-        <p14:creationId xmlns:p14="http://schemas.microsoft.com/office/powerpoint/2010/main" val="1062870856"/>
+        <p14:creationId xmlns:p14="http://schemas.microsoft.com/office/powerpoint/2010/main" val="4231142911"/>
+      </p:ext>
+    </p:extLst>
+  </p:cSld>
+  <p:clrMapOvr>
+    <a:masterClrMapping/>
+  </p:clrMapOvr>
+</p:sld>
+</file>
+
+<file path=ppt/slides/slide6.xml><?xml version="1.0" encoding="utf-8"?>
+<p:sld xmlns:a="http://schemas.openxmlformats.org/drawingml/2006/main" xmlns:r="http://schemas.openxmlformats.org/officeDocument/2006/relationships" xmlns:p="http://schemas.openxmlformats.org/presentationml/2006/main">
+  <p:cSld>
+    <p:spTree>
+      <p:nvGrpSpPr>
+        <p:cNvPr id="1" name=""/>
+        <p:cNvGrpSpPr/>
+        <p:nvPr/>
+      </p:nvGrpSpPr>
+      <p:grpSpPr>
+        <a:xfrm>
+          <a:off x="0" y="0"/>
+          <a:ext cx="0" cy="0"/>
+          <a:chOff x="0" y="0"/>
+          <a:chExt cx="0" cy="0"/>
+        </a:xfrm>
+      </p:grpSpPr>
+      <p:sp>
+        <p:nvSpPr>
+          <p:cNvPr id="4" name="Title 3">
+            <a:extLst>
+              <a:ext uri="{FF2B5EF4-FFF2-40B4-BE49-F238E27FC236}">
+                <a16:creationId xmlns:a16="http://schemas.microsoft.com/office/drawing/2014/main" id="{F2FBFE03-C0D2-7B47-8AC1-1807B7DACD18}"/>
+              </a:ext>
+            </a:extLst>
+          </p:cNvPr>
+          <p:cNvSpPr>
+            <a:spLocks noGrp="1"/>
+          </p:cNvSpPr>
+          <p:nvPr>
+            <p:ph type="title"/>
+          </p:nvPr>
+        </p:nvSpPr>
+        <p:spPr/>
+        <p:txBody>
+          <a:bodyPr/>
+          <a:lstStyle/>
+          <a:p>
+            <a:r>
+              <a:rPr lang="en-US" dirty="0"/>
+              <a:t>Experiments and Results</a:t>
+            </a:r>
+          </a:p>
+        </p:txBody>
+      </p:sp>
+      <p:sp>
+        <p:nvSpPr>
+          <p:cNvPr id="5" name="Text Placeholder 4">
+            <a:extLst>
+              <a:ext uri="{FF2B5EF4-FFF2-40B4-BE49-F238E27FC236}">
+                <a16:creationId xmlns:a16="http://schemas.microsoft.com/office/drawing/2014/main" id="{37297B2A-C535-366F-01C3-1766D3E95AD4}"/>
+              </a:ext>
+            </a:extLst>
+          </p:cNvPr>
+          <p:cNvSpPr>
+            <a:spLocks noGrp="1"/>
+          </p:cNvSpPr>
+          <p:nvPr>
+            <p:ph type="body" idx="1"/>
+          </p:nvPr>
+        </p:nvSpPr>
+        <p:spPr/>
+        <p:txBody>
+          <a:bodyPr/>
+          <a:lstStyle/>
+          <a:p>
+            <a:r>
+              <a:rPr lang="en-US" dirty="0"/>
+              <a:t>Coherent and Incoherent Light Scattering by Single Atoms and Atom Pairs</a:t>
+            </a:r>
+          </a:p>
+        </p:txBody>
+      </p:sp>
+      <p:sp>
+        <p:nvSpPr>
+          <p:cNvPr id="6" name="Date Placeholder 5">
+            <a:extLst>
+              <a:ext uri="{FF2B5EF4-FFF2-40B4-BE49-F238E27FC236}">
+                <a16:creationId xmlns:a16="http://schemas.microsoft.com/office/drawing/2014/main" id="{C7CE018D-AC15-D51E-F233-C69C2FBADDCE}"/>
+              </a:ext>
+            </a:extLst>
+          </p:cNvPr>
+          <p:cNvSpPr>
+            <a:spLocks noGrp="1"/>
+          </p:cNvSpPr>
+          <p:nvPr>
+            <p:ph type="dt" sz="half" idx="10"/>
+          </p:nvPr>
+        </p:nvSpPr>
+        <p:spPr/>
+        <p:txBody>
+          <a:bodyPr/>
+          <a:lstStyle/>
+          <a:p>
+            <a:fld id="{92EEB00A-7316-4857-9712-8513A528C3C5}" type="datetime1">
+              <a:rPr lang="en-US" smtClean="0"/>
+              <a:t>5/26/2026</a:t>
+            </a:fld>
+            <a:endParaRPr lang="en-US"/>
+          </a:p>
+        </p:txBody>
+      </p:sp>
+      <p:sp>
+        <p:nvSpPr>
+          <p:cNvPr id="7" name="Footer Placeholder 6">
+            <a:extLst>
+              <a:ext uri="{FF2B5EF4-FFF2-40B4-BE49-F238E27FC236}">
+                <a16:creationId xmlns:a16="http://schemas.microsoft.com/office/drawing/2014/main" id="{4C2CE9C1-8FE3-29A6-BCBD-2D539D03224E}"/>
+              </a:ext>
+            </a:extLst>
+          </p:cNvPr>
+          <p:cNvSpPr>
+            <a:spLocks noGrp="1"/>
+          </p:cNvSpPr>
+          <p:nvPr>
+            <p:ph type="ftr" sz="quarter" idx="11"/>
+          </p:nvPr>
+        </p:nvSpPr>
+        <p:spPr/>
+        <p:txBody>
+          <a:bodyPr/>
+          <a:lstStyle/>
+          <a:p>
+            <a:r>
+              <a:rPr lang="en-US"/>
+              <a:t>Light Scattering from Closely-Spaced Atom Pairs</a:t>
+            </a:r>
+          </a:p>
+        </p:txBody>
+      </p:sp>
+      <p:sp>
+        <p:nvSpPr>
+          <p:cNvPr id="8" name="Slide Number Placeholder 7">
+            <a:extLst>
+              <a:ext uri="{FF2B5EF4-FFF2-40B4-BE49-F238E27FC236}">
+                <a16:creationId xmlns:a16="http://schemas.microsoft.com/office/drawing/2014/main" id="{BE152098-7956-6222-C935-04BFA691501F}"/>
+              </a:ext>
+            </a:extLst>
+          </p:cNvPr>
+          <p:cNvSpPr>
+            <a:spLocks noGrp="1"/>
+          </p:cNvSpPr>
+          <p:nvPr>
+            <p:ph type="sldNum" sz="quarter" idx="12"/>
+          </p:nvPr>
+        </p:nvSpPr>
+        <p:spPr/>
+        <p:txBody>
+          <a:bodyPr/>
+          <a:lstStyle/>
+          <a:p>
+            <a:fld id="{A18CFF8F-6617-428E-9314-96DE529C98C8}" type="slidenum">
+              <a:rPr lang="en-US" smtClean="0"/>
+              <a:t>6</a:t>
+            </a:fld>
+            <a:endParaRPr lang="en-US"/>
+          </a:p>
+        </p:txBody>
+      </p:sp>
+    </p:spTree>
+    <p:extLst>
+      <p:ext uri="{BB962C8B-B14F-4D97-AF65-F5344CB8AC3E}">
+        <p14:creationId xmlns:p14="http://schemas.microsoft.com/office/powerpoint/2010/main" val="775841907"/>
+      </p:ext>
+    </p:extLst>
+  </p:cSld>
+  <p:clrMapOvr>
+    <a:masterClrMapping/>
+  </p:clrMapOvr>
+</p:sld>
+</file>
+
+<file path=ppt/slides/slide7.xml><?xml version="1.0" encoding="utf-8"?>
+<p:sld xmlns:a="http://schemas.openxmlformats.org/drawingml/2006/main" xmlns:r="http://schemas.openxmlformats.org/officeDocument/2006/relationships" xmlns:p="http://schemas.openxmlformats.org/presentationml/2006/main">
+  <p:cSld>
+    <p:spTree>
+      <p:nvGrpSpPr>
+        <p:cNvPr id="1" name=""/>
+        <p:cNvGrpSpPr/>
+        <p:nvPr/>
+      </p:nvGrpSpPr>
+      <p:grpSpPr>
+        <a:xfrm>
+          <a:off x="0" y="0"/>
+          <a:ext cx="0" cy="0"/>
+          <a:chOff x="0" y="0"/>
+          <a:chExt cx="0" cy="0"/>
+        </a:xfrm>
+      </p:grpSpPr>
+      <p:sp>
+        <p:nvSpPr>
+          <p:cNvPr id="2" name="Title 1">
+            <a:extLst>
+              <a:ext uri="{FF2B5EF4-FFF2-40B4-BE49-F238E27FC236}">
+                <a16:creationId xmlns:a16="http://schemas.microsoft.com/office/drawing/2014/main" id="{86C9B9F2-D86B-77DA-F8E8-902434D16C1F}"/>
+              </a:ext>
+            </a:extLst>
+          </p:cNvPr>
+          <p:cNvSpPr>
+            <a:spLocks noGrp="1"/>
+          </p:cNvSpPr>
+          <p:nvPr>
+            <p:ph type="title"/>
+          </p:nvPr>
+        </p:nvSpPr>
+        <p:spPr/>
+        <p:txBody>
+          <a:bodyPr/>
+          <a:lstStyle/>
+          <a:p>
+            <a:r>
+              <a:rPr lang="en-US" dirty="0"/>
+              <a:t>Coherent vs Incoherent Light Scattering</a:t>
+            </a:r>
+          </a:p>
+        </p:txBody>
+      </p:sp>
+      <mc:AlternateContent xmlns:mc="http://schemas.openxmlformats.org/markup-compatibility/2006">
+        <mc:Choice xmlns:a14="http://schemas.microsoft.com/office/drawing/2010/main" Requires="a14">
+          <p:sp>
+            <p:nvSpPr>
+              <p:cNvPr id="3" name="Content Placeholder 2">
+                <a:extLst>
+                  <a:ext uri="{FF2B5EF4-FFF2-40B4-BE49-F238E27FC236}">
+                    <a16:creationId xmlns:a16="http://schemas.microsoft.com/office/drawing/2014/main" id="{D8BE3E0C-7D65-2B75-D1D2-CEF82E82BF1E}"/>
+                  </a:ext>
+                </a:extLst>
+              </p:cNvPr>
+              <p:cNvSpPr>
+                <a:spLocks noGrp="1"/>
+              </p:cNvSpPr>
+              <p:nvPr>
+                <p:ph sz="half" idx="1"/>
+              </p:nvPr>
+            </p:nvSpPr>
+            <p:spPr>
+              <a:xfrm>
+                <a:off x="838200" y="1825625"/>
+                <a:ext cx="4660056" cy="4351338"/>
+              </a:xfrm>
+            </p:spPr>
+            <p:txBody>
+              <a:bodyPr>
+                <a:noAutofit/>
+              </a:bodyPr>
+              <a:lstStyle/>
+              <a:p>
+                <a:r>
+                  <a:rPr lang="en-US" sz="2000" dirty="0"/>
+                  <a:t>Observed intensity</a:t>
+                </a:r>
+              </a:p>
+              <a:p>
+                <a:endParaRPr lang="en-US" sz="2000" dirty="0"/>
+              </a:p>
+              <a:p>
+                <a:endParaRPr lang="en-US" sz="2000" dirty="0"/>
+              </a:p>
+              <a:p>
+                <a:endParaRPr lang="en-US" sz="2000" dirty="0"/>
+              </a:p>
+              <a:p>
+                <a:r>
+                  <a:rPr lang="en-US" sz="2000" dirty="0"/>
+                  <a:t>Debye-Waller factor </a:t>
+                </a:r>
+                <a14:m>
+                  <m:oMath xmlns:m="http://schemas.openxmlformats.org/officeDocument/2006/math">
+                    <m:r>
+                      <m:rPr>
+                        <m:sty m:val="p"/>
+                      </m:rPr>
+                      <a:rPr lang="en-US" sz="2000" b="0" i="0" smtClean="0">
+                        <a:latin typeface="Cambria Math" panose="02040503050406030204" pitchFamily="18" charset="0"/>
+                      </a:rPr>
+                      <m:t>D</m:t>
+                    </m:r>
+                    <m:r>
+                      <a:rPr lang="en-US" sz="2000" b="0" i="1" smtClean="0">
+                        <a:latin typeface="Cambria Math" panose="02040503050406030204" pitchFamily="18" charset="0"/>
+                      </a:rPr>
+                      <m:t>=</m:t>
+                    </m:r>
+                    <m:sSup>
+                      <m:sSupPr>
+                        <m:ctrlPr>
+                          <a:rPr lang="en-US" sz="2000" i="1" smtClean="0">
+                            <a:latin typeface="Cambria Math" panose="02040503050406030204" pitchFamily="18" charset="0"/>
+                          </a:rPr>
+                        </m:ctrlPr>
+                      </m:sSupPr>
+                      <m:e>
+                        <m:r>
+                          <m:rPr>
+                            <m:sty m:val="p"/>
+                          </m:rPr>
+                          <a:rPr lang="en-US" sz="2000" b="0" i="0" smtClean="0">
+                            <a:latin typeface="Cambria Math" panose="02040503050406030204" pitchFamily="18" charset="0"/>
+                          </a:rPr>
+                          <m:t>exp</m:t>
+                        </m:r>
+                        <m:r>
+                          <a:rPr lang="en-US" sz="2000" b="0" i="1" smtClean="0">
+                            <a:latin typeface="Cambria Math" panose="02040503050406030204" pitchFamily="18" charset="0"/>
+                          </a:rPr>
+                          <m:t>(</m:t>
+                        </m:r>
+                        <m:r>
+                          <a:rPr lang="en-US" sz="2000" b="0" i="1" smtClean="0">
+                            <a:latin typeface="Cambria Math" panose="02040503050406030204" pitchFamily="18" charset="0"/>
+                          </a:rPr>
+                          <m:t>𝑄</m:t>
+                        </m:r>
+                        <m:r>
+                          <m:rPr>
+                            <m:sty m:val="p"/>
+                          </m:rPr>
+                          <a:rPr lang="el-GR" sz="2000" b="0" i="0" smtClean="0">
+                            <a:latin typeface="Cambria Math" panose="02040503050406030204" pitchFamily="18" charset="0"/>
+                          </a:rPr>
+                          <m:t>Δ</m:t>
+                        </m:r>
+                        <m:r>
+                          <m:rPr>
+                            <m:sty m:val="p"/>
+                          </m:rPr>
+                          <a:rPr lang="en-US" sz="2000" b="0" i="0" smtClean="0">
+                            <a:latin typeface="Cambria Math" panose="02040503050406030204" pitchFamily="18" charset="0"/>
+                          </a:rPr>
+                          <m:t>x</m:t>
+                        </m:r>
+                      </m:e>
+                      <m:sup>
+                        <m:r>
+                          <a:rPr lang="en-US" sz="2000" b="0" i="1" smtClean="0">
+                            <a:latin typeface="Cambria Math" panose="02040503050406030204" pitchFamily="18" charset="0"/>
+                          </a:rPr>
+                          <m:t>2</m:t>
+                        </m:r>
+                      </m:sup>
+                    </m:sSup>
+                    <m:r>
+                      <a:rPr lang="en-US" sz="2000" b="0" i="1" smtClean="0">
+                        <a:latin typeface="Cambria Math" panose="02040503050406030204" pitchFamily="18" charset="0"/>
+                      </a:rPr>
+                      <m:t>)</m:t>
+                    </m:r>
+                  </m:oMath>
+                </a14:m>
+                <a:endParaRPr lang="en-US" sz="2000" dirty="0"/>
+              </a:p>
+              <a:p>
+                <a:r>
+                  <a:rPr lang="en-US" sz="2000" dirty="0"/>
+                  <a:t>Structure factor S(Q) = S(θ, φ)</a:t>
+                </a:r>
+              </a:p>
+              <a:p>
+                <a:r>
+                  <a:rPr lang="en-US" sz="2000" dirty="0"/>
+                  <a:t>Coherent light destructively interferes</a:t>
+                </a:r>
+              </a:p>
+              <a:p>
+                <a:r>
+                  <a:rPr lang="en-US" sz="2000" dirty="0"/>
+                  <a:t>Does the presence of the trap matter?</a:t>
+                </a:r>
+              </a:p>
+            </p:txBody>
+          </p:sp>
+        </mc:Choice>
+        <mc:Fallback>
+          <p:sp>
+            <p:nvSpPr>
+              <p:cNvPr id="3" name="Content Placeholder 2">
+                <a:extLst>
+                  <a:ext uri="{FF2B5EF4-FFF2-40B4-BE49-F238E27FC236}">
+                    <a16:creationId xmlns:a16="http://schemas.microsoft.com/office/drawing/2014/main" id="{D8BE3E0C-7D65-2B75-D1D2-CEF82E82BF1E}"/>
+                  </a:ext>
+                </a:extLst>
+              </p:cNvPr>
+              <p:cNvSpPr>
+                <a:spLocks noGrp="1" noRot="1" noChangeAspect="1" noMove="1" noResize="1" noEditPoints="1" noAdjustHandles="1" noChangeArrowheads="1" noChangeShapeType="1" noTextEdit="1"/>
+              </p:cNvSpPr>
+              <p:nvPr>
+                <p:ph sz="half" idx="1"/>
+              </p:nvPr>
+            </p:nvSpPr>
+            <p:spPr>
+              <a:xfrm>
+                <a:off x="838200" y="1825625"/>
+                <a:ext cx="4660056" cy="4351338"/>
+              </a:xfrm>
+              <a:blipFill>
+                <a:blip r:embed="rId3"/>
+                <a:stretch>
+                  <a:fillRect l="-1178" t="-1261"/>
+                </a:stretch>
+              </a:blipFill>
+            </p:spPr>
+            <p:txBody>
+              <a:bodyPr/>
+              <a:lstStyle/>
+              <a:p>
+                <a:r>
+                  <a:rPr lang="en-US">
+                    <a:noFill/>
+                  </a:rPr>
+                  <a:t> </a:t>
+                </a:r>
+              </a:p>
+            </p:txBody>
+          </p:sp>
+        </mc:Fallback>
+      </mc:AlternateContent>
+      <p:sp>
+        <p:nvSpPr>
+          <p:cNvPr id="4" name="Date Placeholder 3">
+            <a:extLst>
+              <a:ext uri="{FF2B5EF4-FFF2-40B4-BE49-F238E27FC236}">
+                <a16:creationId xmlns:a16="http://schemas.microsoft.com/office/drawing/2014/main" id="{65565643-5680-E56C-EE06-3EBB1798A425}"/>
+              </a:ext>
+            </a:extLst>
+          </p:cNvPr>
+          <p:cNvSpPr>
+            <a:spLocks noGrp="1"/>
+          </p:cNvSpPr>
+          <p:nvPr>
+            <p:ph type="dt" sz="half" idx="10"/>
+          </p:nvPr>
+        </p:nvSpPr>
+        <p:spPr/>
+        <p:txBody>
+          <a:bodyPr/>
+          <a:lstStyle/>
+          <a:p>
+            <a:fld id="{4CABDE37-A3C8-4B9D-8836-9DACBCDB21F0}" type="datetime1">
+              <a:rPr lang="en-US" smtClean="0"/>
+              <a:t>5/26/2026</a:t>
+            </a:fld>
+            <a:endParaRPr lang="en-US"/>
+          </a:p>
+        </p:txBody>
+      </p:sp>
+      <p:sp>
+        <p:nvSpPr>
+          <p:cNvPr id="5" name="Footer Placeholder 4">
+            <a:extLst>
+              <a:ext uri="{FF2B5EF4-FFF2-40B4-BE49-F238E27FC236}">
+                <a16:creationId xmlns:a16="http://schemas.microsoft.com/office/drawing/2014/main" id="{F3F0AD16-AC7B-70FC-8EDF-2C811997EA24}"/>
+              </a:ext>
+            </a:extLst>
+          </p:cNvPr>
+          <p:cNvSpPr>
+            <a:spLocks noGrp="1"/>
+          </p:cNvSpPr>
+          <p:nvPr>
+            <p:ph type="ftr" sz="quarter" idx="11"/>
+          </p:nvPr>
+        </p:nvSpPr>
+        <p:spPr/>
+        <p:txBody>
+          <a:bodyPr/>
+          <a:lstStyle/>
+          <a:p>
+            <a:r>
+              <a:rPr lang="en-US"/>
+              <a:t>Light Scattering from Closely-Spaced Atom Pairs</a:t>
+            </a:r>
+          </a:p>
+        </p:txBody>
+      </p:sp>
+      <p:sp>
+        <p:nvSpPr>
+          <p:cNvPr id="6" name="Slide Number Placeholder 5">
+            <a:extLst>
+              <a:ext uri="{FF2B5EF4-FFF2-40B4-BE49-F238E27FC236}">
+                <a16:creationId xmlns:a16="http://schemas.microsoft.com/office/drawing/2014/main" id="{E7151628-BB51-16EB-EDF4-6F139B9C1B2C}"/>
+              </a:ext>
+            </a:extLst>
+          </p:cNvPr>
+          <p:cNvSpPr>
+            <a:spLocks noGrp="1"/>
+          </p:cNvSpPr>
+          <p:nvPr>
+            <p:ph type="sldNum" sz="quarter" idx="12"/>
+          </p:nvPr>
+        </p:nvSpPr>
+        <p:spPr/>
+        <p:txBody>
+          <a:bodyPr/>
+          <a:lstStyle/>
+          <a:p>
+            <a:fld id="{A18CFF8F-6617-428E-9314-96DE529C98C8}" type="slidenum">
+              <a:rPr lang="en-US" smtClean="0"/>
+              <a:t>7</a:t>
+            </a:fld>
+            <a:endParaRPr lang="en-US"/>
+          </a:p>
+        </p:txBody>
+      </p:sp>
+      <p:pic>
+        <p:nvPicPr>
+          <p:cNvPr id="13" name="Picture 12">
+            <a:extLst>
+              <a:ext uri="{FF2B5EF4-FFF2-40B4-BE49-F238E27FC236}">
+                <a16:creationId xmlns:a16="http://schemas.microsoft.com/office/drawing/2014/main" id="{B79675A7-F0AF-6B5B-6141-E0D74715CA8E}"/>
+              </a:ext>
+            </a:extLst>
+          </p:cNvPr>
+          <p:cNvPicPr>
+            <a:picLocks noChangeAspect="1"/>
+          </p:cNvPicPr>
+          <p:nvPr/>
+        </p:nvPicPr>
+        <p:blipFill>
+          <a:blip r:embed="rId4"/>
+          <a:srcRect t="36539"/>
+          <a:stretch>
+            <a:fillRect/>
+          </a:stretch>
+        </p:blipFill>
+        <p:spPr>
+          <a:xfrm>
+            <a:off x="1100194" y="2190672"/>
+            <a:ext cx="3814405" cy="885661"/>
+          </a:xfrm>
+          <a:prstGeom prst="rect">
+            <a:avLst/>
+          </a:prstGeom>
+        </p:spPr>
+      </p:pic>
+      <p:pic>
+        <p:nvPicPr>
+          <p:cNvPr id="16" name="Picture 15">
+            <a:extLst>
+              <a:ext uri="{FF2B5EF4-FFF2-40B4-BE49-F238E27FC236}">
+                <a16:creationId xmlns:a16="http://schemas.microsoft.com/office/drawing/2014/main" id="{390B2A7C-12D4-66AF-A885-56709F050387}"/>
+              </a:ext>
+            </a:extLst>
+          </p:cNvPr>
+          <p:cNvPicPr>
+            <a:picLocks noChangeAspect="1"/>
+          </p:cNvPicPr>
+          <p:nvPr/>
+        </p:nvPicPr>
+        <p:blipFill>
+          <a:blip r:embed="rId5"/>
+          <a:stretch>
+            <a:fillRect/>
+          </a:stretch>
+        </p:blipFill>
+        <p:spPr>
+          <a:xfrm>
+            <a:off x="9056549" y="2383920"/>
+            <a:ext cx="2489791" cy="3793043"/>
+          </a:xfrm>
+          <a:prstGeom prst="rect">
+            <a:avLst/>
+          </a:prstGeom>
+        </p:spPr>
+      </p:pic>
+      <p:grpSp>
+        <p:nvGrpSpPr>
+          <p:cNvPr id="30" name="Group 29">
+            <a:extLst>
+              <a:ext uri="{FF2B5EF4-FFF2-40B4-BE49-F238E27FC236}">
+                <a16:creationId xmlns:a16="http://schemas.microsoft.com/office/drawing/2014/main" id="{8AB6DA60-AB0E-8BC5-B04C-BCCF982EA0EC}"/>
+              </a:ext>
+            </a:extLst>
+          </p:cNvPr>
+          <p:cNvGrpSpPr/>
+          <p:nvPr/>
+        </p:nvGrpSpPr>
+        <p:grpSpPr>
+          <a:xfrm>
+            <a:off x="5614903" y="2790954"/>
+            <a:ext cx="3324999" cy="2420679"/>
+            <a:chOff x="5731550" y="3540980"/>
+            <a:chExt cx="3324999" cy="2420679"/>
+          </a:xfrm>
+        </p:grpSpPr>
+        <p:pic>
+          <p:nvPicPr>
+            <p:cNvPr id="28" name="Picture 27">
+              <a:extLst>
+                <a:ext uri="{FF2B5EF4-FFF2-40B4-BE49-F238E27FC236}">
+                  <a16:creationId xmlns:a16="http://schemas.microsoft.com/office/drawing/2014/main" id="{9493F4A8-A586-0159-0DE4-88F3F7D103D2}"/>
+                </a:ext>
+              </a:extLst>
+            </p:cNvPr>
+            <p:cNvPicPr>
+              <a:picLocks noChangeAspect="1"/>
+            </p:cNvPicPr>
+            <p:nvPr/>
+          </p:nvPicPr>
+          <p:blipFill>
+            <a:blip r:embed="rId6"/>
+            <a:stretch>
+              <a:fillRect/>
+            </a:stretch>
+          </p:blipFill>
+          <p:spPr>
+            <a:xfrm>
+              <a:off x="5882220" y="3540980"/>
+              <a:ext cx="3174329" cy="2420679"/>
+            </a:xfrm>
+            <a:prstGeom prst="rect">
+              <a:avLst/>
+            </a:prstGeom>
+          </p:spPr>
+        </p:pic>
+        <p:sp>
+          <p:nvSpPr>
+            <p:cNvPr id="21" name="TextBox 20">
+              <a:extLst>
+                <a:ext uri="{FF2B5EF4-FFF2-40B4-BE49-F238E27FC236}">
+                  <a16:creationId xmlns:a16="http://schemas.microsoft.com/office/drawing/2014/main" id="{8B73DB27-7467-6875-2FDB-55C2E4C932FB}"/>
+                </a:ext>
+              </a:extLst>
+            </p:cNvPr>
+            <p:cNvSpPr txBox="1"/>
+            <p:nvPr/>
+          </p:nvSpPr>
+          <p:spPr>
+            <a:xfrm>
+              <a:off x="5731550" y="3826359"/>
+              <a:ext cx="970522" cy="584775"/>
+            </a:xfrm>
+            <a:prstGeom prst="rect">
+              <a:avLst/>
+            </a:prstGeom>
+            <a:noFill/>
+          </p:spPr>
+          <p:txBody>
+            <a:bodyPr wrap="none" rtlCol="0">
+              <a:spAutoFit/>
+            </a:bodyPr>
+            <a:lstStyle/>
+            <a:p>
+              <a:r>
+                <a:rPr lang="en-US" sz="1600" dirty="0"/>
+                <a:t>Mott </a:t>
+              </a:r>
+            </a:p>
+            <a:p>
+              <a:r>
+                <a:rPr lang="en-US" sz="1600" dirty="0"/>
+                <a:t>insulator</a:t>
+              </a:r>
+            </a:p>
+          </p:txBody>
+        </p:sp>
+      </p:grpSp>
+    </p:spTree>
+    <p:extLst>
+      <p:ext uri="{BB962C8B-B14F-4D97-AF65-F5344CB8AC3E}">
+        <p14:creationId xmlns:p14="http://schemas.microsoft.com/office/powerpoint/2010/main" val="638478936"/>
+      </p:ext>
+    </p:extLst>
+  </p:cSld>
+  <p:clrMapOvr>
+    <a:masterClrMapping/>
+  </p:clrMapOvr>
+</p:sld>
+</file>
+
+<file path=ppt/slides/slide8.xml><?xml version="1.0" encoding="utf-8"?>
+<p:sld xmlns:a="http://schemas.openxmlformats.org/drawingml/2006/main" xmlns:r="http://schemas.openxmlformats.org/officeDocument/2006/relationships" xmlns:p="http://schemas.openxmlformats.org/presentationml/2006/main">
+  <p:cSld>
+    <p:spTree>
+      <p:nvGrpSpPr>
+        <p:cNvPr id="1" name="">
+          <a:extLst>
+            <a:ext uri="{FF2B5EF4-FFF2-40B4-BE49-F238E27FC236}">
+              <a16:creationId xmlns:a16="http://schemas.microsoft.com/office/drawing/2014/main" id="{5DF3B4FA-0521-564A-175F-CA4872E5336D}"/>
+            </a:ext>
+          </a:extLst>
+        </p:cNvPr>
+        <p:cNvGrpSpPr/>
+        <p:nvPr/>
+      </p:nvGrpSpPr>
+      <p:grpSpPr>
+        <a:xfrm>
+          <a:off x="0" y="0"/>
+          <a:ext cx="0" cy="0"/>
+          <a:chOff x="0" y="0"/>
+          <a:chExt cx="0" cy="0"/>
+        </a:xfrm>
+      </p:grpSpPr>
+      <p:sp>
+        <p:nvSpPr>
+          <p:cNvPr id="2" name="Title 1">
+            <a:extLst>
+              <a:ext uri="{FF2B5EF4-FFF2-40B4-BE49-F238E27FC236}">
+                <a16:creationId xmlns:a16="http://schemas.microsoft.com/office/drawing/2014/main" id="{E65657CF-1F40-0A17-8B0D-641A79BC55CB}"/>
+              </a:ext>
+            </a:extLst>
+          </p:cNvPr>
+          <p:cNvSpPr>
+            <a:spLocks noGrp="1"/>
+          </p:cNvSpPr>
+          <p:nvPr>
+            <p:ph type="title"/>
+          </p:nvPr>
+        </p:nvSpPr>
+        <p:spPr/>
+        <p:txBody>
+          <a:bodyPr/>
+          <a:lstStyle/>
+          <a:p>
+            <a:r>
+              <a:rPr lang="en-US" dirty="0"/>
+              <a:t>No Trap Needed for Coherent Scattering</a:t>
+            </a:r>
+          </a:p>
+        </p:txBody>
+      </p:sp>
+      <p:sp>
+        <p:nvSpPr>
+          <p:cNvPr id="3" name="Content Placeholder 2">
+            <a:extLst>
+              <a:ext uri="{FF2B5EF4-FFF2-40B4-BE49-F238E27FC236}">
+                <a16:creationId xmlns:a16="http://schemas.microsoft.com/office/drawing/2014/main" id="{9FECEBD9-5C44-5173-39FC-13F206BF911D}"/>
+              </a:ext>
+            </a:extLst>
+          </p:cNvPr>
+          <p:cNvSpPr>
+            <a:spLocks noGrp="1"/>
+          </p:cNvSpPr>
+          <p:nvPr>
+            <p:ph sz="half" idx="1"/>
+          </p:nvPr>
+        </p:nvSpPr>
+        <p:spPr>
+          <a:xfrm>
+            <a:off x="838200" y="1825625"/>
+            <a:ext cx="7015716" cy="4351338"/>
+          </a:xfrm>
+        </p:spPr>
+        <p:txBody>
+          <a:bodyPr>
+            <a:normAutofit/>
+          </a:bodyPr>
+          <a:lstStyle/>
+          <a:p>
+            <a:pPr marL="0" indent="0">
+              <a:buNone/>
+            </a:pPr>
+            <a:r>
+              <a:rPr lang="en-US" sz="2400" dirty="0"/>
+              <a:t>No; the light is coherent even without a trap!</a:t>
+            </a:r>
+          </a:p>
+        </p:txBody>
+      </p:sp>
+      <p:sp>
+        <p:nvSpPr>
+          <p:cNvPr id="12" name="Content Placeholder 11">
+            <a:extLst>
+              <a:ext uri="{FF2B5EF4-FFF2-40B4-BE49-F238E27FC236}">
+                <a16:creationId xmlns:a16="http://schemas.microsoft.com/office/drawing/2014/main" id="{7CF18824-2D84-B3FB-11EE-69AFF25EC9DB}"/>
+              </a:ext>
+            </a:extLst>
+          </p:cNvPr>
+          <p:cNvSpPr>
+            <a:spLocks noGrp="1"/>
+          </p:cNvSpPr>
+          <p:nvPr>
+            <p:ph sz="half" idx="2"/>
+          </p:nvPr>
+        </p:nvSpPr>
+        <p:spPr>
+          <a:xfrm>
+            <a:off x="8136411" y="5433065"/>
+            <a:ext cx="2920409" cy="754358"/>
+          </a:xfrm>
+          <a:solidFill>
+            <a:schemeClr val="accent3">
+              <a:lumMod val="20000"/>
+              <a:lumOff val="80000"/>
+            </a:schemeClr>
+          </a:solidFill>
+        </p:spPr>
+        <p:txBody>
+          <a:bodyPr>
+            <a:normAutofit/>
+          </a:bodyPr>
+          <a:lstStyle/>
+          <a:p>
+            <a:pPr marL="0" indent="0">
+              <a:buNone/>
+            </a:pPr>
+            <a:r>
+              <a:rPr lang="en-US" sz="2400" b="1" dirty="0"/>
+              <a:t>What happens with two atoms?</a:t>
+            </a:r>
+          </a:p>
+          <a:p>
+            <a:endParaRPr lang="en-US" sz="2400" dirty="0"/>
+          </a:p>
+        </p:txBody>
+      </p:sp>
+      <p:sp>
+        <p:nvSpPr>
+          <p:cNvPr id="4" name="Date Placeholder 3">
+            <a:extLst>
+              <a:ext uri="{FF2B5EF4-FFF2-40B4-BE49-F238E27FC236}">
+                <a16:creationId xmlns:a16="http://schemas.microsoft.com/office/drawing/2014/main" id="{CD08B4AD-5AC7-A39C-6B2D-FD417C301355}"/>
+              </a:ext>
+            </a:extLst>
+          </p:cNvPr>
+          <p:cNvSpPr>
+            <a:spLocks noGrp="1"/>
+          </p:cNvSpPr>
+          <p:nvPr>
+            <p:ph type="dt" sz="half" idx="10"/>
+          </p:nvPr>
+        </p:nvSpPr>
+        <p:spPr/>
+        <p:txBody>
+          <a:bodyPr/>
+          <a:lstStyle/>
+          <a:p>
+            <a:fld id="{4CABDE37-A3C8-4B9D-8836-9DACBCDB21F0}" type="datetime1">
+              <a:rPr lang="en-US" smtClean="0"/>
+              <a:t>5/26/2026</a:t>
+            </a:fld>
+            <a:endParaRPr lang="en-US"/>
+          </a:p>
+        </p:txBody>
+      </p:sp>
+      <p:sp>
+        <p:nvSpPr>
+          <p:cNvPr id="5" name="Footer Placeholder 4">
+            <a:extLst>
+              <a:ext uri="{FF2B5EF4-FFF2-40B4-BE49-F238E27FC236}">
+                <a16:creationId xmlns:a16="http://schemas.microsoft.com/office/drawing/2014/main" id="{56647481-E326-6C9F-F402-E10ABEC758CA}"/>
+              </a:ext>
+            </a:extLst>
+          </p:cNvPr>
+          <p:cNvSpPr>
+            <a:spLocks noGrp="1"/>
+          </p:cNvSpPr>
+          <p:nvPr>
+            <p:ph type="ftr" sz="quarter" idx="11"/>
+          </p:nvPr>
+        </p:nvSpPr>
+        <p:spPr/>
+        <p:txBody>
+          <a:bodyPr/>
+          <a:lstStyle/>
+          <a:p>
+            <a:r>
+              <a:rPr lang="en-US"/>
+              <a:t>Light Scattering from Closely-Spaced Atom Pairs</a:t>
+            </a:r>
+          </a:p>
+        </p:txBody>
+      </p:sp>
+      <p:sp>
+        <p:nvSpPr>
+          <p:cNvPr id="6" name="Slide Number Placeholder 5">
+            <a:extLst>
+              <a:ext uri="{FF2B5EF4-FFF2-40B4-BE49-F238E27FC236}">
+                <a16:creationId xmlns:a16="http://schemas.microsoft.com/office/drawing/2014/main" id="{57D47DD1-5441-453C-8015-CDE21246C622}"/>
+              </a:ext>
+            </a:extLst>
+          </p:cNvPr>
+          <p:cNvSpPr>
+            <a:spLocks noGrp="1"/>
+          </p:cNvSpPr>
+          <p:nvPr>
+            <p:ph type="sldNum" sz="quarter" idx="12"/>
+          </p:nvPr>
+        </p:nvSpPr>
+        <p:spPr/>
+        <p:txBody>
+          <a:bodyPr/>
+          <a:lstStyle/>
+          <a:p>
+            <a:fld id="{A18CFF8F-6617-428E-9314-96DE529C98C8}" type="slidenum">
+              <a:rPr lang="en-US" smtClean="0"/>
+              <a:t>8</a:t>
+            </a:fld>
+            <a:endParaRPr lang="en-US"/>
+          </a:p>
+        </p:txBody>
+      </p:sp>
+      <p:grpSp>
+        <p:nvGrpSpPr>
+          <p:cNvPr id="27" name="Group 26">
+            <a:extLst>
+              <a:ext uri="{FF2B5EF4-FFF2-40B4-BE49-F238E27FC236}">
+                <a16:creationId xmlns:a16="http://schemas.microsoft.com/office/drawing/2014/main" id="{5CEFFE6A-D336-1782-5639-D91DD848E5EA}"/>
+              </a:ext>
+            </a:extLst>
+          </p:cNvPr>
+          <p:cNvGrpSpPr/>
+          <p:nvPr/>
+        </p:nvGrpSpPr>
+        <p:grpSpPr>
+          <a:xfrm>
+            <a:off x="1129585" y="2246468"/>
+            <a:ext cx="9436366" cy="4065432"/>
+            <a:chOff x="816687" y="2486155"/>
+            <a:chExt cx="8266614" cy="3604125"/>
+          </a:xfrm>
+        </p:grpSpPr>
+        <p:grpSp>
+          <p:nvGrpSpPr>
+            <p:cNvPr id="26" name="Group 25">
+              <a:extLst>
+                <a:ext uri="{FF2B5EF4-FFF2-40B4-BE49-F238E27FC236}">
+                  <a16:creationId xmlns:a16="http://schemas.microsoft.com/office/drawing/2014/main" id="{3A354167-EBDB-351B-07DB-6B96D5AFE21A}"/>
+                </a:ext>
+              </a:extLst>
+            </p:cNvPr>
+            <p:cNvGrpSpPr/>
+            <p:nvPr/>
+          </p:nvGrpSpPr>
+          <p:grpSpPr>
+            <a:xfrm>
+              <a:off x="816687" y="2486155"/>
+              <a:ext cx="5783656" cy="3604125"/>
+              <a:chOff x="816687" y="2486155"/>
+              <a:chExt cx="5783656" cy="3604125"/>
+            </a:xfrm>
+          </p:grpSpPr>
+          <p:pic>
+            <p:nvPicPr>
+              <p:cNvPr id="9" name="Picture 8">
+                <a:extLst>
+                  <a:ext uri="{FF2B5EF4-FFF2-40B4-BE49-F238E27FC236}">
+                    <a16:creationId xmlns:a16="http://schemas.microsoft.com/office/drawing/2014/main" id="{4714880F-5CA8-DF6F-D47D-5591F3A11D51}"/>
+                  </a:ext>
+                </a:extLst>
+              </p:cNvPr>
+              <p:cNvPicPr>
+                <a:picLocks noChangeAspect="1"/>
+              </p:cNvPicPr>
+              <p:nvPr/>
+            </p:nvPicPr>
+            <p:blipFill>
+              <a:blip r:embed="rId3"/>
+              <a:stretch>
+                <a:fillRect/>
+              </a:stretch>
+            </p:blipFill>
+            <p:spPr>
+              <a:xfrm>
+                <a:off x="1221318" y="2486155"/>
+                <a:ext cx="5379025" cy="3030278"/>
+              </a:xfrm>
+              <a:prstGeom prst="rect">
+                <a:avLst/>
+              </a:prstGeom>
+            </p:spPr>
+          </p:pic>
+          <p:sp>
+            <p:nvSpPr>
+              <p:cNvPr id="13" name="TextBox 12">
+                <a:extLst>
+                  <a:ext uri="{FF2B5EF4-FFF2-40B4-BE49-F238E27FC236}">
+                    <a16:creationId xmlns:a16="http://schemas.microsoft.com/office/drawing/2014/main" id="{4244EBF3-4B65-D6A5-0B52-3C8F230F0595}"/>
+                  </a:ext>
+                </a:extLst>
+              </p:cNvPr>
+              <p:cNvSpPr txBox="1"/>
+              <p:nvPr/>
+            </p:nvSpPr>
+            <p:spPr>
+              <a:xfrm>
+                <a:off x="816687" y="5782503"/>
+                <a:ext cx="809261" cy="307777"/>
+              </a:xfrm>
+              <a:prstGeom prst="rect">
+                <a:avLst/>
+              </a:prstGeom>
+              <a:noFill/>
+            </p:spPr>
+            <p:txBody>
+              <a:bodyPr wrap="none" rtlCol="0">
+                <a:spAutoFit/>
+              </a:bodyPr>
+              <a:lstStyle/>
+              <a:p>
+                <a:r>
+                  <a:rPr lang="en-US" sz="1400" dirty="0"/>
+                  <a:t>Trap ON</a:t>
+                </a:r>
+              </a:p>
+            </p:txBody>
+          </p:sp>
+          <p:sp>
+            <p:nvSpPr>
+              <p:cNvPr id="14" name="TextBox 13">
+                <a:extLst>
+                  <a:ext uri="{FF2B5EF4-FFF2-40B4-BE49-F238E27FC236}">
+                    <a16:creationId xmlns:a16="http://schemas.microsoft.com/office/drawing/2014/main" id="{8A372000-5CBE-9D3A-00B3-3C418C283A47}"/>
+                  </a:ext>
+                </a:extLst>
+              </p:cNvPr>
+              <p:cNvSpPr txBox="1"/>
+              <p:nvPr/>
+            </p:nvSpPr>
+            <p:spPr>
+              <a:xfrm>
+                <a:off x="2048618" y="5769171"/>
+                <a:ext cx="871777" cy="307777"/>
+              </a:xfrm>
+              <a:prstGeom prst="rect">
+                <a:avLst/>
+              </a:prstGeom>
+              <a:noFill/>
+            </p:spPr>
+            <p:txBody>
+              <a:bodyPr wrap="none" rtlCol="0">
+                <a:spAutoFit/>
+              </a:bodyPr>
+              <a:lstStyle/>
+              <a:p>
+                <a:r>
+                  <a:rPr lang="en-US" sz="1400" dirty="0"/>
+                  <a:t>Trap OFF</a:t>
+                </a:r>
+              </a:p>
+            </p:txBody>
+          </p:sp>
+          <p:cxnSp>
+            <p:nvCxnSpPr>
+              <p:cNvPr id="16" name="Straight Arrow Connector 15">
+                <a:extLst>
+                  <a:ext uri="{FF2B5EF4-FFF2-40B4-BE49-F238E27FC236}">
+                    <a16:creationId xmlns:a16="http://schemas.microsoft.com/office/drawing/2014/main" id="{01C0E05E-A2E0-6170-C18C-15093BC1E17C}"/>
+                  </a:ext>
+                </a:extLst>
+              </p:cNvPr>
+              <p:cNvCxnSpPr/>
+              <p:nvPr/>
+            </p:nvCxnSpPr>
+            <p:spPr>
+              <a:xfrm flipV="1">
+                <a:off x="1221317" y="4784651"/>
+                <a:ext cx="657102" cy="921489"/>
+              </a:xfrm>
+              <a:prstGeom prst="straightConnector1">
+                <a:avLst/>
+              </a:prstGeom>
+              <a:ln>
+                <a:tailEnd type="triangle"/>
+              </a:ln>
+            </p:spPr>
+            <p:style>
+              <a:lnRef idx="2">
+                <a:schemeClr val="accent1"/>
+              </a:lnRef>
+              <a:fillRef idx="0">
+                <a:schemeClr val="accent1"/>
+              </a:fillRef>
+              <a:effectRef idx="1">
+                <a:schemeClr val="accent1"/>
+              </a:effectRef>
+              <a:fontRef idx="minor">
+                <a:schemeClr val="tx1"/>
+              </a:fontRef>
+            </p:style>
+          </p:cxnSp>
+          <p:cxnSp>
+            <p:nvCxnSpPr>
+              <p:cNvPr id="17" name="Straight Arrow Connector 16">
+                <a:extLst>
+                  <a:ext uri="{FF2B5EF4-FFF2-40B4-BE49-F238E27FC236}">
+                    <a16:creationId xmlns:a16="http://schemas.microsoft.com/office/drawing/2014/main" id="{E97FA8D1-2A35-3F42-5055-E19DA1578E77}"/>
+                  </a:ext>
+                </a:extLst>
+              </p:cNvPr>
+              <p:cNvCxnSpPr>
+                <a:cxnSpLocks/>
+              </p:cNvCxnSpPr>
+              <p:nvPr/>
+            </p:nvCxnSpPr>
+            <p:spPr>
+              <a:xfrm flipH="1" flipV="1">
+                <a:off x="2209800" y="4784651"/>
+                <a:ext cx="91289" cy="460744"/>
+              </a:xfrm>
+              <a:prstGeom prst="straightConnector1">
+                <a:avLst/>
+              </a:prstGeom>
+              <a:ln>
+                <a:tailEnd type="triangle"/>
+              </a:ln>
+            </p:spPr>
+            <p:style>
+              <a:lnRef idx="2">
+                <a:schemeClr val="accent1"/>
+              </a:lnRef>
+              <a:fillRef idx="0">
+                <a:schemeClr val="accent1"/>
+              </a:fillRef>
+              <a:effectRef idx="1">
+                <a:schemeClr val="accent1"/>
+              </a:effectRef>
+              <a:fontRef idx="minor">
+                <a:schemeClr val="tx1"/>
+              </a:fontRef>
+            </p:style>
+          </p:cxnSp>
+          <p:cxnSp>
+            <p:nvCxnSpPr>
+              <p:cNvPr id="21" name="Straight Arrow Connector 20">
+                <a:extLst>
+                  <a:ext uri="{FF2B5EF4-FFF2-40B4-BE49-F238E27FC236}">
+                    <a16:creationId xmlns:a16="http://schemas.microsoft.com/office/drawing/2014/main" id="{EB9B827E-8624-9DD1-0E24-0ADB525EE196}"/>
+                  </a:ext>
+                </a:extLst>
+              </p:cNvPr>
+              <p:cNvCxnSpPr>
+                <a:cxnSpLocks/>
+              </p:cNvCxnSpPr>
+              <p:nvPr/>
+            </p:nvCxnSpPr>
+            <p:spPr>
+              <a:xfrm flipH="1" flipV="1">
+                <a:off x="2376784" y="5581520"/>
+                <a:ext cx="45720" cy="228600"/>
+              </a:xfrm>
+              <a:prstGeom prst="straightConnector1">
+                <a:avLst/>
+              </a:prstGeom>
+              <a:ln>
+                <a:headEnd type="none" w="med" len="med"/>
+                <a:tailEnd type="none" w="med" len="med"/>
+              </a:ln>
+            </p:spPr>
+            <p:style>
+              <a:lnRef idx="2">
+                <a:schemeClr val="accent1"/>
+              </a:lnRef>
+              <a:fillRef idx="0">
+                <a:schemeClr val="accent1"/>
+              </a:fillRef>
+              <a:effectRef idx="1">
+                <a:schemeClr val="accent1"/>
+              </a:effectRef>
+              <a:fontRef idx="minor">
+                <a:schemeClr val="tx1"/>
+              </a:fontRef>
+            </p:style>
+          </p:cxnSp>
+        </p:grpSp>
+        <p:pic>
+          <p:nvPicPr>
+            <p:cNvPr id="25" name="Picture 24">
+              <a:extLst>
+                <a:ext uri="{FF2B5EF4-FFF2-40B4-BE49-F238E27FC236}">
+                  <a16:creationId xmlns:a16="http://schemas.microsoft.com/office/drawing/2014/main" id="{7055BFA4-E74C-97E7-B077-79842E045F3D}"/>
+                </a:ext>
+              </a:extLst>
+            </p:cNvPr>
+            <p:cNvPicPr>
+              <a:picLocks noChangeAspect="1"/>
+            </p:cNvPicPr>
+            <p:nvPr/>
+          </p:nvPicPr>
+          <p:blipFill>
+            <a:blip r:embed="rId4">
+              <a:extLst>
+                <a:ext uri="{28A0092B-C50C-407E-A947-70E740481C1C}">
+                  <a14:useLocalDpi xmlns:a14="http://schemas.microsoft.com/office/drawing/2010/main" val="0"/>
+                </a:ext>
+              </a:extLst>
+            </a:blip>
+            <a:stretch>
+              <a:fillRect/>
+            </a:stretch>
+          </p:blipFill>
+          <p:spPr>
+            <a:xfrm>
+              <a:off x="6908638" y="2738269"/>
+              <a:ext cx="2174663" cy="2276754"/>
+            </a:xfrm>
+            <a:prstGeom prst="rect">
+              <a:avLst/>
+            </a:prstGeom>
+          </p:spPr>
+        </p:pic>
+      </p:grpSp>
+    </p:spTree>
+    <p:extLst>
+      <p:ext uri="{BB962C8B-B14F-4D97-AF65-F5344CB8AC3E}">
+        <p14:creationId xmlns:p14="http://schemas.microsoft.com/office/powerpoint/2010/main" val="2887781466"/>
+      </p:ext>
+    </p:extLst>
+  </p:cSld>
+  <p:clrMapOvr>
+    <a:masterClrMapping/>
+  </p:clrMapOvr>
+</p:sld>
+</file>
+
+<file path=ppt/slides/slide9.xml><?xml version="1.0" encoding="utf-8"?>
+<p:sld xmlns:a="http://schemas.openxmlformats.org/drawingml/2006/main" xmlns:r="http://schemas.openxmlformats.org/officeDocument/2006/relationships" xmlns:p="http://schemas.openxmlformats.org/presentationml/2006/main">
+  <p:cSld>
+    <p:spTree>
+      <p:nvGrpSpPr>
+        <p:cNvPr id="1" name=""/>
+        <p:cNvGrpSpPr/>
+        <p:nvPr/>
+      </p:nvGrpSpPr>
+      <p:grpSpPr>
+        <a:xfrm>
+          <a:off x="0" y="0"/>
+          <a:ext cx="0" cy="0"/>
+          <a:chOff x="0" y="0"/>
+          <a:chExt cx="0" cy="0"/>
+        </a:xfrm>
+      </p:grpSpPr>
+      <p:sp>
+        <p:nvSpPr>
+          <p:cNvPr id="2" name="Title 1">
+            <a:extLst>
+              <a:ext uri="{FF2B5EF4-FFF2-40B4-BE49-F238E27FC236}">
+                <a16:creationId xmlns:a16="http://schemas.microsoft.com/office/drawing/2014/main" id="{496F35EE-8585-A552-0F56-A9AC6DA7CE23}"/>
+              </a:ext>
+            </a:extLst>
+          </p:cNvPr>
+          <p:cNvSpPr>
+            <a:spLocks noGrp="1"/>
+          </p:cNvSpPr>
+          <p:nvPr>
+            <p:ph type="title"/>
+          </p:nvPr>
+        </p:nvSpPr>
+        <p:spPr/>
+        <p:txBody>
+          <a:bodyPr/>
+          <a:lstStyle/>
+          <a:p>
+            <a:r>
+              <a:rPr lang="en-US" dirty="0"/>
+              <a:t>Scattering from Closely-Spaced Pairs</a:t>
+            </a:r>
+          </a:p>
+        </p:txBody>
+      </p:sp>
+      <p:sp>
+        <p:nvSpPr>
+          <p:cNvPr id="3" name="Content Placeholder 2">
+            <a:extLst>
+              <a:ext uri="{FF2B5EF4-FFF2-40B4-BE49-F238E27FC236}">
+                <a16:creationId xmlns:a16="http://schemas.microsoft.com/office/drawing/2014/main" id="{455C1E21-ACD0-5E7A-425E-B49C9F0CCFF8}"/>
+              </a:ext>
+            </a:extLst>
+          </p:cNvPr>
+          <p:cNvSpPr>
+            <a:spLocks noGrp="1"/>
+          </p:cNvSpPr>
+          <p:nvPr>
+            <p:ph idx="1"/>
+          </p:nvPr>
+        </p:nvSpPr>
+        <p:spPr/>
+        <p:txBody>
+          <a:bodyPr/>
+          <a:lstStyle/>
+          <a:p>
+            <a:r>
+              <a:rPr lang="en-US" dirty="0"/>
+              <a:t>Mott insulator with a core of doubly occupied sites</a:t>
+            </a:r>
+          </a:p>
+          <a:p>
+            <a:r>
+              <a:rPr lang="en-US" dirty="0"/>
+              <a:t>Remove single atoms to a near-dark state</a:t>
+            </a:r>
+          </a:p>
+          <a:p>
+            <a:endParaRPr lang="en-US" dirty="0"/>
+          </a:p>
+        </p:txBody>
+      </p:sp>
+      <p:sp>
+        <p:nvSpPr>
+          <p:cNvPr id="4" name="Date Placeholder 3">
+            <a:extLst>
+              <a:ext uri="{FF2B5EF4-FFF2-40B4-BE49-F238E27FC236}">
+                <a16:creationId xmlns:a16="http://schemas.microsoft.com/office/drawing/2014/main" id="{6799FA72-2829-65F7-A13E-243D8342DFA6}"/>
+              </a:ext>
+            </a:extLst>
+          </p:cNvPr>
+          <p:cNvSpPr>
+            <a:spLocks noGrp="1"/>
+          </p:cNvSpPr>
+          <p:nvPr>
+            <p:ph type="dt" sz="half" idx="10"/>
+          </p:nvPr>
+        </p:nvSpPr>
+        <p:spPr/>
+        <p:txBody>
+          <a:bodyPr/>
+          <a:lstStyle/>
+          <a:p>
+            <a:fld id="{8C64C45F-07F1-4B0C-AEA1-B5BF383FC892}" type="datetime1">
+              <a:rPr lang="en-US" smtClean="0"/>
+              <a:t>5/26/2026</a:t>
+            </a:fld>
+            <a:endParaRPr lang="en-US"/>
+          </a:p>
+        </p:txBody>
+      </p:sp>
+      <p:sp>
+        <p:nvSpPr>
+          <p:cNvPr id="5" name="Footer Placeholder 4">
+            <a:extLst>
+              <a:ext uri="{FF2B5EF4-FFF2-40B4-BE49-F238E27FC236}">
+                <a16:creationId xmlns:a16="http://schemas.microsoft.com/office/drawing/2014/main" id="{D57C9923-684A-A860-65AD-493F85C6AE37}"/>
+              </a:ext>
+            </a:extLst>
+          </p:cNvPr>
+          <p:cNvSpPr>
+            <a:spLocks noGrp="1"/>
+          </p:cNvSpPr>
+          <p:nvPr>
+            <p:ph type="ftr" sz="quarter" idx="11"/>
+          </p:nvPr>
+        </p:nvSpPr>
+        <p:spPr/>
+        <p:txBody>
+          <a:bodyPr/>
+          <a:lstStyle/>
+          <a:p>
+            <a:r>
+              <a:rPr lang="en-US"/>
+              <a:t>Light Scattering from Closely-Spaced Atom Pairs</a:t>
+            </a:r>
+          </a:p>
+        </p:txBody>
+      </p:sp>
+      <p:sp>
+        <p:nvSpPr>
+          <p:cNvPr id="6" name="Slide Number Placeholder 5">
+            <a:extLst>
+              <a:ext uri="{FF2B5EF4-FFF2-40B4-BE49-F238E27FC236}">
+                <a16:creationId xmlns:a16="http://schemas.microsoft.com/office/drawing/2014/main" id="{CA9EF424-4BC6-5D6E-A3C2-D10DDDFB97AD}"/>
+              </a:ext>
+            </a:extLst>
+          </p:cNvPr>
+          <p:cNvSpPr>
+            <a:spLocks noGrp="1"/>
+          </p:cNvSpPr>
+          <p:nvPr>
+            <p:ph type="sldNum" sz="quarter" idx="12"/>
+          </p:nvPr>
+        </p:nvSpPr>
+        <p:spPr/>
+        <p:txBody>
+          <a:bodyPr/>
+          <a:lstStyle/>
+          <a:p>
+            <a:fld id="{A18CFF8F-6617-428E-9314-96DE529C98C8}" type="slidenum">
+              <a:rPr lang="en-US" smtClean="0"/>
+              <a:t>9</a:t>
+            </a:fld>
+            <a:endParaRPr lang="en-US"/>
+          </a:p>
+        </p:txBody>
+      </p:sp>
+      <p:pic>
+        <p:nvPicPr>
+          <p:cNvPr id="14" name="Picture 13">
+            <a:extLst>
+              <a:ext uri="{FF2B5EF4-FFF2-40B4-BE49-F238E27FC236}">
+                <a16:creationId xmlns:a16="http://schemas.microsoft.com/office/drawing/2014/main" id="{62D30B28-1253-591E-4631-AAAE9EA4042B}"/>
+              </a:ext>
+            </a:extLst>
+          </p:cNvPr>
+          <p:cNvPicPr>
+            <a:picLocks noChangeAspect="1"/>
+          </p:cNvPicPr>
+          <p:nvPr/>
+        </p:nvPicPr>
+        <p:blipFill>
+          <a:blip r:embed="rId2">
+            <a:extLst>
+              <a:ext uri="{28A0092B-C50C-407E-A947-70E740481C1C}">
+                <a14:useLocalDpi xmlns:a14="http://schemas.microsoft.com/office/drawing/2010/main" val="0"/>
+              </a:ext>
+            </a:extLst>
+          </a:blip>
+          <a:stretch>
+            <a:fillRect/>
+          </a:stretch>
+        </p:blipFill>
+        <p:spPr>
+          <a:xfrm>
+            <a:off x="2721935" y="2975688"/>
+            <a:ext cx="6748130" cy="2783712"/>
+          </a:xfrm>
+          <a:prstGeom prst="rect">
+            <a:avLst/>
+          </a:prstGeom>
+        </p:spPr>
+      </p:pic>
+    </p:spTree>
+    <p:extLst>
+      <p:ext uri="{BB962C8B-B14F-4D97-AF65-F5344CB8AC3E}">
+        <p14:creationId xmlns:p14="http://schemas.microsoft.com/office/powerpoint/2010/main" val="74432105"/>
       </p:ext>
     </p:extLst>
   </p:cSld>
@@ -4036,4 +8588,319 @@
     </a:ext>
   </a:extLst>
 </a:theme>
+</file>
+
+<file path=ppt/theme/theme2.xml><?xml version="1.0" encoding="utf-8"?>
+<a:theme xmlns:a="http://schemas.openxmlformats.org/drawingml/2006/main" name="Office Theme">
+  <a:themeElements>
+    <a:clrScheme name="Office">
+      <a:dk1>
+        <a:sysClr val="windowText" lastClr="000000"/>
+      </a:dk1>
+      <a:lt1>
+        <a:sysClr val="window" lastClr="FFFFFF"/>
+      </a:lt1>
+      <a:dk2>
+        <a:srgbClr val="0E2841"/>
+      </a:dk2>
+      <a:lt2>
+        <a:srgbClr val="E8E8E8"/>
+      </a:lt2>
+      <a:accent1>
+        <a:srgbClr val="156082"/>
+      </a:accent1>
+      <a:accent2>
+        <a:srgbClr val="E97132"/>
+      </a:accent2>
+      <a:accent3>
+        <a:srgbClr val="196B24"/>
+      </a:accent3>
+      <a:accent4>
+        <a:srgbClr val="0F9ED5"/>
+      </a:accent4>
+      <a:accent5>
+        <a:srgbClr val="A02B93"/>
+      </a:accent5>
+      <a:accent6>
+        <a:srgbClr val="4EA72E"/>
+      </a:accent6>
+      <a:hlink>
+        <a:srgbClr val="467886"/>
+      </a:hlink>
+      <a:folHlink>
+        <a:srgbClr val="96607D"/>
+      </a:folHlink>
+    </a:clrScheme>
+    <a:fontScheme name="Office">
+      <a:majorFont>
+        <a:latin typeface="Aptos Display" panose="02110004020202020204"/>
+        <a:ea typeface=""/>
+        <a:cs typeface=""/>
+        <a:font script="Jpan" typeface="游ゴシック Light"/>
+        <a:font script="Hang" typeface="맑은 고딕"/>
+        <a:font script="Hans" typeface="等线 Light"/>
+        <a:font script="Hant" typeface="新細明體"/>
+        <a:font script="Arab" typeface="Times New Roman"/>
+        <a:font script="Hebr" typeface="Times New Roman"/>
+        <a:font script="Thai" typeface="Angsana New"/>
+        <a:font script="Ethi" typeface="Nyala"/>
+        <a:font script="Beng" typeface="Vrinda"/>
+        <a:font script="Gujr" typeface="Shruti"/>
+        <a:font script="Khmr" typeface="MoolBoran"/>
+        <a:font script="Knda" typeface="Tunga"/>
+        <a:font script="Guru" typeface="Raavi"/>
+        <a:font script="Cans" typeface="Euphemia"/>
+        <a:font script="Cher" typeface="Plantagenet Cherokee"/>
+        <a:font script="Yiii" typeface="Microsoft Yi Baiti"/>
+        <a:font script="Tibt" typeface="Microsoft Himalaya"/>
+        <a:font script="Thaa" typeface="MV Boli"/>
+        <a:font script="Deva" typeface="Mangal"/>
+        <a:font script="Telu" typeface="Gautami"/>
+        <a:font script="Taml" typeface="Latha"/>
+        <a:font script="Syrc" typeface="Estrangelo Edessa"/>
+        <a:font script="Orya" typeface="Kalinga"/>
+        <a:font script="Mlym" typeface="Kartika"/>
+        <a:font script="Laoo" typeface="DokChampa"/>
+        <a:font script="Sinh" typeface="Iskoola Pota"/>
+        <a:font script="Mong" typeface="Mongolian Baiti"/>
+        <a:font script="Viet" typeface="Times New Roman"/>
+        <a:font script="Uigh" typeface="Microsoft Uighur"/>
+        <a:font script="Geor" typeface="Sylfaen"/>
+        <a:font script="Armn" typeface="Arial"/>
+        <a:font script="Bugi" typeface="Leelawadee UI"/>
+        <a:font script="Bopo" typeface="Microsoft JhengHei"/>
+        <a:font script="Java" typeface="Javanese Text"/>
+        <a:font script="Lisu" typeface="Segoe UI"/>
+        <a:font script="Mymr" typeface="Myanmar Text"/>
+        <a:font script="Nkoo" typeface="Ebrima"/>
+        <a:font script="Olck" typeface="Nirmala UI"/>
+        <a:font script="Osma" typeface="Ebrima"/>
+        <a:font script="Phag" typeface="Phagspa"/>
+        <a:font script="Syrn" typeface="Estrangelo Edessa"/>
+        <a:font script="Syrj" typeface="Estrangelo Edessa"/>
+        <a:font script="Syre" typeface="Estrangelo Edessa"/>
+        <a:font script="Sora" typeface="Nirmala UI"/>
+        <a:font script="Tale" typeface="Microsoft Tai Le"/>
+        <a:font script="Talu" typeface="Microsoft New Tai Lue"/>
+        <a:font script="Tfng" typeface="Ebrima"/>
+      </a:majorFont>
+      <a:minorFont>
+        <a:latin typeface="Aptos" panose="02110004020202020204"/>
+        <a:ea typeface=""/>
+        <a:cs typeface=""/>
+        <a:font script="Jpan" typeface="游ゴシック"/>
+        <a:font script="Hang" typeface="맑은 고딕"/>
+        <a:font script="Hans" typeface="等线"/>
+        <a:font script="Hant" typeface="新細明體"/>
+        <a:font script="Arab" typeface="Arial"/>
+        <a:font script="Hebr" typeface="Arial"/>
+        <a:font script="Thai" typeface="Cordia New"/>
+        <a:font script="Ethi" typeface="Nyala"/>
+        <a:font script="Beng" typeface="Vrinda"/>
+        <a:font script="Gujr" typeface="Shruti"/>
+        <a:font script="Khmr" typeface="DaunPenh"/>
+        <a:font script="Knda" typeface="Tunga"/>
+        <a:font script="Guru" typeface="Raavi"/>
+        <a:font script="Cans" typeface="Euphemia"/>
+        <a:font script="Cher" typeface="Plantagenet Cherokee"/>
+        <a:font script="Yiii" typeface="Microsoft Yi Baiti"/>
+        <a:font script="Tibt" typeface="Microsoft Himalaya"/>
+        <a:font script="Thaa" typeface="MV Boli"/>
+        <a:font script="Deva" typeface="Mangal"/>
+        <a:font script="Telu" typeface="Gautami"/>
+        <a:font script="Taml" typeface="Latha"/>
+        <a:font script="Syrc" typeface="Estrangelo Edessa"/>
+        <a:font script="Orya" typeface="Kalinga"/>
+        <a:font script="Mlym" typeface="Kartika"/>
+        <a:font script="Laoo" typeface="DokChampa"/>
+        <a:font script="Sinh" typeface="Iskoola Pota"/>
+        <a:font script="Mong" typeface="Mongolian Baiti"/>
+        <a:font script="Viet" typeface="Arial"/>
+        <a:font script="Uigh" typeface="Microsoft Uighur"/>
+        <a:font script="Geor" typeface="Sylfaen"/>
+        <a:font script="Armn" typeface="Arial"/>
+        <a:font script="Bugi" typeface="Leelawadee UI"/>
+        <a:font script="Bopo" typeface="Microsoft JhengHei"/>
+        <a:font script="Java" typeface="Javanese Text"/>
+        <a:font script="Lisu" typeface="Segoe UI"/>
+        <a:font script="Mymr" typeface="Myanmar Text"/>
+        <a:font script="Nkoo" typeface="Ebrima"/>
+        <a:font script="Olck" typeface="Nirmala UI"/>
+        <a:font script="Osma" typeface="Ebrima"/>
+        <a:font script="Phag" typeface="Phagspa"/>
+        <a:font script="Syrn" typeface="Estrangelo Edessa"/>
+        <a:font script="Syrj" typeface="Estrangelo Edessa"/>
+        <a:font script="Syre" typeface="Estrangelo Edessa"/>
+        <a:font script="Sora" typeface="Nirmala UI"/>
+        <a:font script="Tale" typeface="Microsoft Tai Le"/>
+        <a:font script="Talu" typeface="Microsoft New Tai Lue"/>
+        <a:font script="Tfng" typeface="Ebrima"/>
+      </a:minorFont>
+    </a:fontScheme>
+    <a:fmtScheme name="Office">
+      <a:fillStyleLst>
+        <a:solidFill>
+          <a:schemeClr val="phClr"/>
+        </a:solidFill>
+        <a:gradFill rotWithShape="1">
+          <a:gsLst>
+            <a:gs pos="0">
+              <a:schemeClr val="phClr">
+                <a:lumMod val="110000"/>
+                <a:satMod val="105000"/>
+                <a:tint val="67000"/>
+              </a:schemeClr>
+            </a:gs>
+            <a:gs pos="50000">
+              <a:schemeClr val="phClr">
+                <a:lumMod val="105000"/>
+                <a:satMod val="103000"/>
+                <a:tint val="73000"/>
+              </a:schemeClr>
+            </a:gs>
+            <a:gs pos="100000">
+              <a:schemeClr val="phClr">
+                <a:lumMod val="105000"/>
+                <a:satMod val="109000"/>
+                <a:tint val="81000"/>
+              </a:schemeClr>
+            </a:gs>
+          </a:gsLst>
+          <a:lin ang="5400000" scaled="0"/>
+        </a:gradFill>
+        <a:gradFill rotWithShape="1">
+          <a:gsLst>
+            <a:gs pos="0">
+              <a:schemeClr val="phClr">
+                <a:satMod val="103000"/>
+                <a:lumMod val="102000"/>
+                <a:tint val="94000"/>
+              </a:schemeClr>
+            </a:gs>
+            <a:gs pos="50000">
+              <a:schemeClr val="phClr">
+                <a:satMod val="110000"/>
+                <a:lumMod val="100000"/>
+                <a:shade val="100000"/>
+              </a:schemeClr>
+            </a:gs>
+            <a:gs pos="100000">
+              <a:schemeClr val="phClr">
+                <a:lumMod val="99000"/>
+                <a:satMod val="120000"/>
+                <a:shade val="78000"/>
+              </a:schemeClr>
+            </a:gs>
+          </a:gsLst>
+          <a:lin ang="5400000" scaled="0"/>
+        </a:gradFill>
+      </a:fillStyleLst>
+      <a:lnStyleLst>
+        <a:ln w="12700" cap="flat" cmpd="sng" algn="ctr">
+          <a:solidFill>
+            <a:schemeClr val="phClr"/>
+          </a:solidFill>
+          <a:prstDash val="solid"/>
+          <a:miter lim="800000"/>
+        </a:ln>
+        <a:ln w="19050" cap="flat" cmpd="sng" algn="ctr">
+          <a:solidFill>
+            <a:schemeClr val="phClr"/>
+          </a:solidFill>
+          <a:prstDash val="solid"/>
+          <a:miter lim="800000"/>
+        </a:ln>
+        <a:ln w="25400" cap="flat" cmpd="sng" algn="ctr">
+          <a:solidFill>
+            <a:schemeClr val="phClr"/>
+          </a:solidFill>
+          <a:prstDash val="solid"/>
+          <a:miter lim="800000"/>
+        </a:ln>
+      </a:lnStyleLst>
+      <a:effectStyleLst>
+        <a:effectStyle>
+          <a:effectLst/>
+        </a:effectStyle>
+        <a:effectStyle>
+          <a:effectLst/>
+        </a:effectStyle>
+        <a:effectStyle>
+          <a:effectLst>
+            <a:outerShdw blurRad="57150" dist="19050" dir="5400000" algn="ctr" rotWithShape="0">
+              <a:srgbClr val="000000">
+                <a:alpha val="63000"/>
+              </a:srgbClr>
+            </a:outerShdw>
+          </a:effectLst>
+        </a:effectStyle>
+      </a:effectStyleLst>
+      <a:bgFillStyleLst>
+        <a:solidFill>
+          <a:schemeClr val="phClr"/>
+        </a:solidFill>
+        <a:solidFill>
+          <a:schemeClr val="phClr">
+            <a:tint val="95000"/>
+            <a:satMod val="170000"/>
+          </a:schemeClr>
+        </a:solidFill>
+        <a:gradFill rotWithShape="1">
+          <a:gsLst>
+            <a:gs pos="0">
+              <a:schemeClr val="phClr">
+                <a:tint val="93000"/>
+                <a:satMod val="150000"/>
+                <a:shade val="98000"/>
+                <a:lumMod val="102000"/>
+              </a:schemeClr>
+            </a:gs>
+            <a:gs pos="50000">
+              <a:schemeClr val="phClr">
+                <a:tint val="98000"/>
+                <a:satMod val="130000"/>
+                <a:shade val="90000"/>
+                <a:lumMod val="103000"/>
+              </a:schemeClr>
+            </a:gs>
+            <a:gs pos="100000">
+              <a:schemeClr val="phClr">
+                <a:shade val="63000"/>
+                <a:satMod val="120000"/>
+              </a:schemeClr>
+            </a:gs>
+          </a:gsLst>
+          <a:lin ang="5400000" scaled="0"/>
+        </a:gradFill>
+      </a:bgFillStyleLst>
+    </a:fmtScheme>
+  </a:themeElements>
+  <a:objectDefaults>
+    <a:lnDef>
+      <a:spPr/>
+      <a:bodyPr/>
+      <a:lstStyle/>
+      <a:style>
+        <a:lnRef idx="2">
+          <a:schemeClr val="accent1"/>
+        </a:lnRef>
+        <a:fillRef idx="0">
+          <a:schemeClr val="accent1"/>
+        </a:fillRef>
+        <a:effectRef idx="1">
+          <a:schemeClr val="accent1"/>
+        </a:effectRef>
+        <a:fontRef idx="minor">
+          <a:schemeClr val="tx1"/>
+        </a:fontRef>
+      </a:style>
+    </a:lnDef>
+  </a:objectDefaults>
+  <a:extraClrSchemeLst/>
+  <a:extLst>
+    <a:ext uri="{05A4C25C-085E-4340-85A3-A5531E510DB2}">
+      <thm15:themeFamily xmlns:thm15="http://schemas.microsoft.com/office/thememl/2012/main" name="Office Theme" id="{2E142A2C-CD16-42D6-873A-C26D2A0506FA}" vid="{1BDDFF52-6CD6-40A5-AB3C-68EB2F1E4D0A}"/>
+    </a:ext>
+  </a:extLst>
+</a:theme>
 </file>